--- a/docs/lecture/ab-testing-theory.pptx
+++ b/docs/lecture/ab-testing-theory.pptx
@@ -173,14 +173,14 @@
   <p:extLst>
     <p:ext uri="{521415D9-36F7-43E2-AB2F-B90AF26B5E84}">
       <p14:sectionLst xmlns:p14="http://schemas.microsoft.com/office/powerpoint/2010/main">
-        <p14:section name="오프닝" id="{faccf9b7-cad1-4573-ec78-76e9a31cc5fe}">
+        <p14:section name="오프닝" id="{fee87a49-c2c4-7142-7121-6969668c8f01}">
           <p14:sldIdLst>
             <p14:sldId id="256"/>
             <p14:sldId id="257"/>
             <p14:sldId id="258"/>
           </p14:sldIdLst>
         </p14:section>
-        <p14:section name="Ch1 실험과 인과추론" id="{01c80c07-b7f0-1199-1d5b-64520c2e8e84}">
+        <p14:section name="Ch1 실험과 인과추론" id="{b2edc23f-bc3d-f5a3-53b7-9fa2d98d8656}">
           <p14:sldIdLst>
             <p14:sldId id="259"/>
             <p14:sldId id="260"/>
@@ -194,7 +194,7 @@
             <p14:sldId id="268"/>
           </p14:sldIdLst>
         </p14:section>
-        <p14:section name="Ch2 설계 구성요소" id="{ba2180bd-6241-9b9d-c184-412ce9f1b53e}">
+        <p14:section name="Ch2 설계 구성요소" id="{678aeeb4-f8ef-9251-9a58-31f84e7e74d6}">
           <p14:sldIdLst>
             <p14:sldId id="269"/>
             <p14:sldId id="270"/>
@@ -221,7 +221,7 @@
             <p14:sldId id="291"/>
           </p14:sldIdLst>
         </p14:section>
-        <p14:section name="Ch3 실행과 분석" id="{45efd5c4-d72f-d0bb-37e2-f59955860aed}">
+        <p14:section name="Ch3 실행과 분석" id="{dcc7dd1c-14a4-6564-3695-3a1c7f09b86b}">
           <p14:sldIdLst>
             <p14:sldId id="292"/>
             <p14:sldId id="293"/>
@@ -239,7 +239,7 @@
             <p14:sldId id="306"/>
           </p14:sldIdLst>
         </p14:section>
-        <p14:section name="Ch4 함정과 고급 설계" id="{7d947e38-d16d-3487-f666-8521658c4224}">
+        <p14:section name="Ch4 함정과 고급 설계" id="{f39511ab-45f0-752c-9a2f-7ce756e5c525}">
           <p14:sldIdLst>
             <p14:sldId id="305"/>
             <p14:sldId id="307"/>
@@ -251,7 +251,7 @@
             <p14:sldId id="313"/>
           </p14:sldIdLst>
         </p14:section>
-        <p14:section name="Ch5 사례와 결정" id="{cc4e7c55-06bb-cb16-321b-1a3584ce0ad5}">
+        <p14:section name="Ch5 사례와 결정" id="{7aca82e3-1328-7371-f4f5-9b0609e6efbb}">
           <p14:sldIdLst>
             <p14:sldId id="314"/>
             <p14:sldId id="315"/>
@@ -5216,7 +5216,7 @@
           <a:p>
             <a:r>
               <a:rPr lang="en-US" dirty="0"/>
-              <a:t>위키 05편. Experimental Unit은 처치를 독립적으로 받는 단위, Randomization Unit은 무작위 배정이 일어나는 단위이고 온라인 실험에서는 보통 같습니다. 세션 단위를 쓸지는 '이 변화를 본 사용자가 다음 방문에서 행동이 달라질까(이월 효과)'로 판단합니다. 페이지·요청 단위는 응답 속도처럼 요청 하나의 성능을 볼 때 쓰고, 지표도 같은 단위로 두며, 같은 사용자 관측끼리 닮아 있어 독립으로 계산하면 불확실성이 과소평가됩니다. Microsoft 실험 대부분은 사용자 단위입니다.</a:t>
+              <a:t>위키 04편. Experimental Unit은 처치를 독립적으로 받는 단위, Randomization Unit은 무작위 배정이 일어나는 단위이고 온라인 실험에서는 보통 같습니다. 세션 단위를 쓸지는 '이 변화를 본 사용자가 다음 방문에서 행동이 달라질까(이월 효과)'로 판단합니다. 페이지·요청 단위는 응답 속도처럼 요청 하나의 성능을 볼 때 쓰고, 지표도 같은 단위로 두며, 같은 사용자 관측끼리 닮아 있어 독립으로 계산하면 불확실성이 과소평가됩니다. Microsoft 실험 대부분은 사용자 단위입니다.</a:t>
             </a:r>
             <a:endParaRPr lang="en-US" dirty="0"/>
           </a:p>
@@ -5304,7 +5304,7 @@
           <a:p>
             <a:r>
               <a:rPr lang="en-US" dirty="0"/>
-              <a:t>위키 05편 3.2·3.7. 같은 사용자를 실험 내내 같은 그룹에 두는 것을 Sticky Assignment라고 합니다. 서비스가 알아볼 수 있는 건 계정·기기·쿠키 같은 식별자뿐이라, 쿠키를 지우거나 기기를 바꾸거나 로그인 전후로 식별자가 바뀌면 같은 사람이 두 그룹에 걸칠 수 있습니다. 식별자는 개인에게 연결되므로 보안에도 신경 써야 합니다.</a:t>
+              <a:t>위키 04편 3.2·3.7. 같은 사용자를 실험 내내 같은 그룹에 두는 것을 Sticky Assignment라고 합니다. 서비스가 알아볼 수 있는 건 계정·기기·쿠키 같은 식별자뿐이라, 쿠키를 지우거나 기기를 바꾸거나 로그인 전후로 식별자가 바뀌면 같은 사람이 두 그룹에 걸칠 수 있습니다. 식별자는 개인에게 연결되므로 보안에도 신경 써야 합니다.</a:t>
             </a:r>
             <a:endParaRPr lang="en-US" dirty="0"/>
           </a:p>
@@ -5392,7 +5392,7 @@
           <a:p>
             <a:r>
               <a:rPr lang="en-US" dirty="0"/>
-              <a:t>배정된 전원을 비교하는 ITT(Intent-to-Treat)는 안전하지만, 처치를 볼 수 없는 사람까지 섞여 효과가 희석됩니다. 트리거 분석은 변경이 실제로 영향을 줄 수 있는 조건을 충족한 사람만 비교하는데, 대조군에서도 '실험군이었다면 노출됐을' 사람을 같은 기준으로 골라야 합니다(counterfactual logging). 실험군의 노출자와 미노출자를 비교하면 선택 편향입니다. 위키 05편 3.5: 배정(Assignment)과 노출(Exposure)을 구분해 기록합니다. 수치는 교육용 예시입니다.</a:t>
+              <a:t>배정된 전원을 비교하는 ITT(Intent-to-Treat)는 안전하지만, 처치를 볼 수 없는 사람까지 섞여 효과가 희석됩니다. 트리거 분석은 변경이 실제로 영향을 줄 수 있는 조건을 충족한 사람만 비교하는데, 대조군에서도 '실험군이었다면 노출됐을' 사람을 같은 기준으로 골라야 합니다(counterfactual logging). 실험군의 노출자와 미노출자를 비교하면 선택 편향입니다. 위키 04편 3.5: 배정(Assignment)과 노출(Exposure)을 구분해 기록합니다. 수치는 교육용 예시입니다.</a:t>
             </a:r>
             <a:endParaRPr lang="en-US" dirty="0"/>
           </a:p>
@@ -6360,7 +6360,7 @@
           <a:p>
             <a:r>
               <a:rPr lang="en-US" dirty="0"/>
-              <a:t>위키 05편 3.6. 사용자 1,000명을 배정했는데 세션이 10,000개 생겼다고 독립 정보가 10,000개인 것은 아닙니다. 같은 사용자의 세션은 구매 성향·방문 습관을 공유합니다. 이를 무시하면 불확실성이 작게 추정되어 효과가 없는데도 유의해질 수 있습니다. Microsoft 연구자 시뮬레이션에서는 사용자 단위로 배정하고 페이지 수준 데이터를 단순 공식으로 분석했을 때 명목상 95% 신뢰구간이 참값을 포함한 비율이 약 47%, 74%까지 떨어진 조건이 있었습니다. 특정 시뮬레이션 조건의 결과이므로 숫자보다 '추론 자체가 왜곡된다'는 점을 강조합니다.</a:t>
+              <a:t>위키 04편 3.6. 사용자 1,000명을 배정했는데 세션이 10,000개 생겼다고 독립 정보가 10,000개인 것은 아닙니다. 같은 사용자의 세션은 구매 성향·방문 습관을 공유합니다. 이를 무시하면 불확실성이 작게 추정되어 효과가 없는데도 유의해질 수 있습니다. Microsoft 연구자 시뮬레이션에서는 사용자 단위로 배정하고 페이지 수준 데이터를 단순 공식으로 분석했을 때 명목상 95% 신뢰구간이 참값을 포함한 비율이 약 47%, 74%까지 떨어진 조건이 있었습니다. 특정 시뮬레이션 조건의 결과이므로 숫자보다 '추론 자체가 왜곡된다'는 점을 강조합니다.</a:t>
             </a:r>
             <a:endParaRPr lang="en-US" dirty="0"/>
           </a:p>
@@ -7240,7 +7240,7 @@
           <a:p>
             <a:r>
               <a:rPr lang="en-US" dirty="0"/>
-              <a:t>위키 05편 3.5. 사용자 단위 실험에서 반복 노출은 설계 의도이지만 효과가 처음부터 끝까지 같다는 보장은 없습니다. 노출 횟수는 실험 시작 후 사용자 행동으로 정해지는 값이라, 5회 노출자와 1회 노출자를 비교하면 처치 효과가 아니라 사용자 성향 차이를 보게 됩니다. 반면 실험 시작 후 경과 일수는 두 그룹에 똑같이 적용되므로 랜덤 비교가 유지됩니다.</a:t>
+              <a:t>위키 04편 3.5. 사용자 단위 실험에서 반복 노출은 설계 의도이지만 효과가 처음부터 끝까지 같다는 보장은 없습니다. 노출 횟수는 실험 시작 후 사용자 행동으로 정해지는 값이라, 5회 노출자와 1회 노출자를 비교하면 처치 효과가 아니라 사용자 성향 차이를 보게 됩니다. 반면 실험 시작 후 경과 일수는 두 그룹에 똑같이 적용되므로 랜덤 비교가 유지됩니다.</a:t>
             </a:r>
             <a:endParaRPr lang="en-US" dirty="0"/>
           </a:p>
@@ -8208,7 +8208,7 @@
           <a:p>
             <a:r>
               <a:rPr lang="en-US" dirty="0"/>
-              <a:t>위키 04편 1장 (Kohavi 책). 데이터 기반 의사결정은 A/B 테스트뿐 아니라 조사, 유지보수 비용 추정 같은 여러 데이터로 판단한다는 뜻입니다. 토스는 실험·분석 플랫폼 TUBA를 SQL을 몰라도 쓸 수 있게 만들었고, Microsoft ExP도 같은 맥락입니다. "거의 모든 것이 실패한다" (댄 매킨리).</a:t>
+              <a:t>위키 05편 1장 (Kohavi 책). 데이터 기반 의사결정은 A/B 테스트뿐 아니라 조사, 유지보수 비용 추정 같은 여러 데이터로 판단한다는 뜻입니다. 토스는 실험·분석 플랫폼 TUBA를 SQL을 몰라도 쓸 수 있게 만들었고, Microsoft ExP도 같은 맥락입니다. "거의 모든 것이 실패한다" (댄 매킨리).</a:t>
             </a:r>
             <a:endParaRPr lang="en-US" dirty="0"/>
           </a:p>
@@ -8296,7 +8296,7 @@
           <a:p>
             <a:r>
               <a:rPr lang="en-US" dirty="0"/>
-              <a:t>위키 04편 3.1 (Kohavi 책). 핵심은 실험 횟수가 아니라 측정할 수 있는가 → 믿을 수 있게 실험하는가 → 대규모로 반복할 수 있는가 → 실험이 기본 의사결정 방식인가입니다. 빈도는 대략적인 기준(rough rule of thumb)일 뿐 절대적인 경계가 아닙니다. Walk 단계의 계측 검증, A/A, SRM은 Ch3·Ch4에서 다룬 내용입니다.</a:t>
+              <a:t>위키 05편 3.1 (Kohavi 책). 핵심은 실험 횟수가 아니라 측정할 수 있는가 → 믿을 수 있게 실험하는가 → 대규모로 반복할 수 있는가 → 실험이 기본 의사결정 방식인가입니다. 빈도는 대략적인 기준(rough rule of thumb)일 뿐 절대적인 경계가 아닙니다. Walk 단계의 계측 검증, A/A, SRM은 Ch3·Ch4에서 다룬 내용입니다.</a:t>
             </a:r>
             <a:endParaRPr lang="en-US" dirty="0"/>
           </a:p>
@@ -9000,7 +9000,7 @@
           <a:p>
             <a:r>
               <a:rPr lang="en-US" dirty="0"/>
-              <a:t>위키 01편 1장. 2012년 Bing 직원이 광고 제목 아래 문장을 제목에 합쳐 길게 보여주자고 제안했지만 우선순위가 낮아 6개월 넘게 미뤄졌습니다. A/B 테스트 결과 매출이 약 12% 늘었고, 사용자 경험(사용자당 세션 수, 이용량, 관련성)은 나빠지지 않았습니다. 위키 04편: Microsoft에서 실험한 아이디어 중 지표를 개선한 것은 약 3분의 1뿐이었습니다. 출처: Kohavi &amp; Thomke, HBR 2017.</a:t>
+              <a:t>위키 01편 1장. 2012년 Bing 직원이 광고 제목 아래 문장을 제목에 합쳐 길게 보여주자고 제안했지만 우선순위가 낮아 6개월 넘게 미뤄졌습니다. A/B 테스트 결과 매출이 약 12% 늘었고, 사용자 경험(사용자당 세션 수, 이용량, 관련성)은 나빠지지 않았습니다. 위키 05편: Microsoft에서 실험한 아이디어 중 지표를 개선한 것은 약 3분의 1뿐이었습니다. 출처: Kohavi &amp; Thomke, HBR 2017.</a:t>
             </a:r>
             <a:endParaRPr lang="en-US" dirty="0"/>
           </a:p>
@@ -40516,7 +40516,7 @@
                   <a:schemeClr val="accent6"/>
                 </a:solidFill>
               </a:rPr>
-              <a:t>위키 05편 3.6 · 수치는 Microsoft 연구자 시뮬레이션의 특정 조건 결과</a:t>
+              <a:t>위키 04편 3.6 · 수치는 Microsoft 연구자 시뮬레이션의 특정 조건 결과</a:t>
             </a:r>
             <a:endParaRPr lang="en-US" sz="1100" dirty="0"/>
           </a:p>
@@ -51568,7 +51568,7 @@
                   <a:schemeClr val="accent6"/>
                 </a:solidFill>
               </a:rPr>
-              <a:t>출처: Kohavi, Tang, Xu (2020) · 위키 04편 1장</a:t>
+              <a:t>출처: Kohavi, Tang, Xu (2020) · 위키 05편 1장</a:t>
             </a:r>
             <a:endParaRPr lang="en-US" sz="1100" dirty="0"/>
           </a:p>
@@ -52730,7 +52730,7 @@
                   <a:schemeClr val="accent6"/>
                 </a:solidFill>
               </a:rPr>
-              <a:t>출처: Kohavi, Tang, Xu (2020) · 위키 04편 3.1</a:t>
+              <a:t>출처: Kohavi, Tang, Xu (2020) · 위키 05편 3.1</a:t>
             </a:r>
             <a:endParaRPr lang="en-US" sz="1100" dirty="0"/>
           </a:p>
@@ -55125,7 +55125,7 @@
                   <a:schemeClr val="tx1"/>
                 </a:solidFill>
               </a:rPr>
-              <a:t>저장소 위키 docs/ab-testing: 01 왜 A/B 테스트 · 02 가설 수립 · 03 지표 설계 · 04 실험 플랫폼과 문화 · 05 실험 단위</a:t>
+              <a:t>저장소 위키 docs/ab-testing: 01 왜 A/B 테스트 · 02 가설 수립 · 03 지표 설계 · 04 실험 단위 · 05 실험 플랫폼과 문화</a:t>
             </a:r>
             <a:endParaRPr lang="en-US" sz="1400" dirty="0"/>
           </a:p>
@@ -60436,7 +60436,7 @@
                   <a:schemeClr val="accent6"/>
                 </a:solidFill>
               </a:rPr>
-              <a:t>그림: Kohavi, Tang, Xu (2020) 그림 1.1 · 출처: Kohavi &amp; Thomke (2017), HBR · 위키 01편 1장, 04편 1.3</a:t>
+              <a:t>그림: Kohavi, Tang, Xu (2020) 그림 1.1 · 출처: Kohavi &amp; Thomke (2017), HBR · 위키 01편 1장, 05편 1.3</a:t>
             </a:r>
             <a:endParaRPr lang="en-US" sz="1100" dirty="0"/>
           </a:p>

--- a/docs/lecture/ab-testing-theory.pptx
+++ b/docs/lecture/ab-testing-theory.pptx
@@ -72,9 +72,12 @@
     <p:sldId id="320" r:id="rId66"/>
     <p:sldId id="321" r:id="rId67"/>
     <p:sldId id="322" r:id="rId68"/>
+    <p:sldId id="323" r:id="rId69"/>
+    <p:sldId id="324" r:id="rId70"/>
+    <p:sldId id="325" r:id="rId71"/>
   </p:sldIdLst>
   <p:notesMasterIdLst>
-    <p:notesMasterId r:id="rId69"/>
+    <p:notesMasterId r:id="rId72"/>
   </p:notesMasterIdLst>
   <p:sldSz cx="12192000" cy="6858000"/>
   <p:notesSz cx="6858000" cy="12192000"/>
@@ -173,14 +176,14 @@
   <p:extLst>
     <p:ext uri="{521415D9-36F7-43E2-AB2F-B90AF26B5E84}">
       <p14:sectionLst xmlns:p14="http://schemas.microsoft.com/office/powerpoint/2010/main">
-        <p14:section name="오프닝" id="{fee87a49-c2c4-7142-7121-6969668c8f01}">
+        <p14:section name="오프닝" id="{81b377a5-a871-6d57-8e60-9a9e26559968}">
           <p14:sldIdLst>
             <p14:sldId id="256"/>
             <p14:sldId id="257"/>
             <p14:sldId id="258"/>
           </p14:sldIdLst>
         </p14:section>
-        <p14:section name="Ch1 실험과 인과추론" id="{b2edc23f-bc3d-f5a3-53b7-9fa2d98d8656}">
+        <p14:section name="Ch1 실험과 인과추론" id="{62432427-be82-519e-c86d-5e69bb012289}">
           <p14:sldIdLst>
             <p14:sldId id="259"/>
             <p14:sldId id="260"/>
@@ -194,7 +197,7 @@
             <p14:sldId id="268"/>
           </p14:sldIdLst>
         </p14:section>
-        <p14:section name="Ch2 설계 구성요소" id="{678aeeb4-f8ef-9251-9a58-31f84e7e74d6}">
+        <p14:section name="Ch2 설계 구성요소" id="{9ee5aa46-62c1-4243-b85e-e438f56cfb40}">
           <p14:sldIdLst>
             <p14:sldId id="269"/>
             <p14:sldId id="270"/>
@@ -221,7 +224,7 @@
             <p14:sldId id="291"/>
           </p14:sldIdLst>
         </p14:section>
-        <p14:section name="Ch3 실행과 분석" id="{dcc7dd1c-14a4-6564-3695-3a1c7f09b86b}">
+        <p14:section name="Ch3 실행과 분석" id="{cd5462cf-5ef3-468e-676c-213e3099b495}">
           <p14:sldIdLst>
             <p14:sldId id="292"/>
             <p14:sldId id="293"/>
@@ -239,7 +242,7 @@
             <p14:sldId id="306"/>
           </p14:sldIdLst>
         </p14:section>
-        <p14:section name="Ch4 함정과 고급 설계" id="{f39511ab-45f0-752c-9a2f-7ce756e5c525}">
+        <p14:section name="Ch4 함정과 고급 설계" id="{0a39a823-aeff-5b00-17cc-242b544fd65e}">
           <p14:sldIdLst>
             <p14:sldId id="305"/>
             <p14:sldId id="307"/>
@@ -249,19 +252,22 @@
             <p14:sldId id="311"/>
             <p14:sldId id="312"/>
             <p14:sldId id="313"/>
-          </p14:sldIdLst>
-        </p14:section>
-        <p14:section name="Ch5 사례와 결정" id="{7aca82e3-1328-7371-f4f5-9b0609e6efbb}">
-          <p14:sldIdLst>
             <p14:sldId id="314"/>
             <p14:sldId id="315"/>
             <p14:sldId id="316"/>
+          </p14:sldIdLst>
+        </p14:section>
+        <p14:section name="Ch5 사례와 결정" id="{0958318a-0ae5-a194-2902-c3a0eaba5b1e}">
+          <p14:sldIdLst>
             <p14:sldId id="317"/>
             <p14:sldId id="318"/>
             <p14:sldId id="319"/>
             <p14:sldId id="320"/>
             <p14:sldId id="321"/>
             <p14:sldId id="322"/>
+            <p14:sldId id="323"/>
+            <p14:sldId id="324"/>
+            <p14:sldId id="325"/>
           </p14:sldIdLst>
         </p14:section>
       </p14:sectionLst>
@@ -7768,7 +7774,7 @@
           <a:p>
             <a:r>
               <a:rPr lang="en-US" dirty="0"/>
-              <a:t>짧게 소개만 합니다. 밴딧은 탐색(아직 모르는 쪽도 시도)과 활용(지금 좋은 쪽에 몰아주기)의 균형 문제입니다. 스위치백은 배달·라이드쉐어처럼 시장 전체가 엮일 때, 클러스터는 사용자끼리 영향을 주고받을 때, 인터리빙은 랭킹을 비교할 때 씁니다.</a:t>
+              <a:t>위키 05편 1.1~1.3. SUTVA는 한 사용자가 받은 처치가 다른 사용자의 결과에 영향을 주지 않는다는 가정이고, 이것이 깨지는 현상이 간섭입니다. 실무에서는 Spillover, Leakage라고도 부릅니다. 직접 간섭은 사용자끼리 연결된 서비스(SNS, 메신저, 게임)에서, 간접 간섭은 한정된 자원이나 같은 시장을 공유할 때(메이플 옥션의 매물, Airbnb 숙소, Uber 드라이버, 광고 예산, 서버) 생깁니다.</a:t>
             </a:r>
             <a:endParaRPr lang="en-US" dirty="0"/>
           </a:p>
@@ -7856,7 +7862,7 @@
           <a:p>
             <a:r>
               <a:rPr lang="en-US" dirty="0"/>
-              <a:t>실험을 못 할 때 쓰는 준실험(quasi-experiment) 방법입니다. DID는 처치 전 두 집단의 추세가 평행했다는 가정이 핵심입니다. 그래프는 교육용 예시입니다. 점선은 처치가 없었다면 처치 지역이 따랐을 추세(반사실)입니다.</a:t>
+              <a:t>위키 05편 1.4. 간섭이 생기면 A와 B가 완전히 분리된 집단으로 기능하지 못합니다. 대조군이 더 이상 처치 없는 기준선이 아니고, 한 사람의 결과가 자기 배정뿐 아니라 다른 사람들의 배정에도 좌우됩니다. 그래서 몇 %에게 적용했느냐에 따라 효과가 달라지고, 실험에서 잰 효과가 전체 출시 효과와 다를 수 있습니다. 이 문제는 표본을 늘려도 해결되지 않습니다.</a:t>
             </a:r>
             <a:endParaRPr lang="en-US" dirty="0"/>
           </a:p>
@@ -7944,7 +7950,7 @@
           <a:p>
             <a:r>
               <a:rPr lang="en-US" dirty="0"/>
-              <a:t/>
+              <a:t>위키 06편. 핵심은 서로 영향을 주는 사용자나 자원이 A와 B 사이에 섞이지 않게 실험 단위를 다시 설계하는 것입니다. 묶어서 나눌수록 간섭은 줄지만 독립 단위 수가 줄어 검정력이 떨어집니다. 설계로 다 막지 못하면 분석 단계에서 직접 효과와 Spillover 효과를 나눠 추정합니다 (Network-based Causal Inference, IV 등은 심화 주제).</a:t>
             </a:r>
             <a:endParaRPr lang="en-US" dirty="0"/>
           </a:p>
@@ -8120,7 +8126,7 @@
           <a:p>
             <a:r>
               <a:rPr lang="en-US" dirty="0"/>
-              <a:t>각 회사 사례는 오늘 다룬 개념과 연결해서 소개합니다. 세부 수치는 원문(기술 블로그, 논문)에서 확인하고 인용하세요. 한국 사례는 실습에서 직접 다룹니다.</a:t>
+              <a:t>짧게 소개만 합니다. 밴딧은 탐색(아직 모르는 쪽도 시도)과 활용(지금 좋은 쪽에 몰아주기)의 균형 문제입니다. 인터리빙은 랭킹을 비교할 때 씁니다. 간섭에 대응하는 Cluster·Geo·Switchback은 앞 장에서 다뤘습니다.</a:t>
             </a:r>
             <a:endParaRPr lang="en-US" dirty="0"/>
           </a:p>
@@ -8208,7 +8214,7 @@
           <a:p>
             <a:r>
               <a:rPr lang="en-US" dirty="0"/>
-              <a:t>위키 05편 1장 (Kohavi 책). 데이터 기반 의사결정은 A/B 테스트뿐 아니라 조사, 유지보수 비용 추정 같은 여러 데이터로 판단한다는 뜻입니다. 토스는 실험·분석 플랫폼 TUBA를 SQL을 몰라도 쓸 수 있게 만들었고, Microsoft ExP도 같은 맥락입니다. "거의 모든 것이 실패한다" (댄 매킨리).</a:t>
+              <a:t>실험을 못 할 때 쓰는 준실험(quasi-experiment) 방법입니다. DID는 처치 전 두 집단의 추세가 평행했다는 가정이 핵심입니다. 그래프는 교육용 예시입니다. 점선은 처치가 없었다면 처치 지역이 따랐을 추세(반사실)입니다.</a:t>
             </a:r>
             <a:endParaRPr lang="en-US" dirty="0"/>
           </a:p>
@@ -8296,7 +8302,7 @@
           <a:p>
             <a:r>
               <a:rPr lang="en-US" dirty="0"/>
-              <a:t>위키 05편 3.1 (Kohavi 책). 핵심은 실험 횟수가 아니라 측정할 수 있는가 → 믿을 수 있게 실험하는가 → 대규모로 반복할 수 있는가 → 실험이 기본 의사결정 방식인가입니다. 빈도는 대략적인 기준(rough rule of thumb)일 뿐 절대적인 경계가 아닙니다. Walk 단계의 계측 검증, A/A, SRM은 Ch3·Ch4에서 다룬 내용입니다.</a:t>
+              <a:t/>
             </a:r>
             <a:endParaRPr lang="en-US" dirty="0"/>
           </a:p>
@@ -8384,7 +8390,7 @@
           <a:p>
             <a:r>
               <a:rPr lang="en-US" dirty="0"/>
-              <a:t>Feature Flag는 코드 배포와 기능 노출을 분리해 램프업과 즉시 롤백을 가능하게 합니다. 실험 플랫폼은 배정·로깅·분석을 자동화해 실험 한 번의 비용을 낮춥니다. 민주화는 누구나 실험할 수 있게 하되, 가드레일과 리뷰로 품질을 지키는 것입니다.</a:t>
+              <a:t>각 회사 사례는 오늘 다룬 개념과 연결해서 소개합니다. 세부 수치는 원문(기술 블로그, 논문)에서 확인하고 인용하세요. 한국 사례는 실습에서 직접 다룹니다.</a:t>
             </a:r>
             <a:endParaRPr lang="en-US" dirty="0"/>
           </a:p>
@@ -8472,7 +8478,7 @@
           <a:p>
             <a:r>
               <a:rPr lang="en-US" dirty="0"/>
-              <a:t>결과를 읽는 순서입니다. 데이터 품질(SRM, 가드레일) → 신뢰구간 → 결정. 실습 앱의 Readout도 같은 순서로 보여줍니다. 핵심은 '유의하지 않음'을 두 가지로 나누는 것입니다. 구간이 좁으면 효과가 없다고 판단하고 접고, 넓으면 표본이 부족했던 것이니 재실험합니다.</a:t>
+              <a:t>위키 07편 1장 (Kohavi 책). 데이터 기반 의사결정은 A/B 테스트뿐 아니라 조사, 유지보수 비용 추정 같은 여러 데이터로 판단한다는 뜻입니다. 토스는 실험·분석 플랫폼 TUBA를 SQL을 몰라도 쓸 수 있게 만들었고, Microsoft ExP도 같은 맥락입니다. "거의 모든 것이 실패한다" (댄 매킨리).</a:t>
             </a:r>
             <a:endParaRPr lang="en-US" dirty="0"/>
           </a:p>
@@ -8560,7 +8566,7 @@
           <a:p>
             <a:r>
               <a:rPr lang="en-US" dirty="0"/>
-              <a:t>배포는 통계만으로 정하지 않습니다. 효과는 점추정이 아니라 구간의 하한까지 보고, 구현·유지 비용과 리스크를 함께 놓고 판단합니다. 예: +0.8%p [0.1, 1.5]면 하한 +0.1%p일 때도 유지 비용을 넘는지 묻습니다.</a:t>
+              <a:t>위키 07편 3.1 (Kohavi 책). 핵심은 실험 횟수가 아니라 측정할 수 있는가 → 믿을 수 있게 실험하는가 → 대규모로 반복할 수 있는가 → 실험이 기본 의사결정 방식인가입니다. 빈도는 대략적인 기준(rough rule of thumb)일 뿐 절대적인 경계가 아닙니다. Walk 단계의 계측 검증, A/A, SRM은 Ch3·Ch4에서 다룬 내용입니다.</a:t>
             </a:r>
             <a:endParaRPr lang="en-US" dirty="0"/>
           </a:p>
@@ -8648,7 +8654,7 @@
           <a:p>
             <a:r>
               <a:rPr lang="en-US" dirty="0"/>
-              <a:t>세 가지만 기억하면 됩니다. 실습에서는 조마다 실제 기업 사례 하나를 골라, 같은 가상 모집단 위에서 제출한 설계대로 실험을 시뮬레이션합니다.</a:t>
+              <a:t>Feature Flag는 코드 배포와 기능 노출을 분리해 램프업과 즉시 롤백을 가능하게 합니다. 실험 플랫폼은 배정·로깅·분석을 자동화해 실험 한 번의 비용을 낮춥니다. 민주화는 누구나 실험할 수 있게 하되, 가드레일과 리뷰로 품질을 지키는 것입니다.</a:t>
             </a:r>
             <a:endParaRPr lang="en-US" dirty="0"/>
           </a:p>
@@ -8736,7 +8742,7 @@
           <a:p>
             <a:r>
               <a:rPr lang="en-US" dirty="0"/>
-              <a:t>Kohavi 책과 Udacity 강의를 메인으로, 나머지는 토픽별로 참고합니다.</a:t>
+              <a:t>결과를 읽는 순서입니다. 데이터 품질(SRM, 가드레일) → 신뢰구간 → 결정. 실습 앱의 Readout도 같은 순서로 보여줍니다. 핵심은 '유의하지 않음'을 두 가지로 나누는 것입니다. 구간이 좁으면 효과가 없다고 판단하고 접고, 넓으면 표본이 부족했던 것이니 재실험합니다.</a:t>
             </a:r>
             <a:endParaRPr lang="en-US" dirty="0"/>
           </a:p>
@@ -8760,6 +8766,182 @@
             <a:fld id="{F7021451-1387-4CA6-816F-3879F97B5CBC}" type="slidenum">
               <a:rPr lang="en-US"/>
               <a:t>67</a:t>
+            </a:fld>
+            <a:endParaRPr lang="en-US"/>
+          </a:p>
+        </p:txBody>
+      </p:sp>
+    </p:spTree>
+    <p:extLst>
+      <p:ext uri="{BB962C8B-B14F-4D97-AF65-F5344CB8AC3E}">
+        <p14:creationId xmlns:p14="http://schemas.microsoft.com/office/powerpoint/2010/main" val="1024086991"/>
+      </p:ext>
+    </p:extLst>
+  </p:cSld>
+  <p:clrMapOvr>
+    <a:masterClrMapping/>
+  </p:clrMapOvr>
+</p:notes>
+</file>
+
+<file path=ppt/notesSlides/notesSlide68.xml><?xml version="1.0" encoding="utf-8"?>
+<p:notes xmlns:a="http://schemas.openxmlformats.org/drawingml/2006/main" xmlns:r="http://schemas.openxmlformats.org/officeDocument/2006/relationships" xmlns:p="http://schemas.openxmlformats.org/presentationml/2006/main">
+  <p:cSld>
+    <p:spTree>
+      <p:nvGrpSpPr>
+        <p:cNvPr id="1" name=""/>
+        <p:cNvGrpSpPr/>
+        <p:nvPr/>
+      </p:nvGrpSpPr>
+      <p:grpSpPr>
+        <a:xfrm>
+          <a:off x="0" y="0"/>
+          <a:ext cx="0" cy="0"/>
+          <a:chOff x="0" y="0"/>
+          <a:chExt cx="0" cy="0"/>
+        </a:xfrm>
+      </p:grpSpPr>
+      <p:sp>
+        <p:nvSpPr>
+          <p:cNvPr id="2" name="Slide Image Placeholder 1"/>
+          <p:cNvSpPr>
+            <a:spLocks noGrp="1" noRot="1" noChangeAspect="1"/>
+          </p:cNvSpPr>
+          <p:nvPr>
+            <p:ph type="sldImg"/>
+          </p:nvPr>
+        </p:nvSpPr>
+        <p:spPr/>
+      </p:sp>
+      <p:sp>
+        <p:nvSpPr>
+          <p:cNvPr id="3" name="Notes Placeholder 2"/>
+          <p:cNvSpPr>
+            <a:spLocks noGrp="1"/>
+          </p:cNvSpPr>
+          <p:nvPr>
+            <p:ph type="body" idx="1"/>
+          </p:nvPr>
+        </p:nvSpPr>
+        <p:spPr/>
+        <p:txBody>
+          <a:bodyPr/>
+          <a:lstStyle/>
+          <a:p>
+            <a:r>
+              <a:rPr lang="en-US" dirty="0"/>
+              <a:t>배포는 통계만으로 정하지 않습니다. 효과는 점추정이 아니라 구간의 하한까지 보고, 구현·유지 비용과 리스크를 함께 놓고 판단합니다. 예: +0.8%p [0.1, 1.5]면 하한 +0.1%p일 때도 유지 비용을 넘는지 묻습니다.</a:t>
+            </a:r>
+            <a:endParaRPr lang="en-US" dirty="0"/>
+          </a:p>
+        </p:txBody>
+      </p:sp>
+      <p:sp>
+        <p:nvSpPr>
+          <p:cNvPr id="4" name="Slide Number Placeholder 3"/>
+          <p:cNvSpPr>
+            <a:spLocks noGrp="1"/>
+          </p:cNvSpPr>
+          <p:nvPr>
+            <p:ph type="sldNum" sz="quarter" idx="10"/>
+          </p:nvPr>
+        </p:nvSpPr>
+        <p:spPr/>
+        <p:txBody>
+          <a:bodyPr/>
+          <a:lstStyle/>
+          <a:p>
+            <a:fld id="{F7021451-1387-4CA6-816F-3879F97B5CBC}" type="slidenum">
+              <a:rPr lang="en-US"/>
+              <a:t>68</a:t>
+            </a:fld>
+            <a:endParaRPr lang="en-US"/>
+          </a:p>
+        </p:txBody>
+      </p:sp>
+    </p:spTree>
+    <p:extLst>
+      <p:ext uri="{BB962C8B-B14F-4D97-AF65-F5344CB8AC3E}">
+        <p14:creationId xmlns:p14="http://schemas.microsoft.com/office/powerpoint/2010/main" val="1024086991"/>
+      </p:ext>
+    </p:extLst>
+  </p:cSld>
+  <p:clrMapOvr>
+    <a:masterClrMapping/>
+  </p:clrMapOvr>
+</p:notes>
+</file>
+
+<file path=ppt/notesSlides/notesSlide69.xml><?xml version="1.0" encoding="utf-8"?>
+<p:notes xmlns:a="http://schemas.openxmlformats.org/drawingml/2006/main" xmlns:r="http://schemas.openxmlformats.org/officeDocument/2006/relationships" xmlns:p="http://schemas.openxmlformats.org/presentationml/2006/main">
+  <p:cSld>
+    <p:spTree>
+      <p:nvGrpSpPr>
+        <p:cNvPr id="1" name=""/>
+        <p:cNvGrpSpPr/>
+        <p:nvPr/>
+      </p:nvGrpSpPr>
+      <p:grpSpPr>
+        <a:xfrm>
+          <a:off x="0" y="0"/>
+          <a:ext cx="0" cy="0"/>
+          <a:chOff x="0" y="0"/>
+          <a:chExt cx="0" cy="0"/>
+        </a:xfrm>
+      </p:grpSpPr>
+      <p:sp>
+        <p:nvSpPr>
+          <p:cNvPr id="2" name="Slide Image Placeholder 1"/>
+          <p:cNvSpPr>
+            <a:spLocks noGrp="1" noRot="1" noChangeAspect="1"/>
+          </p:cNvSpPr>
+          <p:nvPr>
+            <p:ph type="sldImg"/>
+          </p:nvPr>
+        </p:nvSpPr>
+        <p:spPr/>
+      </p:sp>
+      <p:sp>
+        <p:nvSpPr>
+          <p:cNvPr id="3" name="Notes Placeholder 2"/>
+          <p:cNvSpPr>
+            <a:spLocks noGrp="1"/>
+          </p:cNvSpPr>
+          <p:nvPr>
+            <p:ph type="body" idx="1"/>
+          </p:nvPr>
+        </p:nvSpPr>
+        <p:spPr/>
+        <p:txBody>
+          <a:bodyPr/>
+          <a:lstStyle/>
+          <a:p>
+            <a:r>
+              <a:rPr lang="en-US" dirty="0"/>
+              <a:t>세 가지만 기억하면 됩니다. 실습에서는 조마다 실제 기업 사례 하나를 골라, 같은 가상 모집단 위에서 제출한 설계대로 실험을 시뮬레이션합니다.</a:t>
+            </a:r>
+            <a:endParaRPr lang="en-US" dirty="0"/>
+          </a:p>
+        </p:txBody>
+      </p:sp>
+      <p:sp>
+        <p:nvSpPr>
+          <p:cNvPr id="4" name="Slide Number Placeholder 3"/>
+          <p:cNvSpPr>
+            <a:spLocks noGrp="1"/>
+          </p:cNvSpPr>
+          <p:nvPr>
+            <p:ph type="sldNum" sz="quarter" idx="10"/>
+          </p:nvPr>
+        </p:nvSpPr>
+        <p:spPr/>
+        <p:txBody>
+          <a:bodyPr/>
+          <a:lstStyle/>
+          <a:p>
+            <a:fld id="{F7021451-1387-4CA6-816F-3879F97B5CBC}" type="slidenum">
+              <a:rPr lang="en-US"/>
+              <a:t>69</a:t>
             </a:fld>
             <a:endParaRPr lang="en-US"/>
           </a:p>
@@ -8866,6 +9048,94 @@
 </p:notes>
 </file>
 
+<file path=ppt/notesSlides/notesSlide70.xml><?xml version="1.0" encoding="utf-8"?>
+<p:notes xmlns:a="http://schemas.openxmlformats.org/drawingml/2006/main" xmlns:r="http://schemas.openxmlformats.org/officeDocument/2006/relationships" xmlns:p="http://schemas.openxmlformats.org/presentationml/2006/main">
+  <p:cSld>
+    <p:spTree>
+      <p:nvGrpSpPr>
+        <p:cNvPr id="1" name=""/>
+        <p:cNvGrpSpPr/>
+        <p:nvPr/>
+      </p:nvGrpSpPr>
+      <p:grpSpPr>
+        <a:xfrm>
+          <a:off x="0" y="0"/>
+          <a:ext cx="0" cy="0"/>
+          <a:chOff x="0" y="0"/>
+          <a:chExt cx="0" cy="0"/>
+        </a:xfrm>
+      </p:grpSpPr>
+      <p:sp>
+        <p:nvSpPr>
+          <p:cNvPr id="2" name="Slide Image Placeholder 1"/>
+          <p:cNvSpPr>
+            <a:spLocks noGrp="1" noRot="1" noChangeAspect="1"/>
+          </p:cNvSpPr>
+          <p:nvPr>
+            <p:ph type="sldImg"/>
+          </p:nvPr>
+        </p:nvSpPr>
+        <p:spPr/>
+      </p:sp>
+      <p:sp>
+        <p:nvSpPr>
+          <p:cNvPr id="3" name="Notes Placeholder 2"/>
+          <p:cNvSpPr>
+            <a:spLocks noGrp="1"/>
+          </p:cNvSpPr>
+          <p:nvPr>
+            <p:ph type="body" idx="1"/>
+          </p:nvPr>
+        </p:nvSpPr>
+        <p:spPr/>
+        <p:txBody>
+          <a:bodyPr/>
+          <a:lstStyle/>
+          <a:p>
+            <a:r>
+              <a:rPr lang="en-US" dirty="0"/>
+              <a:t>Kohavi 책과 Udacity 강의를 메인으로, 나머지는 토픽별로 참고합니다.</a:t>
+            </a:r>
+            <a:endParaRPr lang="en-US" dirty="0"/>
+          </a:p>
+        </p:txBody>
+      </p:sp>
+      <p:sp>
+        <p:nvSpPr>
+          <p:cNvPr id="4" name="Slide Number Placeholder 3"/>
+          <p:cNvSpPr>
+            <a:spLocks noGrp="1"/>
+          </p:cNvSpPr>
+          <p:nvPr>
+            <p:ph type="sldNum" sz="quarter" idx="10"/>
+          </p:nvPr>
+        </p:nvSpPr>
+        <p:spPr/>
+        <p:txBody>
+          <a:bodyPr/>
+          <a:lstStyle/>
+          <a:p>
+            <a:fld id="{F7021451-1387-4CA6-816F-3879F97B5CBC}" type="slidenum">
+              <a:rPr lang="en-US"/>
+              <a:t>70</a:t>
+            </a:fld>
+            <a:endParaRPr lang="en-US"/>
+          </a:p>
+        </p:txBody>
+      </p:sp>
+    </p:spTree>
+    <p:extLst>
+      <p:ext uri="{BB962C8B-B14F-4D97-AF65-F5344CB8AC3E}">
+        <p14:creationId xmlns:p14="http://schemas.microsoft.com/office/powerpoint/2010/main" val="1024086991"/>
+      </p:ext>
+    </p:extLst>
+  </p:cSld>
+  <p:clrMapOvr>
+    <a:masterClrMapping/>
+  </p:clrMapOvr>
+</p:notes>
+</file>
+
 <file path=ppt/notesSlides/notesSlide8.xml><?xml version="1.0" encoding="utf-8"?>
 <p:notes xmlns:a="http://schemas.openxmlformats.org/drawingml/2006/main" xmlns:r="http://schemas.openxmlformats.org/officeDocument/2006/relationships" xmlns:p="http://schemas.openxmlformats.org/presentationml/2006/main">
   <p:cSld>
@@ -9000,7 +9270,7 @@
           <a:p>
             <a:r>
               <a:rPr lang="en-US" dirty="0"/>
-              <a:t>위키 01편 1장. 2012년 Bing 직원이 광고 제목 아래 문장을 제목에 합쳐 길게 보여주자고 제안했지만 우선순위가 낮아 6개월 넘게 미뤄졌습니다. A/B 테스트 결과 매출이 약 12% 늘었고, 사용자 경험(사용자당 세션 수, 이용량, 관련성)은 나빠지지 않았습니다. 위키 05편: Microsoft에서 실험한 아이디어 중 지표를 개선한 것은 약 3분의 1뿐이었습니다. 출처: Kohavi &amp; Thomke, HBR 2017.</a:t>
+              <a:t>위키 01편 1장. 2012년 Bing 직원이 광고 제목 아래 문장을 제목에 합쳐 길게 보여주자고 제안했지만 우선순위가 낮아 6개월 넘게 미뤄졌습니다. A/B 테스트 결과 매출이 약 12% 늘었고, 사용자 경험(사용자당 세션 수, 이용량, 관련성)은 나빠지지 않았습니다. 위키 07편: Microsoft에서 실험한 아이디어 중 지표를 개선한 것은 약 3분의 1뿐이었습니다. 출처: Kohavi &amp; Thomke, HBR 2017.</a:t>
             </a:r>
             <a:endParaRPr lang="en-US" dirty="0"/>
           </a:p>
@@ -48128,7 +48398,7 @@
                   <a:srgbClr val="3A5BFF"/>
                 </a:solidFill>
               </a:rPr>
-              <a:t>Ch4 · 고급 설계</a:t>
+              <a:t>Ch4 · 간섭(Interference)</a:t>
             </a:r>
             <a:endParaRPr lang="en-US" sz="1500" dirty="0"/>
           </a:p>
@@ -48166,7 +48436,1378 @@
                   <a:srgbClr val="1B1F3B"/>
                 </a:solidFill>
               </a:rPr>
-              <a:t>상황이 다르면 나누는 방법도 다르다</a:t>
+              <a:t>간섭은 두 경로로 생긴다</a:t>
+            </a:r>
+            <a:endParaRPr lang="en-US" sz="2000" dirty="0"/>
+          </a:p>
+        </p:txBody>
+      </p:sp>
+      <p:sp>
+        <p:nvSpPr>
+          <p:cNvPr id="5" name="Text 2"/>
+          <p:cNvSpPr txBox="1"/>
+          <p:nvPr/>
+        </p:nvSpPr>
+        <p:spPr>
+          <a:xfrm>
+            <a:off x="640080" y="1737360"/>
+            <a:ext cx="10911535" cy="411480"/>
+          </a:xfrm>
+          <a:prstGeom prst="rect">
+            <a:avLst/>
+          </a:prstGeom>
+          <a:noFill/>
+          <a:ln/>
+        </p:spPr>
+        <p:txBody>
+          <a:bodyPr wrap="square" lIns="0" tIns="0" rIns="0" bIns="0" rtlCol="0" anchor="t"/>
+          <a:lstStyle/>
+          <a:p>
+            <a:pPr indent="0" marL="0">
+              <a:buNone/>
+            </a:pPr>
+            <a:r>
+              <a:rPr lang="en-US" sz="1500" b="1" dirty="0">
+                <a:solidFill>
+                  <a:schemeClr val="accent1"/>
+                </a:solidFill>
+              </a:rPr>
+              <a:t>SUTVA  </a:t>
+            </a:r>
+            <a:pPr indent="0" marL="0">
+              <a:buNone/>
+            </a:pPr>
+            <a:r>
+              <a:rPr lang="en-US" sz="1500" dirty="0">
+                <a:solidFill>
+                  <a:schemeClr val="tx1"/>
+                </a:solidFill>
+              </a:rPr>
+              <a:t>내 처치가 남의 결과를 바꾸지 않는다는 가정. 이것이 깨지면 간섭입니다 (실무: Spillover, Leakage)</a:t>
+            </a:r>
+            <a:endParaRPr lang="en-US" sz="1500" dirty="0"/>
+          </a:p>
+        </p:txBody>
+      </p:sp>
+      <p:sp>
+        <p:nvSpPr>
+          <p:cNvPr id="6" name="Text 3"/>
+          <p:cNvSpPr txBox="1"/>
+          <p:nvPr/>
+        </p:nvSpPr>
+        <p:spPr>
+          <a:xfrm>
+            <a:off x="640080" y="2377440"/>
+            <a:ext cx="4937760" cy="731520"/>
+          </a:xfrm>
+          <a:prstGeom prst="rect">
+            <a:avLst/>
+          </a:prstGeom>
+          <a:noFill/>
+          <a:ln/>
+        </p:spPr>
+        <p:txBody>
+          <a:bodyPr wrap="square" lIns="0" tIns="0" rIns="0" bIns="0" rtlCol="0" anchor="t"/>
+          <a:lstStyle/>
+          <a:p>
+            <a:pPr indent="0" marL="0">
+              <a:buNone/>
+            </a:pPr>
+            <a:r>
+              <a:rPr lang="en-US" sz="2000" b="1" dirty="0">
+                <a:solidFill>
+                  <a:schemeClr val="accent4"/>
+                </a:solidFill>
+              </a:rPr>
+              <a:t>직접 간섭</a:t>
+            </a:r>
+            <a:endParaRPr lang="en-US" sz="1500" dirty="0"/>
+          </a:p>
+          <a:p>
+            <a:pPr indent="0" marL="0">
+              <a:buNone/>
+            </a:pPr>
+            <a:r>
+              <a:rPr lang="en-US" sz="1400" dirty="0">
+                <a:solidFill>
+                  <a:schemeClr val="tx2"/>
+                </a:solidFill>
+              </a:rPr>
+              <a:t>사용자끼리 연결된 서비스 · 네트워크 효과</a:t>
+            </a:r>
+            <a:endParaRPr lang="en-US" sz="1500" dirty="0"/>
+          </a:p>
+        </p:txBody>
+      </p:sp>
+      <p:sp>
+        <p:nvSpPr>
+          <p:cNvPr id="7" name="Text 4"/>
+          <p:cNvSpPr txBox="1"/>
+          <p:nvPr/>
+        </p:nvSpPr>
+        <p:spPr>
+          <a:xfrm>
+            <a:off x="640080" y="3246120"/>
+            <a:ext cx="4572000" cy="365760"/>
+          </a:xfrm>
+          <a:prstGeom prst="rect">
+            <a:avLst/>
+          </a:prstGeom>
+          <a:noFill/>
+          <a:ln/>
+        </p:spPr>
+        <p:txBody>
+          <a:bodyPr wrap="square" lIns="0" tIns="0" rIns="0" bIns="0" rtlCol="0" anchor="t"/>
+          <a:lstStyle/>
+          <a:p>
+            <a:pPr indent="0" marL="0">
+              <a:buNone/>
+            </a:pPr>
+            <a:r>
+              <a:rPr lang="en-US" sz="1500" dirty="0">
+                <a:solidFill>
+                  <a:schemeClr val="tx1"/>
+                </a:solidFill>
+              </a:rPr>
+              <a:t>B에만 새 공유 기능</a:t>
+            </a:r>
+            <a:endParaRPr lang="en-US" sz="1500" dirty="0"/>
+          </a:p>
+        </p:txBody>
+      </p:sp>
+      <p:sp>
+        <p:nvSpPr>
+          <p:cNvPr id="8" name="Text 5"/>
+          <p:cNvSpPr txBox="1"/>
+          <p:nvPr/>
+        </p:nvSpPr>
+        <p:spPr>
+          <a:xfrm>
+            <a:off x="868680" y="3657600"/>
+            <a:ext cx="4572000" cy="365760"/>
+          </a:xfrm>
+          <a:prstGeom prst="rect">
+            <a:avLst/>
+          </a:prstGeom>
+          <a:noFill/>
+          <a:ln/>
+        </p:spPr>
+        <p:txBody>
+          <a:bodyPr wrap="square" lIns="0" tIns="0" rIns="0" bIns="0" rtlCol="0" anchor="t"/>
+          <a:lstStyle/>
+          <a:p>
+            <a:pPr indent="0" marL="0">
+              <a:buNone/>
+            </a:pPr>
+            <a:r>
+              <a:rPr lang="en-US" sz="1500" dirty="0">
+                <a:solidFill>
+                  <a:schemeClr val="tx1"/>
+                </a:solidFill>
+              </a:rPr>
+              <a:t>→ B 사용자의 공유량 증가</a:t>
+            </a:r>
+            <a:endParaRPr lang="en-US" sz="1500" dirty="0"/>
+          </a:p>
+        </p:txBody>
+      </p:sp>
+      <p:sp>
+        <p:nvSpPr>
+          <p:cNvPr id="9" name="Text 6"/>
+          <p:cNvSpPr txBox="1"/>
+          <p:nvPr/>
+        </p:nvSpPr>
+        <p:spPr>
+          <a:xfrm>
+            <a:off x="1097280" y="4069080"/>
+            <a:ext cx="4572000" cy="365760"/>
+          </a:xfrm>
+          <a:prstGeom prst="rect">
+            <a:avLst/>
+          </a:prstGeom>
+          <a:noFill/>
+          <a:ln/>
+        </p:spPr>
+        <p:txBody>
+          <a:bodyPr wrap="square" lIns="0" tIns="0" rIns="0" bIns="0" rtlCol="0" anchor="t"/>
+          <a:lstStyle/>
+          <a:p>
+            <a:pPr indent="0" marL="0">
+              <a:buNone/>
+            </a:pPr>
+            <a:r>
+              <a:rPr lang="en-US" sz="1500" dirty="0">
+                <a:solidFill>
+                  <a:schemeClr val="tx1"/>
+                </a:solidFill>
+              </a:rPr>
+              <a:t>→ 친구 피드 노출 증가</a:t>
+            </a:r>
+            <a:endParaRPr lang="en-US" sz="1500" dirty="0"/>
+          </a:p>
+        </p:txBody>
+      </p:sp>
+      <p:sp>
+        <p:nvSpPr>
+          <p:cNvPr id="10" name="Text 7"/>
+          <p:cNvSpPr txBox="1"/>
+          <p:nvPr/>
+        </p:nvSpPr>
+        <p:spPr>
+          <a:xfrm>
+            <a:off x="1325880" y="4480560"/>
+            <a:ext cx="4572000" cy="365760"/>
+          </a:xfrm>
+          <a:prstGeom prst="rect">
+            <a:avLst/>
+          </a:prstGeom>
+          <a:noFill/>
+          <a:ln/>
+        </p:spPr>
+        <p:txBody>
+          <a:bodyPr wrap="square" lIns="0" tIns="0" rIns="0" bIns="0" rtlCol="0" anchor="t"/>
+          <a:lstStyle/>
+          <a:p>
+            <a:pPr indent="0" marL="0">
+              <a:buNone/>
+            </a:pPr>
+            <a:r>
+              <a:rPr lang="en-US" sz="1500" b="1" dirty="0">
+                <a:solidFill>
+                  <a:schemeClr val="accent4"/>
+                </a:solidFill>
+              </a:rPr>
+              <a:t>→ A 사용자의 행동도 바뀐다</a:t>
+            </a:r>
+            <a:endParaRPr lang="en-US" sz="1500" dirty="0"/>
+          </a:p>
+        </p:txBody>
+      </p:sp>
+      <p:sp>
+        <p:nvSpPr>
+          <p:cNvPr id="11" name="Text 8"/>
+          <p:cNvSpPr txBox="1"/>
+          <p:nvPr/>
+        </p:nvSpPr>
+        <p:spPr>
+          <a:xfrm>
+            <a:off x="640080" y="5029200"/>
+            <a:ext cx="4937760" cy="640080"/>
+          </a:xfrm>
+          <a:prstGeom prst="rect">
+            <a:avLst/>
+          </a:prstGeom>
+          <a:noFill/>
+          <a:ln/>
+        </p:spPr>
+        <p:txBody>
+          <a:bodyPr wrap="square" lIns="0" tIns="0" rIns="0" bIns="0" rtlCol="0" anchor="t"/>
+          <a:lstStyle/>
+          <a:p>
+            <a:pPr indent="0" marL="0">
+              <a:buNone/>
+            </a:pPr>
+            <a:r>
+              <a:rPr lang="en-US" sz="1400" dirty="0">
+                <a:solidFill>
+                  <a:schemeClr val="tx2"/>
+                </a:solidFill>
+              </a:rPr>
+              <a:t>예: SNS, 메신저, 게임</a:t>
+            </a:r>
+            <a:endParaRPr lang="en-US" sz="1400" dirty="0"/>
+          </a:p>
+        </p:txBody>
+      </p:sp>
+      <p:sp>
+        <p:nvSpPr>
+          <p:cNvPr id="12" name="Shape 9"/>
+          <p:cNvSpPr/>
+          <p:nvPr/>
+        </p:nvSpPr>
+        <p:spPr>
+          <a:xfrm>
+            <a:off x="5989320" y="2423160"/>
+            <a:ext cx="0" cy="3200400"/>
+          </a:xfrm>
+          <a:prstGeom prst="line">
+            <a:avLst/>
+          </a:prstGeom>
+          <a:noFill/>
+          <a:ln w="12700">
+            <a:solidFill>
+              <a:srgbClr val="E3E7F1"/>
+            </a:solidFill>
+            <a:prstDash val="solid"/>
+          </a:ln>
+        </p:spPr>
+      </p:sp>
+      <p:sp>
+        <p:nvSpPr>
+          <p:cNvPr id="13" name="Text 10"/>
+          <p:cNvSpPr txBox="1"/>
+          <p:nvPr/>
+        </p:nvSpPr>
+        <p:spPr>
+          <a:xfrm>
+            <a:off x="6355080" y="2377440"/>
+            <a:ext cx="4937760" cy="731520"/>
+          </a:xfrm>
+          <a:prstGeom prst="rect">
+            <a:avLst/>
+          </a:prstGeom>
+          <a:noFill/>
+          <a:ln/>
+        </p:spPr>
+        <p:txBody>
+          <a:bodyPr wrap="square" lIns="0" tIns="0" rIns="0" bIns="0" rtlCol="0" anchor="t"/>
+          <a:lstStyle/>
+          <a:p>
+            <a:pPr indent="0" marL="0">
+              <a:buNone/>
+            </a:pPr>
+            <a:r>
+              <a:rPr lang="en-US" sz="2000" b="1" dirty="0">
+                <a:solidFill>
+                  <a:schemeClr val="accent5"/>
+                </a:solidFill>
+              </a:rPr>
+              <a:t>간접 간섭</a:t>
+            </a:r>
+            <a:endParaRPr lang="en-US" sz="1500" dirty="0"/>
+          </a:p>
+          <a:p>
+            <a:pPr indent="0" marL="0">
+              <a:buNone/>
+            </a:pPr>
+            <a:r>
+              <a:rPr lang="en-US" sz="1400" dirty="0">
+                <a:solidFill>
+                  <a:schemeClr val="tx2"/>
+                </a:solidFill>
+              </a:rPr>
+              <a:t>공유 자원·같은 시장을 통해 · 마켓플레이스</a:t>
+            </a:r>
+            <a:endParaRPr lang="en-US" sz="1500" dirty="0"/>
+          </a:p>
+        </p:txBody>
+      </p:sp>
+      <p:sp>
+        <p:nvSpPr>
+          <p:cNvPr id="14" name="Text 11"/>
+          <p:cNvSpPr txBox="1"/>
+          <p:nvPr/>
+        </p:nvSpPr>
+        <p:spPr>
+          <a:xfrm>
+            <a:off x="6355080" y="3246120"/>
+            <a:ext cx="4572000" cy="365760"/>
+          </a:xfrm>
+          <a:prstGeom prst="rect">
+            <a:avLst/>
+          </a:prstGeom>
+          <a:noFill/>
+          <a:ln/>
+        </p:spPr>
+        <p:txBody>
+          <a:bodyPr wrap="square" lIns="0" tIns="0" rIns="0" bIns="0" rtlCol="0" anchor="t"/>
+          <a:lstStyle/>
+          <a:p>
+            <a:pPr indent="0" marL="0">
+              <a:buNone/>
+            </a:pPr>
+            <a:r>
+              <a:rPr lang="en-US" sz="1500" dirty="0">
+                <a:solidFill>
+                  <a:schemeClr val="tx1"/>
+                </a:solidFill>
+              </a:rPr>
+              <a:t>B에만 저가 매물 자동 일괄 구매</a:t>
+            </a:r>
+            <a:endParaRPr lang="en-US" sz="1500" dirty="0"/>
+          </a:p>
+        </p:txBody>
+      </p:sp>
+      <p:sp>
+        <p:nvSpPr>
+          <p:cNvPr id="15" name="Text 12"/>
+          <p:cNvSpPr txBox="1"/>
+          <p:nvPr/>
+        </p:nvSpPr>
+        <p:spPr>
+          <a:xfrm>
+            <a:off x="6583680" y="3657600"/>
+            <a:ext cx="4572000" cy="365760"/>
+          </a:xfrm>
+          <a:prstGeom prst="rect">
+            <a:avLst/>
+          </a:prstGeom>
+          <a:noFill/>
+          <a:ln/>
+        </p:spPr>
+        <p:txBody>
+          <a:bodyPr wrap="square" lIns="0" tIns="0" rIns="0" bIns="0" rtlCol="0" anchor="t"/>
+          <a:lstStyle/>
+          <a:p>
+            <a:pPr indent="0" marL="0">
+              <a:buNone/>
+            </a:pPr>
+            <a:r>
+              <a:rPr lang="en-US" sz="1500" dirty="0">
+                <a:solidFill>
+                  <a:schemeClr val="tx1"/>
+                </a:solidFill>
+              </a:rPr>
+              <a:t>→ 경매장 저가 매물이 빨리 소진</a:t>
+            </a:r>
+            <a:endParaRPr lang="en-US" sz="1500" dirty="0"/>
+          </a:p>
+        </p:txBody>
+      </p:sp>
+      <p:sp>
+        <p:nvSpPr>
+          <p:cNvPr id="16" name="Text 13"/>
+          <p:cNvSpPr txBox="1"/>
+          <p:nvPr/>
+        </p:nvSpPr>
+        <p:spPr>
+          <a:xfrm>
+            <a:off x="6812280" y="4069080"/>
+            <a:ext cx="4572000" cy="365760"/>
+          </a:xfrm>
+          <a:prstGeom prst="rect">
+            <a:avLst/>
+          </a:prstGeom>
+          <a:noFill/>
+          <a:ln/>
+        </p:spPr>
+        <p:txBody>
+          <a:bodyPr wrap="square" lIns="0" tIns="0" rIns="0" bIns="0" rtlCol="0" anchor="t"/>
+          <a:lstStyle/>
+          <a:p>
+            <a:pPr indent="0" marL="0">
+              <a:buNone/>
+            </a:pPr>
+            <a:r>
+              <a:rPr lang="en-US" sz="1500" dirty="0">
+                <a:solidFill>
+                  <a:schemeClr val="tx1"/>
+                </a:solidFill>
+              </a:rPr>
+              <a:t>→ A가 보는 평균 가격 상승</a:t>
+            </a:r>
+            <a:endParaRPr lang="en-US" sz="1500" dirty="0"/>
+          </a:p>
+        </p:txBody>
+      </p:sp>
+      <p:sp>
+        <p:nvSpPr>
+          <p:cNvPr id="17" name="Text 14"/>
+          <p:cNvSpPr txBox="1"/>
+          <p:nvPr/>
+        </p:nvSpPr>
+        <p:spPr>
+          <a:xfrm>
+            <a:off x="7040880" y="4480560"/>
+            <a:ext cx="4572000" cy="365760"/>
+          </a:xfrm>
+          <a:prstGeom prst="rect">
+            <a:avLst/>
+          </a:prstGeom>
+          <a:noFill/>
+          <a:ln/>
+        </p:spPr>
+        <p:txBody>
+          <a:bodyPr wrap="square" lIns="0" tIns="0" rIns="0" bIns="0" rtlCol="0" anchor="t"/>
+          <a:lstStyle/>
+          <a:p>
+            <a:pPr indent="0" marL="0">
+              <a:buNone/>
+            </a:pPr>
+            <a:r>
+              <a:rPr lang="en-US" sz="1500" b="1" dirty="0">
+                <a:solidFill>
+                  <a:schemeClr val="accent5"/>
+                </a:solidFill>
+              </a:rPr>
+              <a:t>→ A는 기능을 안 받았는데 경험이 바뀐다</a:t>
+            </a:r>
+            <a:endParaRPr lang="en-US" sz="1500" dirty="0"/>
+          </a:p>
+        </p:txBody>
+      </p:sp>
+      <p:sp>
+        <p:nvSpPr>
+          <p:cNvPr id="18" name="Text 15"/>
+          <p:cNvSpPr txBox="1"/>
+          <p:nvPr/>
+        </p:nvSpPr>
+        <p:spPr>
+          <a:xfrm>
+            <a:off x="6355080" y="5029200"/>
+            <a:ext cx="4937760" cy="640080"/>
+          </a:xfrm>
+          <a:prstGeom prst="rect">
+            <a:avLst/>
+          </a:prstGeom>
+          <a:noFill/>
+          <a:ln/>
+        </p:spPr>
+        <p:txBody>
+          <a:bodyPr wrap="square" lIns="0" tIns="0" rIns="0" bIns="0" rtlCol="0" anchor="t"/>
+          <a:lstStyle/>
+          <a:p>
+            <a:pPr indent="0" marL="0">
+              <a:buNone/>
+            </a:pPr>
+            <a:r>
+              <a:rPr lang="en-US" sz="1400" dirty="0">
+                <a:solidFill>
+                  <a:schemeClr val="tx2"/>
+                </a:solidFill>
+              </a:rPr>
+              <a:t>예: Airbnb 숙소, Uber 드라이버, 광고 예산, 서버 부하</a:t>
+            </a:r>
+            <a:endParaRPr lang="en-US" sz="1400" dirty="0"/>
+          </a:p>
+        </p:txBody>
+      </p:sp>
+      <p:sp>
+        <p:nvSpPr>
+          <p:cNvPr id="19" name="Text 16"/>
+          <p:cNvSpPr txBox="1"/>
+          <p:nvPr/>
+        </p:nvSpPr>
+        <p:spPr>
+          <a:xfrm>
+            <a:off x="640080" y="5897880"/>
+            <a:ext cx="10911535" cy="274320"/>
+          </a:xfrm>
+          <a:prstGeom prst="rect">
+            <a:avLst/>
+          </a:prstGeom>
+          <a:noFill/>
+          <a:ln/>
+        </p:spPr>
+        <p:txBody>
+          <a:bodyPr wrap="square" lIns="0" tIns="0" rIns="0" bIns="0" rtlCol="0" anchor="t"/>
+          <a:lstStyle/>
+          <a:p>
+            <a:pPr indent="0" marL="0">
+              <a:buNone/>
+            </a:pPr>
+            <a:r>
+              <a:rPr lang="en-US" sz="1100" dirty="0">
+                <a:solidFill>
+                  <a:schemeClr val="accent6"/>
+                </a:solidFill>
+              </a:rPr>
+              <a:t>위키 05편 1.1~1.3 · 메이플 옥션 예시는 위키 원문</a:t>
+            </a:r>
+            <a:endParaRPr lang="en-US" sz="1100" dirty="0"/>
+          </a:p>
+        </p:txBody>
+      </p:sp>
+      <p:sp>
+        <p:nvSpPr>
+          <p:cNvPr id="25" name="Slide Number Placeholder 0"/>
+          <p:cNvSpPr>
+            <a:spLocks noGrp="1"/>
+          </p:cNvSpPr>
+          <p:nvPr>
+            <p:ph type="sldNum" sz="quarter" idx="4294967295"/>
+          </p:nvPr>
+        </p:nvSpPr>
+        <p:spPr>
+          <a:xfrm>
+            <a:off x="11109960" y="6355080"/>
+            <a:ext cx="457200" cy="274320"/>
+          </a:xfrm>
+          <a:prstGeom prst="rect">
+            <a:avLst/>
+          </a:prstGeom>
+          <a:extLst>
+            <a:ext uri="{C572A759-6A51-4108-AA02-DFA0A04FC94B}">
+              <ma14:wrappingTextBoxFlag xmlns:ma14="http://schemas.microsoft.com/office/mac/drawingml/2011/main" val="0"/>
+            </a:ext>
+          </a:extLst>
+        </p:spPr>
+        <p:txBody>
+          <a:bodyPr/>
+          <a:lstStyle>
+            <a:lvl1pPr>
+              <a:defRPr sz="1000">
+                <a:solidFill>
+                  <a:srgbClr val="8A90A8"/>
+                </a:solidFill>
+              </a:defRPr>
+            </a:lvl1pPr>
+          </a:lstStyle>
+          <a:p>
+            <a:pPr algn="r"/>
+            <a:fld id="{F7021451-1387-4CA6-816F-3879F97B5CBC}" type="slidenum">
+              <a:rPr b="0" lang="en-US"/>
+              <a:t>57</a:t>
+            </a:fld>
+            <a:endParaRPr lang="en-US"/>
+          </a:p>
+        </p:txBody>
+      </p:sp>
+    </p:spTree>
+  </p:cSld>
+  <p:clrMapOvr>
+    <a:masterClrMapping/>
+  </p:clrMapOvr>
+</p:sld>
+</file>
+
+<file path=ppt/slides/slide58.xml><?xml version="1.0" encoding="utf-8"?>
+<p:sld xmlns:a="http://schemas.openxmlformats.org/drawingml/2006/main" xmlns:r="http://schemas.openxmlformats.org/officeDocument/2006/relationships" xmlns:p="http://schemas.openxmlformats.org/presentationml/2006/main">
+  <p:cSld name="Slide 58">
+    <p:spTree>
+      <p:nvGrpSpPr>
+        <p:cNvPr id="1" name=""/>
+        <p:cNvGrpSpPr/>
+        <p:nvPr/>
+      </p:nvGrpSpPr>
+      <p:grpSpPr>
+        <a:xfrm>
+          <a:off x="0" y="0"/>
+          <a:ext cx="0" cy="0"/>
+          <a:chOff x="0" y="0"/>
+          <a:chExt cx="0" cy="0"/>
+        </a:xfrm>
+      </p:grpSpPr>
+      <p:sp>
+        <p:nvSpPr>
+          <p:cNvPr id="2" name="Text 0"/>
+          <p:cNvSpPr/>
+          <p:nvPr>
+            <p:ph idx="100" type="body" hasCustomPrompt="1"/>
+          </p:nvPr>
+        </p:nvSpPr>
+        <p:spPr>
+          <a:xfrm>
+            <a:off x="640080" y="411480"/>
+            <a:ext cx="7315200" cy="320040"/>
+          </a:xfrm>
+          <a:prstGeom prst="rect">
+            <a:avLst/>
+          </a:prstGeom>
+          <a:noFill/>
+          <a:ln/>
+        </p:spPr>
+        <p:txBody>
+          <a:bodyPr wrap="square" lIns="0" tIns="0" rIns="0" bIns="0" rtlCol="0" anchor="t"/>
+          <a:lstStyle/>
+          <a:p>
+            <a:pPr algn="l" indent="0" marL="0">
+              <a:buNone/>
+            </a:pPr>
+            <a:r>
+              <a:rPr lang="en-US" sz="1500" b="1" dirty="0">
+                <a:solidFill>
+                  <a:srgbClr val="3A5BFF"/>
+                </a:solidFill>
+              </a:rPr>
+              <a:t>Ch4 · 간섭의 영향</a:t>
+            </a:r>
+            <a:endParaRPr lang="en-US" sz="1500" dirty="0"/>
+          </a:p>
+        </p:txBody>
+      </p:sp>
+      <p:sp>
+        <p:nvSpPr>
+          <p:cNvPr id="3" name="Text 0"/>
+          <p:cNvSpPr/>
+          <p:nvPr>
+            <p:ph idx="101" type="title" hasCustomPrompt="1"/>
+          </p:nvPr>
+        </p:nvSpPr>
+        <p:spPr>
+          <a:xfrm>
+            <a:off x="640080" y="749808"/>
+            <a:ext cx="10911535" cy="777240"/>
+          </a:xfrm>
+          <a:prstGeom prst="rect">
+            <a:avLst/>
+          </a:prstGeom>
+          <a:noFill/>
+          <a:ln/>
+        </p:spPr>
+        <p:txBody>
+          <a:bodyPr wrap="square" lIns="0" tIns="0" rIns="0" bIns="0" rtlCol="0" anchor="t"/>
+          <a:lstStyle/>
+          <a:p>
+            <a:pPr algn="l" indent="0" marL="0">
+              <a:buNone/>
+            </a:pPr>
+            <a:r>
+              <a:rPr lang="en-US" sz="2000" b="1" dirty="0">
+                <a:solidFill>
+                  <a:srgbClr val="1B1F3B"/>
+                </a:solidFill>
+              </a:rPr>
+              <a:t>간섭이 있으면 실험 결과가 이렇게 흔들린다</a:t>
+            </a:r>
+            <a:endParaRPr lang="en-US" sz="2000" dirty="0"/>
+          </a:p>
+        </p:txBody>
+      </p:sp>
+      <p:sp>
+        <p:nvSpPr>
+          <p:cNvPr id="5" name="Text 2"/>
+          <p:cNvSpPr txBox="1"/>
+          <p:nvPr/>
+        </p:nvSpPr>
+        <p:spPr>
+          <a:xfrm>
+            <a:off x="640080" y="1783080"/>
+            <a:ext cx="822960" cy="548640"/>
+          </a:xfrm>
+          <a:prstGeom prst="rect">
+            <a:avLst/>
+          </a:prstGeom>
+          <a:noFill/>
+          <a:ln/>
+        </p:spPr>
+        <p:txBody>
+          <a:bodyPr wrap="square" lIns="0" tIns="0" rIns="0" bIns="0" rtlCol="0" anchor="t"/>
+          <a:lstStyle/>
+          <a:p>
+            <a:pPr indent="0" marL="0">
+              <a:buNone/>
+            </a:pPr>
+            <a:r>
+              <a:rPr lang="en-US" sz="3000" b="1" dirty="0">
+                <a:solidFill>
+                  <a:schemeClr val="accent4"/>
+                </a:solidFill>
+              </a:rPr>
+              <a:t>01</a:t>
+            </a:r>
+            <a:endParaRPr lang="en-US" sz="3000" dirty="0"/>
+          </a:p>
+        </p:txBody>
+      </p:sp>
+      <p:sp>
+        <p:nvSpPr>
+          <p:cNvPr id="6" name="Text 3"/>
+          <p:cNvSpPr txBox="1"/>
+          <p:nvPr/>
+        </p:nvSpPr>
+        <p:spPr>
+          <a:xfrm>
+            <a:off x="1554480" y="1828800"/>
+            <a:ext cx="4480560" cy="914400"/>
+          </a:xfrm>
+          <a:prstGeom prst="rect">
+            <a:avLst/>
+          </a:prstGeom>
+          <a:noFill/>
+          <a:ln/>
+        </p:spPr>
+        <p:txBody>
+          <a:bodyPr wrap="square" lIns="0" tIns="0" rIns="0" bIns="0" rtlCol="0" anchor="t"/>
+          <a:lstStyle/>
+          <a:p>
+            <a:pPr indent="0" marL="0">
+              <a:buNone/>
+            </a:pPr>
+            <a:r>
+              <a:rPr lang="en-US" sz="2000" b="1" dirty="0">
+                <a:solidFill>
+                  <a:schemeClr val="tx1"/>
+                </a:solidFill>
+              </a:rPr>
+              <a:t>대조군 오염</a:t>
+            </a:r>
+            <a:endParaRPr lang="en-US" sz="1500" dirty="0"/>
+          </a:p>
+          <a:p>
+            <a:pPr indent="0" marL="0">
+              <a:buNone/>
+            </a:pPr>
+            <a:r>
+              <a:rPr lang="en-US" sz="1500" dirty="0">
+                <a:solidFill>
+                  <a:schemeClr val="tx2"/>
+                </a:solidFill>
+              </a:rPr>
+              <a:t>A가 더 이상 '처치 없는 기준선'이 아니다</a:t>
+            </a:r>
+            <a:endParaRPr lang="en-US" sz="1500" dirty="0"/>
+          </a:p>
+        </p:txBody>
+      </p:sp>
+      <p:sp>
+        <p:nvSpPr>
+          <p:cNvPr id="7" name="Text 4"/>
+          <p:cNvSpPr txBox="1"/>
+          <p:nvPr/>
+        </p:nvSpPr>
+        <p:spPr>
+          <a:xfrm>
+            <a:off x="6217920" y="1783080"/>
+            <a:ext cx="822960" cy="548640"/>
+          </a:xfrm>
+          <a:prstGeom prst="rect">
+            <a:avLst/>
+          </a:prstGeom>
+          <a:noFill/>
+          <a:ln/>
+        </p:spPr>
+        <p:txBody>
+          <a:bodyPr wrap="square" lIns="0" tIns="0" rIns="0" bIns="0" rtlCol="0" anchor="t"/>
+          <a:lstStyle/>
+          <a:p>
+            <a:pPr indent="0" marL="0">
+              <a:buNone/>
+            </a:pPr>
+            <a:r>
+              <a:rPr lang="en-US" sz="3000" b="1" dirty="0">
+                <a:solidFill>
+                  <a:schemeClr val="accent4"/>
+                </a:solidFill>
+              </a:rPr>
+              <a:t>02</a:t>
+            </a:r>
+            <a:endParaRPr lang="en-US" sz="3000" dirty="0"/>
+          </a:p>
+        </p:txBody>
+      </p:sp>
+      <p:sp>
+        <p:nvSpPr>
+          <p:cNvPr id="8" name="Text 5"/>
+          <p:cNvSpPr txBox="1"/>
+          <p:nvPr/>
+        </p:nvSpPr>
+        <p:spPr>
+          <a:xfrm>
+            <a:off x="7132320" y="1828800"/>
+            <a:ext cx="4480560" cy="914400"/>
+          </a:xfrm>
+          <a:prstGeom prst="rect">
+            <a:avLst/>
+          </a:prstGeom>
+          <a:noFill/>
+          <a:ln/>
+        </p:spPr>
+        <p:txBody>
+          <a:bodyPr wrap="square" lIns="0" tIns="0" rIns="0" bIns="0" rtlCol="0" anchor="t"/>
+          <a:lstStyle/>
+          <a:p>
+            <a:pPr indent="0" marL="0">
+              <a:buNone/>
+            </a:pPr>
+            <a:r>
+              <a:rPr lang="en-US" sz="2000" b="1" dirty="0">
+                <a:solidFill>
+                  <a:schemeClr val="tx1"/>
+                </a:solidFill>
+              </a:rPr>
+              <a:t>효과의 과대·과소 추정</a:t>
+            </a:r>
+            <a:endParaRPr lang="en-US" sz="1500" dirty="0"/>
+          </a:p>
+          <a:p>
+            <a:pPr indent="0" marL="0">
+              <a:buNone/>
+            </a:pPr>
+            <a:r>
+              <a:rPr lang="en-US" sz="1500" dirty="0">
+                <a:solidFill>
+                  <a:schemeClr val="tx2"/>
+                </a:solidFill>
+              </a:rPr>
+              <a:t>내 결과가 다른 사람의 배정에도 좌우된다</a:t>
+            </a:r>
+            <a:endParaRPr lang="en-US" sz="1500" dirty="0"/>
+          </a:p>
+        </p:txBody>
+      </p:sp>
+      <p:sp>
+        <p:nvSpPr>
+          <p:cNvPr id="9" name="Text 6"/>
+          <p:cNvSpPr txBox="1"/>
+          <p:nvPr/>
+        </p:nvSpPr>
+        <p:spPr>
+          <a:xfrm>
+            <a:off x="640080" y="2880360"/>
+            <a:ext cx="822960" cy="548640"/>
+          </a:xfrm>
+          <a:prstGeom prst="rect">
+            <a:avLst/>
+          </a:prstGeom>
+          <a:noFill/>
+          <a:ln/>
+        </p:spPr>
+        <p:txBody>
+          <a:bodyPr wrap="square" lIns="0" tIns="0" rIns="0" bIns="0" rtlCol="0" anchor="t"/>
+          <a:lstStyle/>
+          <a:p>
+            <a:pPr indent="0" marL="0">
+              <a:buNone/>
+            </a:pPr>
+            <a:r>
+              <a:rPr lang="en-US" sz="3000" b="1" dirty="0">
+                <a:solidFill>
+                  <a:schemeClr val="accent4"/>
+                </a:solidFill>
+              </a:rPr>
+              <a:t>03</a:t>
+            </a:r>
+            <a:endParaRPr lang="en-US" sz="3000" dirty="0"/>
+          </a:p>
+        </p:txBody>
+      </p:sp>
+      <p:sp>
+        <p:nvSpPr>
+          <p:cNvPr id="10" name="Text 7"/>
+          <p:cNvSpPr txBox="1"/>
+          <p:nvPr/>
+        </p:nvSpPr>
+        <p:spPr>
+          <a:xfrm>
+            <a:off x="1554480" y="2926080"/>
+            <a:ext cx="4480560" cy="914400"/>
+          </a:xfrm>
+          <a:prstGeom prst="rect">
+            <a:avLst/>
+          </a:prstGeom>
+          <a:noFill/>
+          <a:ln/>
+        </p:spPr>
+        <p:txBody>
+          <a:bodyPr wrap="square" lIns="0" tIns="0" rIns="0" bIns="0" rtlCol="0" anchor="t"/>
+          <a:lstStyle/>
+          <a:p>
+            <a:pPr indent="0" marL="0">
+              <a:buNone/>
+            </a:pPr>
+            <a:r>
+              <a:rPr lang="en-US" sz="2000" b="1" dirty="0">
+                <a:solidFill>
+                  <a:schemeClr val="tx1"/>
+                </a:solidFill>
+              </a:rPr>
+              <a:t>ATE의 의미가 흐려진다</a:t>
+            </a:r>
+            <a:endParaRPr lang="en-US" sz="1500" dirty="0"/>
+          </a:p>
+          <a:p>
+            <a:pPr indent="0" marL="0">
+              <a:buNone/>
+            </a:pPr>
+            <a:r>
+              <a:rPr lang="en-US" sz="1500" dirty="0">
+                <a:solidFill>
+                  <a:schemeClr val="tx2"/>
+                </a:solidFill>
+              </a:rPr>
+              <a:t>Yᵢ(Tᵢ)가 아니라 Yᵢ(T₁, T₂, …, Tₙ)</a:t>
+            </a:r>
+            <a:endParaRPr lang="en-US" sz="1500" dirty="0"/>
+          </a:p>
+        </p:txBody>
+      </p:sp>
+      <p:sp>
+        <p:nvSpPr>
+          <p:cNvPr id="11" name="Text 8"/>
+          <p:cNvSpPr txBox="1"/>
+          <p:nvPr/>
+        </p:nvSpPr>
+        <p:spPr>
+          <a:xfrm>
+            <a:off x="6217920" y="2880360"/>
+            <a:ext cx="822960" cy="548640"/>
+          </a:xfrm>
+          <a:prstGeom prst="rect">
+            <a:avLst/>
+          </a:prstGeom>
+          <a:noFill/>
+          <a:ln/>
+        </p:spPr>
+        <p:txBody>
+          <a:bodyPr wrap="square" lIns="0" tIns="0" rIns="0" bIns="0" rtlCol="0" anchor="t"/>
+          <a:lstStyle/>
+          <a:p>
+            <a:pPr indent="0" marL="0">
+              <a:buNone/>
+            </a:pPr>
+            <a:r>
+              <a:rPr lang="en-US" sz="3000" b="1" dirty="0">
+                <a:solidFill>
+                  <a:schemeClr val="accent4"/>
+                </a:solidFill>
+              </a:rPr>
+              <a:t>04</a:t>
+            </a:r>
+            <a:endParaRPr lang="en-US" sz="3000" dirty="0"/>
+          </a:p>
+        </p:txBody>
+      </p:sp>
+      <p:sp>
+        <p:nvSpPr>
+          <p:cNvPr id="12" name="Text 9"/>
+          <p:cNvSpPr txBox="1"/>
+          <p:nvPr/>
+        </p:nvSpPr>
+        <p:spPr>
+          <a:xfrm>
+            <a:off x="7132320" y="2926080"/>
+            <a:ext cx="4480560" cy="914400"/>
+          </a:xfrm>
+          <a:prstGeom prst="rect">
+            <a:avLst/>
+          </a:prstGeom>
+          <a:noFill/>
+          <a:ln/>
+        </p:spPr>
+        <p:txBody>
+          <a:bodyPr wrap="square" lIns="0" tIns="0" rIns="0" bIns="0" rtlCol="0" anchor="t"/>
+          <a:lstStyle/>
+          <a:p>
+            <a:pPr indent="0" marL="0">
+              <a:buNone/>
+            </a:pPr>
+            <a:r>
+              <a:rPr lang="en-US" sz="2000" b="1" dirty="0">
+                <a:solidFill>
+                  <a:schemeClr val="tx1"/>
+                </a:solidFill>
+              </a:rPr>
+              <a:t>부분 적용 ≠ 전체 적용</a:t>
+            </a:r>
+            <a:endParaRPr lang="en-US" sz="1500" dirty="0"/>
+          </a:p>
+          <a:p>
+            <a:pPr indent="0" marL="0">
+              <a:buNone/>
+            </a:pPr>
+            <a:r>
+              <a:rPr lang="en-US" sz="1500" dirty="0">
+                <a:solidFill>
+                  <a:schemeClr val="tx2"/>
+                </a:solidFill>
+              </a:rPr>
+              <a:t>실험에서 잰 효과가 100% 출시 때와 다를 수 있다</a:t>
+            </a:r>
+            <a:endParaRPr lang="en-US" sz="1500" dirty="0"/>
+          </a:p>
+        </p:txBody>
+      </p:sp>
+      <p:sp>
+        <p:nvSpPr>
+          <p:cNvPr id="13" name="Text 10"/>
+          <p:cNvSpPr txBox="1"/>
+          <p:nvPr/>
+        </p:nvSpPr>
+        <p:spPr>
+          <a:xfrm>
+            <a:off x="640080" y="3977640"/>
+            <a:ext cx="822960" cy="548640"/>
+          </a:xfrm>
+          <a:prstGeom prst="rect">
+            <a:avLst/>
+          </a:prstGeom>
+          <a:noFill/>
+          <a:ln/>
+        </p:spPr>
+        <p:txBody>
+          <a:bodyPr wrap="square" lIns="0" tIns="0" rIns="0" bIns="0" rtlCol="0" anchor="t"/>
+          <a:lstStyle/>
+          <a:p>
+            <a:pPr indent="0" marL="0">
+              <a:buNone/>
+            </a:pPr>
+            <a:r>
+              <a:rPr lang="en-US" sz="3000" b="1" dirty="0">
+                <a:solidFill>
+                  <a:schemeClr val="accent4"/>
+                </a:solidFill>
+              </a:rPr>
+              <a:t>05</a:t>
+            </a:r>
+            <a:endParaRPr lang="en-US" sz="3000" dirty="0"/>
+          </a:p>
+        </p:txBody>
+      </p:sp>
+      <p:sp>
+        <p:nvSpPr>
+          <p:cNvPr id="14" name="Text 11"/>
+          <p:cNvSpPr txBox="1"/>
+          <p:nvPr/>
+        </p:nvSpPr>
+        <p:spPr>
+          <a:xfrm>
+            <a:off x="1554480" y="4023360"/>
+            <a:ext cx="4480560" cy="914400"/>
+          </a:xfrm>
+          <a:prstGeom prst="rect">
+            <a:avLst/>
+          </a:prstGeom>
+          <a:noFill/>
+          <a:ln/>
+        </p:spPr>
+        <p:txBody>
+          <a:bodyPr wrap="square" lIns="0" tIns="0" rIns="0" bIns="0" rtlCol="0" anchor="t"/>
+          <a:lstStyle/>
+          <a:p>
+            <a:pPr indent="0" marL="0">
+              <a:buNone/>
+            </a:pPr>
+            <a:r>
+              <a:rPr lang="en-US" sz="2000" b="1" dirty="0">
+                <a:solidFill>
+                  <a:schemeClr val="tx1"/>
+                </a:solidFill>
+              </a:rPr>
+              <a:t>유의해도 인과는 아니다</a:t>
+            </a:r>
+            <a:endParaRPr lang="en-US" sz="1500" dirty="0"/>
+          </a:p>
+          <a:p>
+            <a:pPr indent="0" marL="0">
+              <a:buNone/>
+            </a:pPr>
+            <a:r>
+              <a:rPr lang="en-US" sz="1500" dirty="0">
+                <a:solidFill>
+                  <a:schemeClr val="tx2"/>
+                </a:solidFill>
+              </a:rPr>
+              <a:t>표본을 늘려도 안 고쳐지고, 표준오차·신뢰구간도 부정확해진다</a:t>
+            </a:r>
+            <a:endParaRPr lang="en-US" sz="1500" dirty="0"/>
+          </a:p>
+        </p:txBody>
+      </p:sp>
+      <p:sp>
+        <p:nvSpPr>
+          <p:cNvPr id="15" name="Text 12"/>
+          <p:cNvSpPr txBox="1"/>
+          <p:nvPr/>
+        </p:nvSpPr>
+        <p:spPr>
+          <a:xfrm>
+            <a:off x="6217920" y="4069080"/>
+            <a:ext cx="5349240" cy="1097280"/>
+          </a:xfrm>
+          <a:prstGeom prst="rect">
+            <a:avLst/>
+          </a:prstGeom>
+          <a:noFill/>
+          <a:ln/>
+        </p:spPr>
+        <p:txBody>
+          <a:bodyPr wrap="square" lIns="0" tIns="0" rIns="0" bIns="0" rtlCol="0" anchor="t"/>
+          <a:lstStyle/>
+          <a:p>
+            <a:pPr indent="0" marL="0">
+              <a:buNone/>
+            </a:pPr>
+            <a:r>
+              <a:rPr lang="en-US" sz="1500" b="1" dirty="0">
+                <a:solidFill>
+                  <a:schemeClr val="accent1"/>
+                </a:solidFill>
+              </a:rPr>
+              <a:t>실무에서 이렇게 말한다  </a:t>
+            </a:r>
+            <a:pPr indent="0" marL="0">
+              <a:buNone/>
+            </a:pPr>
+            <a:r>
+              <a:rPr lang="en-US" sz="1500" dirty="0">
+                <a:solidFill>
+                  <a:schemeClr val="tx1"/>
+                </a:solidFill>
+              </a:rPr>
+              <a:t>"사용자 단위로 나눈 마켓플레이스 실험이라, 이 효과는 전체 출시 효과와 다를 수 있습니다"</a:t>
+            </a:r>
+            <a:endParaRPr lang="en-US" sz="1500" dirty="0"/>
+          </a:p>
+        </p:txBody>
+      </p:sp>
+      <p:sp>
+        <p:nvSpPr>
+          <p:cNvPr id="16" name="Text 13"/>
+          <p:cNvSpPr txBox="1"/>
+          <p:nvPr/>
+        </p:nvSpPr>
+        <p:spPr>
+          <a:xfrm>
+            <a:off x="640080" y="5897880"/>
+            <a:ext cx="10911535" cy="274320"/>
+          </a:xfrm>
+          <a:prstGeom prst="rect">
+            <a:avLst/>
+          </a:prstGeom>
+          <a:noFill/>
+          <a:ln/>
+        </p:spPr>
+        <p:txBody>
+          <a:bodyPr wrap="square" lIns="0" tIns="0" rIns="0" bIns="0" rtlCol="0" anchor="t"/>
+          <a:lstStyle/>
+          <a:p>
+            <a:pPr indent="0" marL="0">
+              <a:buNone/>
+            </a:pPr>
+            <a:r>
+              <a:rPr lang="en-US" sz="1100" dirty="0">
+                <a:solidFill>
+                  <a:schemeClr val="accent6"/>
+                </a:solidFill>
+              </a:rPr>
+              <a:t>위키 05편 1.4</a:t>
+            </a:r>
+            <a:endParaRPr lang="en-US" sz="1100" dirty="0"/>
+          </a:p>
+        </p:txBody>
+      </p:sp>
+      <p:sp>
+        <p:nvSpPr>
+          <p:cNvPr id="25" name="Slide Number Placeholder 0"/>
+          <p:cNvSpPr>
+            <a:spLocks noGrp="1"/>
+          </p:cNvSpPr>
+          <p:nvPr>
+            <p:ph type="sldNum" sz="quarter" idx="4294967295"/>
+          </p:nvPr>
+        </p:nvSpPr>
+        <p:spPr>
+          <a:xfrm>
+            <a:off x="11109960" y="6355080"/>
+            <a:ext cx="457200" cy="274320"/>
+          </a:xfrm>
+          <a:prstGeom prst="rect">
+            <a:avLst/>
+          </a:prstGeom>
+          <a:extLst>
+            <a:ext uri="{C572A759-6A51-4108-AA02-DFA0A04FC94B}">
+              <ma14:wrappingTextBoxFlag xmlns:ma14="http://schemas.microsoft.com/office/mac/drawingml/2011/main" val="0"/>
+            </a:ext>
+          </a:extLst>
+        </p:spPr>
+        <p:txBody>
+          <a:bodyPr/>
+          <a:lstStyle>
+            <a:lvl1pPr>
+              <a:defRPr sz="1000">
+                <a:solidFill>
+                  <a:srgbClr val="8A90A8"/>
+                </a:solidFill>
+              </a:defRPr>
+            </a:lvl1pPr>
+          </a:lstStyle>
+          <a:p>
+            <a:pPr algn="r"/>
+            <a:fld id="{F7021451-1387-4CA6-816F-3879F97B5CBC}" type="slidenum">
+              <a:rPr b="0" lang="en-US"/>
+              <a:t>58</a:t>
+            </a:fld>
+            <a:endParaRPr lang="en-US"/>
+          </a:p>
+        </p:txBody>
+      </p:sp>
+    </p:spTree>
+  </p:cSld>
+  <p:clrMapOvr>
+    <a:masterClrMapping/>
+  </p:clrMapOvr>
+</p:sld>
+</file>
+
+<file path=ppt/slides/slide59.xml><?xml version="1.0" encoding="utf-8"?>
+<p:sld xmlns:a="http://schemas.openxmlformats.org/drawingml/2006/main" xmlns:r="http://schemas.openxmlformats.org/officeDocument/2006/relationships" xmlns:p="http://schemas.openxmlformats.org/presentationml/2006/main">
+  <p:cSld name="Slide 59">
+    <p:spTree>
+      <p:nvGrpSpPr>
+        <p:cNvPr id="1" name=""/>
+        <p:cNvGrpSpPr/>
+        <p:nvPr/>
+      </p:nvGrpSpPr>
+      <p:grpSpPr>
+        <a:xfrm>
+          <a:off x="0" y="0"/>
+          <a:ext cx="0" cy="0"/>
+          <a:chOff x="0" y="0"/>
+          <a:chExt cx="0" cy="0"/>
+        </a:xfrm>
+      </p:grpSpPr>
+      <p:sp>
+        <p:nvSpPr>
+          <p:cNvPr id="2" name="Text 0"/>
+          <p:cNvSpPr/>
+          <p:nvPr>
+            <p:ph idx="100" type="body" hasCustomPrompt="1"/>
+          </p:nvPr>
+        </p:nvSpPr>
+        <p:spPr>
+          <a:xfrm>
+            <a:off x="640080" y="411480"/>
+            <a:ext cx="7315200" cy="320040"/>
+          </a:xfrm>
+          <a:prstGeom prst="rect">
+            <a:avLst/>
+          </a:prstGeom>
+          <a:noFill/>
+          <a:ln/>
+        </p:spPr>
+        <p:txBody>
+          <a:bodyPr wrap="square" lIns="0" tIns="0" rIns="0" bIns="0" rtlCol="0" anchor="t"/>
+          <a:lstStyle/>
+          <a:p>
+            <a:pPr algn="l" indent="0" marL="0">
+              <a:buNone/>
+            </a:pPr>
+            <a:r>
+              <a:rPr lang="en-US" sz="1500" b="1" dirty="0">
+                <a:solidFill>
+                  <a:srgbClr val="3A5BFF"/>
+                </a:solidFill>
+              </a:rPr>
+              <a:t>Ch4 · 간섭 줄이기</a:t>
+            </a:r>
+            <a:endParaRPr lang="en-US" sz="1500" dirty="0"/>
+          </a:p>
+        </p:txBody>
+      </p:sp>
+      <p:sp>
+        <p:nvSpPr>
+          <p:cNvPr id="3" name="Text 0"/>
+          <p:cNvSpPr/>
+          <p:nvPr>
+            <p:ph idx="101" type="title" hasCustomPrompt="1"/>
+          </p:nvPr>
+        </p:nvSpPr>
+        <p:spPr>
+          <a:xfrm>
+            <a:off x="640080" y="749808"/>
+            <a:ext cx="10911535" cy="777240"/>
+          </a:xfrm>
+          <a:prstGeom prst="rect">
+            <a:avLst/>
+          </a:prstGeom>
+          <a:noFill/>
+          <a:ln/>
+        </p:spPr>
+        <p:txBody>
+          <a:bodyPr wrap="square" lIns="0" tIns="0" rIns="0" bIns="0" rtlCol="0" anchor="t"/>
+          <a:lstStyle/>
+          <a:p>
+            <a:pPr algn="l" indent="0" marL="0">
+              <a:buNone/>
+            </a:pPr>
+            <a:r>
+              <a:rPr lang="en-US" sz="2000" b="1" dirty="0">
+                <a:solidFill>
+                  <a:srgbClr val="1B1F3B"/>
+                </a:solidFill>
+              </a:rPr>
+              <a:t>간섭을 줄이려면 나누는 단위를 다시 설계한다</a:t>
             </a:r>
             <a:endParaRPr lang="en-US" sz="2000" dirty="0"/>
           </a:p>
@@ -48174,7 +49815,1853 @@
       </p:sp>
       <p:graphicFrame>
         <p:nvGraphicFramePr>
-          <p:cNvPr id="58" name="Table 0"/>
+          <p:cNvPr id="60" name="Table 0"/>
+          <p:cNvGraphicFramePr>
+            <a:graphicFrameLocks noGrp="1"/>
+          </p:cNvGraphicFramePr>
+          <p:nvPr>
+            <p:extLst>
+              <p:ext uri="{D42A27DB-BD31-4B8C-83A1-F6EECF244321}">
+                <p14:modId xmlns:p14="http://schemas.microsoft.com/office/powerpoint/2010/main" val="1579011935"/>
+              </p:ext>
+            </p:extLst>
+          </p:nvPr>
+        </p:nvGraphicFramePr>
+        <p:xfrm>
+          <a:off x="640080" y="1691640"/>
+          <a:ext cx="10911535" cy="914400"/>
+        </p:xfrm>
+        <a:graphic>
+          <a:graphicData uri="http://schemas.openxmlformats.org/drawingml/2006/table">
+            <a:tbl>
+              <a:tblPr/>
+              <a:tblGrid>
+                <a:gridCol w="2377440"/>
+                <a:gridCol w="3200400"/>
+                <a:gridCol w="2743200"/>
+                <a:gridCol w="2587752"/>
+              </a:tblGrid>
+              <a:tr h="566928">
+                <a:tc>
+                  <a:txBody>
+                    <a:bodyPr/>
+                    <a:lstStyle/>
+                    <a:p>
+                      <a:pPr indent="0" marL="0">
+                        <a:buNone/>
+                      </a:pPr>
+                      <a:r>
+                        <a:rPr lang="en-US" sz="1400" b="1" dirty="0">
+                          <a:solidFill>
+                            <a:srgbClr val="555C7A"/>
+                          </a:solidFill>
+                        </a:rPr>
+                        <a:t>방법</a:t>
+                      </a:r>
+                      <a:endParaRPr lang="en-US" sz="1400" dirty="0"/>
+                    </a:p>
+                  </a:txBody>
+                  <a:tcPr marL="0" marR="109728" marT="73152" marB="73152" anchor="ctr">
+                    <a:lnL w="0" cap="flat" cmpd="sng" algn="ctr">
+                      <a:noFill/>
+                    </a:lnL>
+                    <a:lnR w="0" cap="flat" cmpd="sng" algn="ctr">
+                      <a:noFill/>
+                    </a:lnR>
+                    <a:lnT w="0" cap="flat" cmpd="sng" algn="ctr">
+                      <a:noFill/>
+                    </a:lnT>
+                    <a:lnB w="12700" cap="flat" cmpd="sng" algn="ctr">
+                      <a:solidFill>
+                        <a:srgbClr val="1B1F3B"/>
+                      </a:solidFill>
+                      <a:prstDash val="solid"/>
+                      <a:round/>
+                      <a:headEnd type="none" w="med" len="med"/>
+                      <a:tailEnd type="none" w="med" len="med"/>
+                    </a:lnB>
+                  </a:tcPr>
+                </a:tc>
+                <a:tc>
+                  <a:txBody>
+                    <a:bodyPr/>
+                    <a:lstStyle/>
+                    <a:p>
+                      <a:pPr indent="0" marL="0">
+                        <a:buNone/>
+                      </a:pPr>
+                      <a:r>
+                        <a:rPr lang="en-US" sz="1400" b="1" dirty="0">
+                          <a:solidFill>
+                            <a:srgbClr val="555C7A"/>
+                          </a:solidFill>
+                        </a:rPr>
+                        <a:t>아이디어</a:t>
+                      </a:r>
+                      <a:endParaRPr lang="en-US" sz="1400" dirty="0"/>
+                    </a:p>
+                  </a:txBody>
+                  <a:tcPr marL="0" marR="109728" marT="73152" marB="73152" anchor="ctr">
+                    <a:lnL w="0" cap="flat" cmpd="sng" algn="ctr">
+                      <a:noFill/>
+                    </a:lnL>
+                    <a:lnR w="0" cap="flat" cmpd="sng" algn="ctr">
+                      <a:noFill/>
+                    </a:lnR>
+                    <a:lnT w="0" cap="flat" cmpd="sng" algn="ctr">
+                      <a:noFill/>
+                    </a:lnT>
+                    <a:lnB w="12700" cap="flat" cmpd="sng" algn="ctr">
+                      <a:solidFill>
+                        <a:srgbClr val="1B1F3B"/>
+                      </a:solidFill>
+                      <a:prstDash val="solid"/>
+                      <a:round/>
+                      <a:headEnd type="none" w="med" len="med"/>
+                      <a:tailEnd type="none" w="med" len="med"/>
+                    </a:lnB>
+                  </a:tcPr>
+                </a:tc>
+                <a:tc>
+                  <a:txBody>
+                    <a:bodyPr/>
+                    <a:lstStyle/>
+                    <a:p>
+                      <a:pPr indent="0" marL="0">
+                        <a:buNone/>
+                      </a:pPr>
+                      <a:r>
+                        <a:rPr lang="en-US" sz="1400" b="1" dirty="0">
+                          <a:solidFill>
+                            <a:srgbClr val="555C7A"/>
+                          </a:solidFill>
+                        </a:rPr>
+                        <a:t>이럴 때</a:t>
+                      </a:r>
+                      <a:endParaRPr lang="en-US" sz="1400" dirty="0"/>
+                    </a:p>
+                  </a:txBody>
+                  <a:tcPr marL="0" marR="109728" marT="73152" marB="73152" anchor="ctr">
+                    <a:lnL w="0" cap="flat" cmpd="sng" algn="ctr">
+                      <a:noFill/>
+                    </a:lnL>
+                    <a:lnR w="0" cap="flat" cmpd="sng" algn="ctr">
+                      <a:noFill/>
+                    </a:lnR>
+                    <a:lnT w="0" cap="flat" cmpd="sng" algn="ctr">
+                      <a:noFill/>
+                    </a:lnT>
+                    <a:lnB w="12700" cap="flat" cmpd="sng" algn="ctr">
+                      <a:solidFill>
+                        <a:srgbClr val="1B1F3B"/>
+                      </a:solidFill>
+                      <a:prstDash val="solid"/>
+                      <a:round/>
+                      <a:headEnd type="none" w="med" len="med"/>
+                      <a:tailEnd type="none" w="med" len="med"/>
+                    </a:lnB>
+                  </a:tcPr>
+                </a:tc>
+                <a:tc>
+                  <a:txBody>
+                    <a:bodyPr/>
+                    <a:lstStyle/>
+                    <a:p>
+                      <a:pPr indent="0" marL="0">
+                        <a:buNone/>
+                      </a:pPr>
+                      <a:r>
+                        <a:rPr lang="en-US" sz="1400" b="1" dirty="0">
+                          <a:solidFill>
+                            <a:srgbClr val="555C7A"/>
+                          </a:solidFill>
+                        </a:rPr>
+                        <a:t>대가</a:t>
+                      </a:r>
+                      <a:endParaRPr lang="en-US" sz="1400" dirty="0"/>
+                    </a:p>
+                  </a:txBody>
+                  <a:tcPr marL="0" marR="109728" marT="73152" marB="73152" anchor="ctr">
+                    <a:lnL w="0" cap="flat" cmpd="sng" algn="ctr">
+                      <a:noFill/>
+                    </a:lnL>
+                    <a:lnR w="0" cap="flat" cmpd="sng" algn="ctr">
+                      <a:noFill/>
+                    </a:lnR>
+                    <a:lnT w="0" cap="flat" cmpd="sng" algn="ctr">
+                      <a:noFill/>
+                    </a:lnT>
+                    <a:lnB w="12700" cap="flat" cmpd="sng" algn="ctr">
+                      <a:solidFill>
+                        <a:srgbClr val="1B1F3B"/>
+                      </a:solidFill>
+                      <a:prstDash val="solid"/>
+                      <a:round/>
+                      <a:headEnd type="none" w="med" len="med"/>
+                      <a:tailEnd type="none" w="med" len="med"/>
+                    </a:lnB>
+                  </a:tcPr>
+                </a:tc>
+              </a:tr>
+              <a:tr h="566928">
+                <a:tc>
+                  <a:txBody>
+                    <a:bodyPr/>
+                    <a:lstStyle/>
+                    <a:p>
+                      <a:pPr indent="0" marL="0">
+                        <a:buNone/>
+                      </a:pPr>
+                      <a:r>
+                        <a:rPr lang="en-US" sz="1500" b="1" dirty="0">
+                          <a:solidFill>
+                            <a:srgbClr val="1B1F3B"/>
+                          </a:solidFill>
+                        </a:rPr>
+                        <a:t>Cluster Randomization</a:t>
+                      </a:r>
+                      <a:endParaRPr lang="en-US" sz="1500" dirty="0"/>
+                    </a:p>
+                  </a:txBody>
+                  <a:tcPr marL="0" marR="109728" marT="73152" marB="73152" anchor="ctr">
+                    <a:lnL w="0" cap="flat" cmpd="sng" algn="ctr">
+                      <a:noFill/>
+                    </a:lnL>
+                    <a:lnR w="0" cap="flat" cmpd="sng" algn="ctr">
+                      <a:noFill/>
+                    </a:lnR>
+                    <a:lnT w="0" cap="flat" cmpd="sng" algn="ctr">
+                      <a:noFill/>
+                    </a:lnT>
+                    <a:lnB w="9525" cap="flat" cmpd="sng" algn="ctr">
+                      <a:solidFill>
+                        <a:srgbClr val="E3E7F1"/>
+                      </a:solidFill>
+                      <a:prstDash val="solid"/>
+                      <a:round/>
+                      <a:headEnd type="none" w="med" len="med"/>
+                      <a:tailEnd type="none" w="med" len="med"/>
+                    </a:lnB>
+                  </a:tcPr>
+                </a:tc>
+                <a:tc>
+                  <a:txBody>
+                    <a:bodyPr/>
+                    <a:lstStyle/>
+                    <a:p>
+                      <a:pPr indent="0" marL="0">
+                        <a:buNone/>
+                      </a:pPr>
+                      <a:r>
+                        <a:rPr lang="en-US" sz="1500" dirty="0">
+                          <a:solidFill>
+                            <a:srgbClr val="1B1F3B"/>
+                          </a:solidFill>
+                        </a:rPr>
+                        <a:t>서로 영향을 주는 사용자를 묶어 통째로 배정</a:t>
+                      </a:r>
+                      <a:endParaRPr lang="en-US" sz="1500" dirty="0"/>
+                    </a:p>
+                  </a:txBody>
+                  <a:tcPr marL="0" marR="109728" marT="73152" marB="73152" anchor="ctr">
+                    <a:lnL w="0" cap="flat" cmpd="sng" algn="ctr">
+                      <a:noFill/>
+                    </a:lnL>
+                    <a:lnR w="0" cap="flat" cmpd="sng" algn="ctr">
+                      <a:noFill/>
+                    </a:lnR>
+                    <a:lnT w="0" cap="flat" cmpd="sng" algn="ctr">
+                      <a:noFill/>
+                    </a:lnT>
+                    <a:lnB w="9525" cap="flat" cmpd="sng" algn="ctr">
+                      <a:solidFill>
+                        <a:srgbClr val="E3E7F1"/>
+                      </a:solidFill>
+                      <a:prstDash val="solid"/>
+                      <a:round/>
+                      <a:headEnd type="none" w="med" len="med"/>
+                      <a:tailEnd type="none" w="med" len="med"/>
+                    </a:lnB>
+                  </a:tcPr>
+                </a:tc>
+                <a:tc>
+                  <a:txBody>
+                    <a:bodyPr/>
+                    <a:lstStyle/>
+                    <a:p>
+                      <a:pPr indent="0" marL="0">
+                        <a:buNone/>
+                      </a:pPr>
+                      <a:r>
+                        <a:rPr lang="en-US" sz="1500" dirty="0">
+                          <a:solidFill>
+                            <a:srgbClr val="1B1F3B"/>
+                          </a:solidFill>
+                        </a:rPr>
+                        <a:t>친구·동네처럼 연결이 뚜렷할 때</a:t>
+                      </a:r>
+                      <a:endParaRPr lang="en-US" sz="1500" dirty="0"/>
+                    </a:p>
+                  </a:txBody>
+                  <a:tcPr marL="0" marR="109728" marT="73152" marB="73152" anchor="ctr">
+                    <a:lnL w="0" cap="flat" cmpd="sng" algn="ctr">
+                      <a:noFill/>
+                    </a:lnL>
+                    <a:lnR w="0" cap="flat" cmpd="sng" algn="ctr">
+                      <a:noFill/>
+                    </a:lnR>
+                    <a:lnT w="0" cap="flat" cmpd="sng" algn="ctr">
+                      <a:noFill/>
+                    </a:lnT>
+                    <a:lnB w="9525" cap="flat" cmpd="sng" algn="ctr">
+                      <a:solidFill>
+                        <a:srgbClr val="E3E7F1"/>
+                      </a:solidFill>
+                      <a:prstDash val="solid"/>
+                      <a:round/>
+                      <a:headEnd type="none" w="med" len="med"/>
+                      <a:tailEnd type="none" w="med" len="med"/>
+                    </a:lnB>
+                  </a:tcPr>
+                </a:tc>
+                <a:tc>
+                  <a:txBody>
+                    <a:bodyPr/>
+                    <a:lstStyle/>
+                    <a:p>
+                      <a:pPr indent="0" marL="0">
+                        <a:buNone/>
+                      </a:pPr>
+                      <a:r>
+                        <a:rPr lang="en-US" sz="1500" dirty="0">
+                          <a:solidFill>
+                            <a:srgbClr val="1B1F3B"/>
+                          </a:solidFill>
+                        </a:rPr>
+                        <a:t>독립 단위 수 감소 → 검정력 저하</a:t>
+                      </a:r>
+                      <a:endParaRPr lang="en-US" sz="1500" dirty="0"/>
+                    </a:p>
+                  </a:txBody>
+                  <a:tcPr marL="0" marR="109728" marT="73152" marB="73152" anchor="ctr">
+                    <a:lnL w="0" cap="flat" cmpd="sng" algn="ctr">
+                      <a:noFill/>
+                    </a:lnL>
+                    <a:lnR w="0" cap="flat" cmpd="sng" algn="ctr">
+                      <a:noFill/>
+                    </a:lnR>
+                    <a:lnT w="0" cap="flat" cmpd="sng" algn="ctr">
+                      <a:noFill/>
+                    </a:lnT>
+                    <a:lnB w="9525" cap="flat" cmpd="sng" algn="ctr">
+                      <a:solidFill>
+                        <a:srgbClr val="E3E7F1"/>
+                      </a:solidFill>
+                      <a:prstDash val="solid"/>
+                      <a:round/>
+                      <a:headEnd type="none" w="med" len="med"/>
+                      <a:tailEnd type="none" w="med" len="med"/>
+                    </a:lnB>
+                  </a:tcPr>
+                </a:tc>
+              </a:tr>
+              <a:tr h="566928">
+                <a:tc>
+                  <a:txBody>
+                    <a:bodyPr/>
+                    <a:lstStyle/>
+                    <a:p>
+                      <a:pPr indent="0" marL="0">
+                        <a:buNone/>
+                      </a:pPr>
+                      <a:r>
+                        <a:rPr lang="en-US" sz="1500" b="1" dirty="0">
+                          <a:solidFill>
+                            <a:srgbClr val="1B1F3B"/>
+                          </a:solidFill>
+                        </a:rPr>
+                        <a:t>자원 분리</a:t>
+                      </a:r>
+                      <a:endParaRPr lang="en-US" sz="1500" dirty="0"/>
+                    </a:p>
+                  </a:txBody>
+                  <a:tcPr marL="0" marR="109728" marT="73152" marB="73152" anchor="ctr">
+                    <a:lnL w="0" cap="flat" cmpd="sng" algn="ctr">
+                      <a:noFill/>
+                    </a:lnL>
+                    <a:lnR w="0" cap="flat" cmpd="sng" algn="ctr">
+                      <a:noFill/>
+                    </a:lnR>
+                    <a:lnT w="0" cap="flat" cmpd="sng" algn="ctr">
+                      <a:noFill/>
+                    </a:lnT>
+                    <a:lnB w="9525" cap="flat" cmpd="sng" algn="ctr">
+                      <a:solidFill>
+                        <a:srgbClr val="E3E7F1"/>
+                      </a:solidFill>
+                      <a:prstDash val="solid"/>
+                      <a:round/>
+                      <a:headEnd type="none" w="med" len="med"/>
+                      <a:tailEnd type="none" w="med" len="med"/>
+                    </a:lnB>
+                  </a:tcPr>
+                </a:tc>
+                <a:tc>
+                  <a:txBody>
+                    <a:bodyPr/>
+                    <a:lstStyle/>
+                    <a:p>
+                      <a:pPr indent="0" marL="0">
+                        <a:buNone/>
+                      </a:pPr>
+                      <a:r>
+                        <a:rPr lang="en-US" sz="1500" dirty="0">
+                          <a:solidFill>
+                            <a:srgbClr val="1B1F3B"/>
+                          </a:solidFill>
+                        </a:rPr>
+                        <a:t>A와 B가 쓰는 자원을 나눈다</a:t>
+                      </a:r>
+                      <a:endParaRPr lang="en-US" sz="1500" dirty="0"/>
+                    </a:p>
+                  </a:txBody>
+                  <a:tcPr marL="0" marR="109728" marT="73152" marB="73152" anchor="ctr">
+                    <a:lnL w="0" cap="flat" cmpd="sng" algn="ctr">
+                      <a:noFill/>
+                    </a:lnL>
+                    <a:lnR w="0" cap="flat" cmpd="sng" algn="ctr">
+                      <a:noFill/>
+                    </a:lnR>
+                    <a:lnT w="0" cap="flat" cmpd="sng" algn="ctr">
+                      <a:noFill/>
+                    </a:lnT>
+                    <a:lnB w="9525" cap="flat" cmpd="sng" algn="ctr">
+                      <a:solidFill>
+                        <a:srgbClr val="E3E7F1"/>
+                      </a:solidFill>
+                      <a:prstDash val="solid"/>
+                      <a:round/>
+                      <a:headEnd type="none" w="med" len="med"/>
+                      <a:tailEnd type="none" w="med" len="med"/>
+                    </a:lnB>
+                  </a:tcPr>
+                </a:tc>
+                <a:tc>
+                  <a:txBody>
+                    <a:bodyPr/>
+                    <a:lstStyle/>
+                    <a:p>
+                      <a:pPr indent="0" marL="0">
+                        <a:buNone/>
+                      </a:pPr>
+                      <a:r>
+                        <a:rPr lang="en-US" sz="1500" dirty="0">
+                          <a:solidFill>
+                            <a:srgbClr val="1B1F3B"/>
+                          </a:solidFill>
+                        </a:rPr>
+                        <a:t>광고 예산처럼 나눌 수 있는 자원</a:t>
+                      </a:r>
+                      <a:endParaRPr lang="en-US" sz="1500" dirty="0"/>
+                    </a:p>
+                  </a:txBody>
+                  <a:tcPr marL="0" marR="109728" marT="73152" marB="73152" anchor="ctr">
+                    <a:lnL w="0" cap="flat" cmpd="sng" algn="ctr">
+                      <a:noFill/>
+                    </a:lnL>
+                    <a:lnR w="0" cap="flat" cmpd="sng" algn="ctr">
+                      <a:noFill/>
+                    </a:lnR>
+                    <a:lnT w="0" cap="flat" cmpd="sng" algn="ctr">
+                      <a:noFill/>
+                    </a:lnT>
+                    <a:lnB w="9525" cap="flat" cmpd="sng" algn="ctr">
+                      <a:solidFill>
+                        <a:srgbClr val="E3E7F1"/>
+                      </a:solidFill>
+                      <a:prstDash val="solid"/>
+                      <a:round/>
+                      <a:headEnd type="none" w="med" len="med"/>
+                      <a:tailEnd type="none" w="med" len="med"/>
+                    </a:lnB>
+                  </a:tcPr>
+                </a:tc>
+                <a:tc>
+                  <a:txBody>
+                    <a:bodyPr/>
+                    <a:lstStyle/>
+                    <a:p>
+                      <a:pPr indent="0" marL="0">
+                        <a:buNone/>
+                      </a:pPr>
+                      <a:r>
+                        <a:rPr lang="en-US" sz="1500" dirty="0">
+                          <a:solidFill>
+                            <a:srgbClr val="1B1F3B"/>
+                          </a:solidFill>
+                        </a:rPr>
+                        <a:t>실제 마켓플레이스에선 완전히 나누기 어렵다</a:t>
+                      </a:r>
+                      <a:endParaRPr lang="en-US" sz="1500" dirty="0"/>
+                    </a:p>
+                  </a:txBody>
+                  <a:tcPr marL="0" marR="109728" marT="73152" marB="73152" anchor="ctr">
+                    <a:lnL w="0" cap="flat" cmpd="sng" algn="ctr">
+                      <a:noFill/>
+                    </a:lnL>
+                    <a:lnR w="0" cap="flat" cmpd="sng" algn="ctr">
+                      <a:noFill/>
+                    </a:lnR>
+                    <a:lnT w="0" cap="flat" cmpd="sng" algn="ctr">
+                      <a:noFill/>
+                    </a:lnT>
+                    <a:lnB w="9525" cap="flat" cmpd="sng" algn="ctr">
+                      <a:solidFill>
+                        <a:srgbClr val="E3E7F1"/>
+                      </a:solidFill>
+                      <a:prstDash val="solid"/>
+                      <a:round/>
+                      <a:headEnd type="none" w="med" len="med"/>
+                      <a:tailEnd type="none" w="med" len="med"/>
+                    </a:lnB>
+                  </a:tcPr>
+                </a:tc>
+              </a:tr>
+              <a:tr h="566928">
+                <a:tc>
+                  <a:txBody>
+                    <a:bodyPr/>
+                    <a:lstStyle/>
+                    <a:p>
+                      <a:pPr indent="0" marL="0">
+                        <a:buNone/>
+                      </a:pPr>
+                      <a:r>
+                        <a:rPr lang="en-US" sz="1500" b="1" dirty="0">
+                          <a:solidFill>
+                            <a:srgbClr val="1B1F3B"/>
+                          </a:solidFill>
+                        </a:rPr>
+                        <a:t>Geo-based</a:t>
+                      </a:r>
+                      <a:endParaRPr lang="en-US" sz="1500" dirty="0"/>
+                    </a:p>
+                  </a:txBody>
+                  <a:tcPr marL="0" marR="109728" marT="73152" marB="73152" anchor="ctr">
+                    <a:lnL w="0" cap="flat" cmpd="sng" algn="ctr">
+                      <a:noFill/>
+                    </a:lnL>
+                    <a:lnR w="0" cap="flat" cmpd="sng" algn="ctr">
+                      <a:noFill/>
+                    </a:lnR>
+                    <a:lnT w="0" cap="flat" cmpd="sng" algn="ctr">
+                      <a:noFill/>
+                    </a:lnT>
+                    <a:lnB w="9525" cap="flat" cmpd="sng" algn="ctr">
+                      <a:solidFill>
+                        <a:srgbClr val="E3E7F1"/>
+                      </a:solidFill>
+                      <a:prstDash val="solid"/>
+                      <a:round/>
+                      <a:headEnd type="none" w="med" len="med"/>
+                      <a:tailEnd type="none" w="med" len="med"/>
+                    </a:lnB>
+                  </a:tcPr>
+                </a:tc>
+                <a:tc>
+                  <a:txBody>
+                    <a:bodyPr/>
+                    <a:lstStyle/>
+                    <a:p>
+                      <a:pPr indent="0" marL="0">
+                        <a:buNone/>
+                      </a:pPr>
+                      <a:r>
+                        <a:rPr lang="en-US" sz="1500" dirty="0">
+                          <a:solidFill>
+                            <a:srgbClr val="1B1F3B"/>
+                          </a:solidFill>
+                        </a:rPr>
+                        <a:t>지역을 실험 단위로 (지역 = 클러스터)</a:t>
+                      </a:r>
+                      <a:endParaRPr lang="en-US" sz="1500" dirty="0"/>
+                    </a:p>
+                  </a:txBody>
+                  <a:tcPr marL="0" marR="109728" marT="73152" marB="73152" anchor="ctr">
+                    <a:lnL w="0" cap="flat" cmpd="sng" algn="ctr">
+                      <a:noFill/>
+                    </a:lnL>
+                    <a:lnR w="0" cap="flat" cmpd="sng" algn="ctr">
+                      <a:noFill/>
+                    </a:lnR>
+                    <a:lnT w="0" cap="flat" cmpd="sng" algn="ctr">
+                      <a:noFill/>
+                    </a:lnT>
+                    <a:lnB w="9525" cap="flat" cmpd="sng" algn="ctr">
+                      <a:solidFill>
+                        <a:srgbClr val="E3E7F1"/>
+                      </a:solidFill>
+                      <a:prstDash val="solid"/>
+                      <a:round/>
+                      <a:headEnd type="none" w="med" len="med"/>
+                      <a:tailEnd type="none" w="med" len="med"/>
+                    </a:lnB>
+                  </a:tcPr>
+                </a:tc>
+                <a:tc>
+                  <a:txBody>
+                    <a:bodyPr/>
+                    <a:lstStyle/>
+                    <a:p>
+                      <a:pPr indent="0" marL="0">
+                        <a:buNone/>
+                      </a:pPr>
+                      <a:r>
+                        <a:rPr lang="en-US" sz="1500" dirty="0">
+                          <a:solidFill>
+                            <a:srgbClr val="1B1F3B"/>
+                          </a:solidFill>
+                        </a:rPr>
+                        <a:t>지역 안 상호작용이 클 때</a:t>
+                      </a:r>
+                      <a:endParaRPr lang="en-US" sz="1500" dirty="0"/>
+                    </a:p>
+                  </a:txBody>
+                  <a:tcPr marL="0" marR="109728" marT="73152" marB="73152" anchor="ctr">
+                    <a:lnL w="0" cap="flat" cmpd="sng" algn="ctr">
+                      <a:noFill/>
+                    </a:lnL>
+                    <a:lnR w="0" cap="flat" cmpd="sng" algn="ctr">
+                      <a:noFill/>
+                    </a:lnR>
+                    <a:lnT w="0" cap="flat" cmpd="sng" algn="ctr">
+                      <a:noFill/>
+                    </a:lnT>
+                    <a:lnB w="9525" cap="flat" cmpd="sng" algn="ctr">
+                      <a:solidFill>
+                        <a:srgbClr val="E3E7F1"/>
+                      </a:solidFill>
+                      <a:prstDash val="solid"/>
+                      <a:round/>
+                      <a:headEnd type="none" w="med" len="med"/>
+                      <a:tailEnd type="none" w="med" len="med"/>
+                    </a:lnB>
+                  </a:tcPr>
+                </a:tc>
+                <a:tc>
+                  <a:txBody>
+                    <a:bodyPr/>
+                    <a:lstStyle/>
+                    <a:p>
+                      <a:pPr indent="0" marL="0">
+                        <a:buNone/>
+                      </a:pPr>
+                      <a:r>
+                        <a:rPr lang="en-US" sz="1500" dirty="0">
+                          <a:solidFill>
+                            <a:srgbClr val="1B1F3B"/>
+                          </a:solidFill>
+                        </a:rPr>
+                        <a:t>지역 수가 표본 → 검정력 저하, 지역 차이</a:t>
+                      </a:r>
+                      <a:endParaRPr lang="en-US" sz="1500" dirty="0"/>
+                    </a:p>
+                  </a:txBody>
+                  <a:tcPr marL="0" marR="109728" marT="73152" marB="73152" anchor="ctr">
+                    <a:lnL w="0" cap="flat" cmpd="sng" algn="ctr">
+                      <a:noFill/>
+                    </a:lnL>
+                    <a:lnR w="0" cap="flat" cmpd="sng" algn="ctr">
+                      <a:noFill/>
+                    </a:lnR>
+                    <a:lnT w="0" cap="flat" cmpd="sng" algn="ctr">
+                      <a:noFill/>
+                    </a:lnT>
+                    <a:lnB w="9525" cap="flat" cmpd="sng" algn="ctr">
+                      <a:solidFill>
+                        <a:srgbClr val="E3E7F1"/>
+                      </a:solidFill>
+                      <a:prstDash val="solid"/>
+                      <a:round/>
+                      <a:headEnd type="none" w="med" len="med"/>
+                      <a:tailEnd type="none" w="med" len="med"/>
+                    </a:lnB>
+                  </a:tcPr>
+                </a:tc>
+              </a:tr>
+              <a:tr h="566928">
+                <a:tc>
+                  <a:txBody>
+                    <a:bodyPr/>
+                    <a:lstStyle/>
+                    <a:p>
+                      <a:pPr indent="0" marL="0">
+                        <a:buNone/>
+                      </a:pPr>
+                      <a:r>
+                        <a:rPr lang="en-US" sz="1500" b="1" dirty="0">
+                          <a:solidFill>
+                            <a:srgbClr val="1B1F3B"/>
+                          </a:solidFill>
+                        </a:rPr>
+                        <a:t>Switchback</a:t>
+                      </a:r>
+                      <a:endParaRPr lang="en-US" sz="1500" dirty="0"/>
+                    </a:p>
+                  </a:txBody>
+                  <a:tcPr marL="0" marR="109728" marT="73152" marB="73152" anchor="ctr">
+                    <a:lnL w="0" cap="flat" cmpd="sng" algn="ctr">
+                      <a:noFill/>
+                    </a:lnL>
+                    <a:lnR w="0" cap="flat" cmpd="sng" algn="ctr">
+                      <a:noFill/>
+                    </a:lnR>
+                    <a:lnT w="0" cap="flat" cmpd="sng" algn="ctr">
+                      <a:noFill/>
+                    </a:lnT>
+                    <a:lnB w="9525" cap="flat" cmpd="sng" algn="ctr">
+                      <a:solidFill>
+                        <a:srgbClr val="E3E7F1"/>
+                      </a:solidFill>
+                      <a:prstDash val="solid"/>
+                      <a:round/>
+                      <a:headEnd type="none" w="med" len="med"/>
+                      <a:tailEnd type="none" w="med" len="med"/>
+                    </a:lnB>
+                  </a:tcPr>
+                </a:tc>
+                <a:tc>
+                  <a:txBody>
+                    <a:bodyPr/>
+                    <a:lstStyle/>
+                    <a:p>
+                      <a:pPr indent="0" marL="0">
+                        <a:buNone/>
+                      </a:pPr>
+                      <a:r>
+                        <a:rPr lang="en-US" sz="1500" dirty="0">
+                          <a:solidFill>
+                            <a:srgbClr val="1B1F3B"/>
+                          </a:solidFill>
+                        </a:rPr>
+                        <a:t>시간 구간마다 전체를 A ↔ B로 전환</a:t>
+                      </a:r>
+                      <a:endParaRPr lang="en-US" sz="1500" dirty="0"/>
+                    </a:p>
+                  </a:txBody>
+                  <a:tcPr marL="0" marR="109728" marT="73152" marB="73152" anchor="ctr">
+                    <a:lnL w="0" cap="flat" cmpd="sng" algn="ctr">
+                      <a:noFill/>
+                    </a:lnL>
+                    <a:lnR w="0" cap="flat" cmpd="sng" algn="ctr">
+                      <a:noFill/>
+                    </a:lnR>
+                    <a:lnT w="0" cap="flat" cmpd="sng" algn="ctr">
+                      <a:noFill/>
+                    </a:lnT>
+                    <a:lnB w="9525" cap="flat" cmpd="sng" algn="ctr">
+                      <a:solidFill>
+                        <a:srgbClr val="E3E7F1"/>
+                      </a:solidFill>
+                      <a:prstDash val="solid"/>
+                      <a:round/>
+                      <a:headEnd type="none" w="med" len="med"/>
+                      <a:tailEnd type="none" w="med" len="med"/>
+                    </a:lnB>
+                  </a:tcPr>
+                </a:tc>
+                <a:tc>
+                  <a:txBody>
+                    <a:bodyPr/>
+                    <a:lstStyle/>
+                    <a:p>
+                      <a:pPr indent="0" marL="0">
+                        <a:buNone/>
+                      </a:pPr>
+                      <a:r>
+                        <a:rPr lang="en-US" sz="1500" dirty="0">
+                          <a:solidFill>
+                            <a:srgbClr val="1B1F3B"/>
+                          </a:solidFill>
+                        </a:rPr>
+                        <a:t>배차·가격처럼 시장이 실시간으로 얽힐 때</a:t>
+                      </a:r>
+                      <a:endParaRPr lang="en-US" sz="1500" dirty="0"/>
+                    </a:p>
+                  </a:txBody>
+                  <a:tcPr marL="0" marR="109728" marT="73152" marB="73152" anchor="ctr">
+                    <a:lnL w="0" cap="flat" cmpd="sng" algn="ctr">
+                      <a:noFill/>
+                    </a:lnL>
+                    <a:lnR w="0" cap="flat" cmpd="sng" algn="ctr">
+                      <a:noFill/>
+                    </a:lnR>
+                    <a:lnT w="0" cap="flat" cmpd="sng" algn="ctr">
+                      <a:noFill/>
+                    </a:lnT>
+                    <a:lnB w="9525" cap="flat" cmpd="sng" algn="ctr">
+                      <a:solidFill>
+                        <a:srgbClr val="E3E7F1"/>
+                      </a:solidFill>
+                      <a:prstDash val="solid"/>
+                      <a:round/>
+                      <a:headEnd type="none" w="med" len="med"/>
+                      <a:tailEnd type="none" w="med" len="med"/>
+                    </a:lnB>
+                  </a:tcPr>
+                </a:tc>
+                <a:tc>
+                  <a:txBody>
+                    <a:bodyPr/>
+                    <a:lstStyle/>
+                    <a:p>
+                      <a:pPr indent="0" marL="0">
+                        <a:buNone/>
+                      </a:pPr>
+                      <a:r>
+                        <a:rPr lang="en-US" sz="1500" dirty="0">
+                          <a:solidFill>
+                            <a:srgbClr val="1B1F3B"/>
+                          </a:solidFill>
+                        </a:rPr>
+                        <a:t>시간대별 수요 차이, 이월 효과</a:t>
+                      </a:r>
+                      <a:endParaRPr lang="en-US" sz="1500" dirty="0"/>
+                    </a:p>
+                  </a:txBody>
+                  <a:tcPr marL="0" marR="109728" marT="73152" marB="73152" anchor="ctr">
+                    <a:lnL w="0" cap="flat" cmpd="sng" algn="ctr">
+                      <a:noFill/>
+                    </a:lnL>
+                    <a:lnR w="0" cap="flat" cmpd="sng" algn="ctr">
+                      <a:noFill/>
+                    </a:lnR>
+                    <a:lnT w="0" cap="flat" cmpd="sng" algn="ctr">
+                      <a:noFill/>
+                    </a:lnT>
+                    <a:lnB w="9525" cap="flat" cmpd="sng" algn="ctr">
+                      <a:solidFill>
+                        <a:srgbClr val="E3E7F1"/>
+                      </a:solidFill>
+                      <a:prstDash val="solid"/>
+                      <a:round/>
+                      <a:headEnd type="none" w="med" len="med"/>
+                      <a:tailEnd type="none" w="med" len="med"/>
+                    </a:lnB>
+                  </a:tcPr>
+                </a:tc>
+              </a:tr>
+              <a:tr h="566928">
+                <a:tc>
+                  <a:txBody>
+                    <a:bodyPr/>
+                    <a:lstStyle/>
+                    <a:p>
+                      <a:pPr indent="0" marL="0">
+                        <a:buNone/>
+                      </a:pPr>
+                      <a:r>
+                        <a:rPr lang="en-US" sz="1500" b="1" dirty="0">
+                          <a:solidFill>
+                            <a:srgbClr val="1B1F3B"/>
+                          </a:solidFill>
+                        </a:rPr>
+                        <a:t>분석 단계 보정</a:t>
+                      </a:r>
+                      <a:endParaRPr lang="en-US" sz="1500" dirty="0"/>
+                    </a:p>
+                  </a:txBody>
+                  <a:tcPr marL="0" marR="109728" marT="73152" marB="73152" anchor="ctr">
+                    <a:lnL w="0" cap="flat" cmpd="sng" algn="ctr">
+                      <a:noFill/>
+                    </a:lnL>
+                    <a:lnR w="0" cap="flat" cmpd="sng" algn="ctr">
+                      <a:noFill/>
+                    </a:lnR>
+                    <a:lnT w="0" cap="flat" cmpd="sng" algn="ctr">
+                      <a:noFill/>
+                    </a:lnT>
+                    <a:lnB w="9525" cap="flat" cmpd="sng" algn="ctr">
+                      <a:solidFill>
+                        <a:srgbClr val="E3E7F1"/>
+                      </a:solidFill>
+                      <a:prstDash val="solid"/>
+                      <a:round/>
+                      <a:headEnd type="none" w="med" len="med"/>
+                      <a:tailEnd type="none" w="med" len="med"/>
+                    </a:lnB>
+                  </a:tcPr>
+                </a:tc>
+                <a:tc>
+                  <a:txBody>
+                    <a:bodyPr/>
+                    <a:lstStyle/>
+                    <a:p>
+                      <a:pPr indent="0" marL="0">
+                        <a:buNone/>
+                      </a:pPr>
+                      <a:r>
+                        <a:rPr lang="en-US" sz="1500" dirty="0">
+                          <a:solidFill>
+                            <a:srgbClr val="1B1F3B"/>
+                          </a:solidFill>
+                        </a:rPr>
+                        <a:t>직접 효과와 Spillover 효과를 나눠 추정</a:t>
+                      </a:r>
+                      <a:endParaRPr lang="en-US" sz="1500" dirty="0"/>
+                    </a:p>
+                  </a:txBody>
+                  <a:tcPr marL="0" marR="109728" marT="73152" marB="73152" anchor="ctr">
+                    <a:lnL w="0" cap="flat" cmpd="sng" algn="ctr">
+                      <a:noFill/>
+                    </a:lnL>
+                    <a:lnR w="0" cap="flat" cmpd="sng" algn="ctr">
+                      <a:noFill/>
+                    </a:lnR>
+                    <a:lnT w="0" cap="flat" cmpd="sng" algn="ctr">
+                      <a:noFill/>
+                    </a:lnT>
+                    <a:lnB w="9525" cap="flat" cmpd="sng" algn="ctr">
+                      <a:solidFill>
+                        <a:srgbClr val="E3E7F1"/>
+                      </a:solidFill>
+                      <a:prstDash val="solid"/>
+                      <a:round/>
+                      <a:headEnd type="none" w="med" len="med"/>
+                      <a:tailEnd type="none" w="med" len="med"/>
+                    </a:lnB>
+                  </a:tcPr>
+                </a:tc>
+                <a:tc>
+                  <a:txBody>
+                    <a:bodyPr/>
+                    <a:lstStyle/>
+                    <a:p>
+                      <a:pPr indent="0" marL="0">
+                        <a:buNone/>
+                      </a:pPr>
+                      <a:r>
+                        <a:rPr lang="en-US" sz="1500" dirty="0">
+                          <a:solidFill>
+                            <a:srgbClr val="1B1F3B"/>
+                          </a:solidFill>
+                        </a:rPr>
+                        <a:t>설계만으로 다 막지 못할 때</a:t>
+                      </a:r>
+                      <a:endParaRPr lang="en-US" sz="1500" dirty="0"/>
+                    </a:p>
+                  </a:txBody>
+                  <a:tcPr marL="0" marR="109728" marT="73152" marB="73152" anchor="ctr">
+                    <a:lnL w="0" cap="flat" cmpd="sng" algn="ctr">
+                      <a:noFill/>
+                    </a:lnL>
+                    <a:lnR w="0" cap="flat" cmpd="sng" algn="ctr">
+                      <a:noFill/>
+                    </a:lnR>
+                    <a:lnT w="0" cap="flat" cmpd="sng" algn="ctr">
+                      <a:noFill/>
+                    </a:lnT>
+                    <a:lnB w="9525" cap="flat" cmpd="sng" algn="ctr">
+                      <a:solidFill>
+                        <a:srgbClr val="E3E7F1"/>
+                      </a:solidFill>
+                      <a:prstDash val="solid"/>
+                      <a:round/>
+                      <a:headEnd type="none" w="med" len="med"/>
+                      <a:tailEnd type="none" w="med" len="med"/>
+                    </a:lnB>
+                  </a:tcPr>
+                </a:tc>
+                <a:tc>
+                  <a:txBody>
+                    <a:bodyPr/>
+                    <a:lstStyle/>
+                    <a:p>
+                      <a:pPr indent="0" marL="0">
+                        <a:buNone/>
+                      </a:pPr>
+                      <a:r>
+                        <a:rPr lang="en-US" sz="1500" dirty="0">
+                          <a:solidFill>
+                            <a:srgbClr val="1B1F3B"/>
+                          </a:solidFill>
+                        </a:rPr>
+                        <a:t>네트워크 정보와 추가 가정이 필요</a:t>
+                      </a:r>
+                      <a:endParaRPr lang="en-US" sz="1500" dirty="0"/>
+                    </a:p>
+                  </a:txBody>
+                  <a:tcPr marL="0" marR="109728" marT="73152" marB="73152" anchor="ctr">
+                    <a:lnL w="0" cap="flat" cmpd="sng" algn="ctr">
+                      <a:noFill/>
+                    </a:lnL>
+                    <a:lnR w="0" cap="flat" cmpd="sng" algn="ctr">
+                      <a:noFill/>
+                    </a:lnR>
+                    <a:lnT w="0" cap="flat" cmpd="sng" algn="ctr">
+                      <a:noFill/>
+                    </a:lnT>
+                    <a:lnB w="9525" cap="flat" cmpd="sng" algn="ctr">
+                      <a:solidFill>
+                        <a:srgbClr val="E3E7F1"/>
+                      </a:solidFill>
+                      <a:prstDash val="solid"/>
+                      <a:round/>
+                      <a:headEnd type="none" w="med" len="med"/>
+                      <a:tailEnd type="none" w="med" len="med"/>
+                    </a:lnB>
+                  </a:tcPr>
+                </a:tc>
+              </a:tr>
+            </a:tbl>
+          </a:graphicData>
+        </a:graphic>
+      </p:graphicFrame>
+      <p:sp>
+        <p:nvSpPr>
+          <p:cNvPr id="6" name="Text 2"/>
+          <p:cNvSpPr txBox="1"/>
+          <p:nvPr/>
+        </p:nvSpPr>
+        <p:spPr>
+          <a:xfrm>
+            <a:off x="640080" y="5623560"/>
+            <a:ext cx="10911535" cy="365760"/>
+          </a:xfrm>
+          <a:prstGeom prst="rect">
+            <a:avLst/>
+          </a:prstGeom>
+          <a:noFill/>
+          <a:ln/>
+        </p:spPr>
+        <p:txBody>
+          <a:bodyPr wrap="square" lIns="0" tIns="0" rIns="0" bIns="0" rtlCol="0" anchor="t"/>
+          <a:lstStyle/>
+          <a:p>
+            <a:pPr indent="0" marL="0">
+              <a:buNone/>
+            </a:pPr>
+            <a:r>
+              <a:rPr lang="en-US" sz="1500" b="1" dirty="0">
+                <a:solidFill>
+                  <a:schemeClr val="accent1"/>
+                </a:solidFill>
+              </a:rPr>
+              <a:t>기억할 것  </a:t>
+            </a:r>
+            <a:pPr indent="0" marL="0">
+              <a:buNone/>
+            </a:pPr>
+            <a:r>
+              <a:rPr lang="en-US" sz="1500" dirty="0">
+                <a:solidFill>
+                  <a:schemeClr val="tx1"/>
+                </a:solidFill>
+              </a:rPr>
+              <a:t>클러스터·지역 단위로 나눴다면 분석의 불확실성도 그 단위로 계산합니다 (배정 단위와 분석 단위, Ch3)</a:t>
+            </a:r>
+            <a:endParaRPr lang="en-US" sz="1500" dirty="0"/>
+          </a:p>
+        </p:txBody>
+      </p:sp>
+      <p:sp>
+        <p:nvSpPr>
+          <p:cNvPr id="7" name="Text 3"/>
+          <p:cNvSpPr txBox="1"/>
+          <p:nvPr/>
+        </p:nvSpPr>
+        <p:spPr>
+          <a:xfrm>
+            <a:off x="640080" y="6035040"/>
+            <a:ext cx="10911535" cy="274320"/>
+          </a:xfrm>
+          <a:prstGeom prst="rect">
+            <a:avLst/>
+          </a:prstGeom>
+          <a:noFill/>
+          <a:ln/>
+        </p:spPr>
+        <p:txBody>
+          <a:bodyPr wrap="square" lIns="0" tIns="0" rIns="0" bIns="0" rtlCol="0" anchor="t"/>
+          <a:lstStyle/>
+          <a:p>
+            <a:pPr indent="0" marL="0">
+              <a:buNone/>
+            </a:pPr>
+            <a:r>
+              <a:rPr lang="en-US" sz="1100" dirty="0">
+                <a:solidFill>
+                  <a:schemeClr val="accent6"/>
+                </a:solidFill>
+              </a:rPr>
+              <a:t>위키 06편 2.1~2.5</a:t>
+            </a:r>
+            <a:endParaRPr lang="en-US" sz="1100" dirty="0"/>
+          </a:p>
+        </p:txBody>
+      </p:sp>
+      <p:sp>
+        <p:nvSpPr>
+          <p:cNvPr id="25" name="Slide Number Placeholder 0"/>
+          <p:cNvSpPr>
+            <a:spLocks noGrp="1"/>
+          </p:cNvSpPr>
+          <p:nvPr>
+            <p:ph type="sldNum" sz="quarter" idx="4294967295"/>
+          </p:nvPr>
+        </p:nvSpPr>
+        <p:spPr>
+          <a:xfrm>
+            <a:off x="11109960" y="6355080"/>
+            <a:ext cx="457200" cy="274320"/>
+          </a:xfrm>
+          <a:prstGeom prst="rect">
+            <a:avLst/>
+          </a:prstGeom>
+          <a:extLst>
+            <a:ext uri="{C572A759-6A51-4108-AA02-DFA0A04FC94B}">
+              <ma14:wrappingTextBoxFlag xmlns:ma14="http://schemas.microsoft.com/office/mac/drawingml/2011/main" val="0"/>
+            </a:ext>
+          </a:extLst>
+        </p:spPr>
+        <p:txBody>
+          <a:bodyPr/>
+          <a:lstStyle>
+            <a:lvl1pPr>
+              <a:defRPr sz="1000">
+                <a:solidFill>
+                  <a:srgbClr val="8A90A8"/>
+                </a:solidFill>
+              </a:defRPr>
+            </a:lvl1pPr>
+          </a:lstStyle>
+          <a:p>
+            <a:pPr algn="r"/>
+            <a:fld id="{F7021451-1387-4CA6-816F-3879F97B5CBC}" type="slidenum">
+              <a:rPr b="0" lang="en-US"/>
+              <a:t>59</a:t>
+            </a:fld>
+            <a:endParaRPr lang="en-US"/>
+          </a:p>
+        </p:txBody>
+      </p:sp>
+    </p:spTree>
+  </p:cSld>
+  <p:clrMapOvr>
+    <a:masterClrMapping/>
+  </p:clrMapOvr>
+</p:sld>
+</file>
+
+<file path=ppt/slides/slide6.xml><?xml version="1.0" encoding="utf-8"?>
+<p:sld xmlns:a="http://schemas.openxmlformats.org/drawingml/2006/main" xmlns:r="http://schemas.openxmlformats.org/officeDocument/2006/relationships" xmlns:p="http://schemas.openxmlformats.org/presentationml/2006/main">
+  <p:cSld name="Slide 6">
+    <p:spTree>
+      <p:nvGrpSpPr>
+        <p:cNvPr id="1" name=""/>
+        <p:cNvGrpSpPr/>
+        <p:nvPr/>
+      </p:nvGrpSpPr>
+      <p:grpSpPr>
+        <a:xfrm>
+          <a:off x="0" y="0"/>
+          <a:ext cx="0" cy="0"/>
+          <a:chOff x="0" y="0"/>
+          <a:chExt cx="0" cy="0"/>
+        </a:xfrm>
+      </p:grpSpPr>
+      <p:sp>
+        <p:nvSpPr>
+          <p:cNvPr id="2" name="Text 0"/>
+          <p:cNvSpPr/>
+          <p:nvPr>
+            <p:ph idx="100" type="body" hasCustomPrompt="1"/>
+          </p:nvPr>
+        </p:nvSpPr>
+        <p:spPr>
+          <a:xfrm>
+            <a:off x="640080" y="411480"/>
+            <a:ext cx="7315200" cy="320040"/>
+          </a:xfrm>
+          <a:prstGeom prst="rect">
+            <a:avLst/>
+          </a:prstGeom>
+          <a:noFill/>
+          <a:ln/>
+        </p:spPr>
+        <p:txBody>
+          <a:bodyPr wrap="square" lIns="0" tIns="0" rIns="0" bIns="0" rtlCol="0" anchor="t"/>
+          <a:lstStyle/>
+          <a:p>
+            <a:pPr algn="l" indent="0" marL="0">
+              <a:buNone/>
+            </a:pPr>
+            <a:r>
+              <a:rPr lang="en-US" sz="1500" b="1" dirty="0">
+                <a:solidFill>
+                  <a:srgbClr val="3A5BFF"/>
+                </a:solidFill>
+              </a:rPr>
+              <a:t>Ch1 · 상관관계 vs 인과관계</a:t>
+            </a:r>
+            <a:endParaRPr lang="en-US" sz="1500" dirty="0"/>
+          </a:p>
+        </p:txBody>
+      </p:sp>
+      <p:sp>
+        <p:nvSpPr>
+          <p:cNvPr id="3" name="Text 0"/>
+          <p:cNvSpPr/>
+          <p:nvPr>
+            <p:ph idx="101" type="title" hasCustomPrompt="1"/>
+          </p:nvPr>
+        </p:nvSpPr>
+        <p:spPr>
+          <a:xfrm>
+            <a:off x="640080" y="749808"/>
+            <a:ext cx="10911535" cy="777240"/>
+          </a:xfrm>
+          <a:prstGeom prst="rect">
+            <a:avLst/>
+          </a:prstGeom>
+          <a:noFill/>
+          <a:ln/>
+        </p:spPr>
+        <p:txBody>
+          <a:bodyPr wrap="square" lIns="0" tIns="0" rIns="0" bIns="0" rtlCol="0" anchor="t"/>
+          <a:lstStyle/>
+          <a:p>
+            <a:pPr algn="l" indent="0" marL="0">
+              <a:buNone/>
+            </a:pPr>
+            <a:r>
+              <a:rPr lang="en-US" sz="2000" b="1" dirty="0">
+                <a:solidFill>
+                  <a:srgbClr val="1B1F3B"/>
+                </a:solidFill>
+              </a:rPr>
+              <a:t>새 기능을 쓰는 사람이 덜 떠난다면, 기능 덕분일까?</a:t>
+            </a:r>
+            <a:endParaRPr lang="en-US" sz="2000" dirty="0"/>
+          </a:p>
+        </p:txBody>
+      </p:sp>
+      <p:sp>
+        <p:nvSpPr>
+          <p:cNvPr id="5" name="Shape 2"/>
+          <p:cNvSpPr/>
+          <p:nvPr/>
+        </p:nvSpPr>
+        <p:spPr>
+          <a:xfrm>
+            <a:off x="3749040" y="2039112"/>
+            <a:ext cx="201168" cy="201168"/>
+          </a:xfrm>
+          <a:prstGeom prst="ellipse">
+            <a:avLst/>
+          </a:prstGeom>
+          <a:solidFill>
+            <a:srgbClr val="B87700"/>
+          </a:solidFill>
+          <a:ln w="12700">
+            <a:solidFill>
+              <a:srgbClr val="B87700"/>
+            </a:solidFill>
+            <a:prstDash val="solid"/>
+          </a:ln>
+        </p:spPr>
+      </p:sp>
+      <p:sp>
+        <p:nvSpPr>
+          <p:cNvPr id="6" name="Text 3"/>
+          <p:cNvSpPr txBox="1"/>
+          <p:nvPr/>
+        </p:nvSpPr>
+        <p:spPr>
+          <a:xfrm>
+            <a:off x="4069080" y="1965960"/>
+            <a:ext cx="2377440" cy="731520"/>
+          </a:xfrm>
+          <a:prstGeom prst="rect">
+            <a:avLst/>
+          </a:prstGeom>
+          <a:noFill/>
+          <a:ln/>
+        </p:spPr>
+        <p:txBody>
+          <a:bodyPr wrap="square" lIns="0" tIns="0" rIns="0" bIns="0" rtlCol="0" anchor="t"/>
+          <a:lstStyle/>
+          <a:p>
+            <a:pPr indent="0" marL="0">
+              <a:buNone/>
+            </a:pPr>
+            <a:r>
+              <a:rPr lang="en-US" sz="2000" b="1" dirty="0">
+                <a:solidFill>
+                  <a:schemeClr val="tx1"/>
+                </a:solidFill>
+              </a:rPr>
+              <a:t>충성도</a:t>
+            </a:r>
+            <a:endParaRPr lang="en-US" sz="1500" dirty="0"/>
+          </a:p>
+          <a:p>
+            <a:pPr indent="0" marL="0">
+              <a:buNone/>
+            </a:pPr>
+            <a:r>
+              <a:rPr lang="en-US" sz="1400" dirty="0">
+                <a:solidFill>
+                  <a:schemeClr val="tx2"/>
+                </a:solidFill>
+              </a:rPr>
+              <a:t>관측하기 어려움</a:t>
+            </a:r>
+            <a:endParaRPr lang="en-US" sz="1500" dirty="0"/>
+          </a:p>
+        </p:txBody>
+      </p:sp>
+      <p:sp>
+        <p:nvSpPr>
+          <p:cNvPr id="7" name="Shape 4"/>
+          <p:cNvSpPr/>
+          <p:nvPr/>
+        </p:nvSpPr>
+        <p:spPr>
+          <a:xfrm>
+            <a:off x="1097280" y="4279392"/>
+            <a:ext cx="201168" cy="201168"/>
+          </a:xfrm>
+          <a:prstGeom prst="ellipse">
+            <a:avLst/>
+          </a:prstGeom>
+          <a:solidFill>
+            <a:srgbClr val="3A5BFF"/>
+          </a:solidFill>
+          <a:ln w="12700">
+            <a:solidFill>
+              <a:srgbClr val="3A5BFF"/>
+            </a:solidFill>
+            <a:prstDash val="solid"/>
+          </a:ln>
+        </p:spPr>
+      </p:sp>
+      <p:sp>
+        <p:nvSpPr>
+          <p:cNvPr id="8" name="Text 5"/>
+          <p:cNvSpPr txBox="1"/>
+          <p:nvPr/>
+        </p:nvSpPr>
+        <p:spPr>
+          <a:xfrm>
+            <a:off x="1417320" y="4206240"/>
+            <a:ext cx="2194560" cy="457200"/>
+          </a:xfrm>
+          <a:prstGeom prst="rect">
+            <a:avLst/>
+          </a:prstGeom>
+          <a:noFill/>
+          <a:ln/>
+        </p:spPr>
+        <p:txBody>
+          <a:bodyPr wrap="square" lIns="0" tIns="0" rIns="0" bIns="0" rtlCol="0" anchor="t"/>
+          <a:lstStyle/>
+          <a:p>
+            <a:pPr indent="0" marL="0">
+              <a:buNone/>
+            </a:pPr>
+            <a:r>
+              <a:rPr lang="en-US" sz="2000" b="1" dirty="0">
+                <a:solidFill>
+                  <a:schemeClr val="tx1"/>
+                </a:solidFill>
+              </a:rPr>
+              <a:t>새 기능 사용</a:t>
+            </a:r>
+            <a:endParaRPr lang="en-US" sz="2000" dirty="0"/>
+          </a:p>
+        </p:txBody>
+      </p:sp>
+      <p:sp>
+        <p:nvSpPr>
+          <p:cNvPr id="9" name="Shape 6"/>
+          <p:cNvSpPr/>
+          <p:nvPr/>
+        </p:nvSpPr>
+        <p:spPr>
+          <a:xfrm>
+            <a:off x="6400800" y="4279392"/>
+            <a:ext cx="201168" cy="201168"/>
+          </a:xfrm>
+          <a:prstGeom prst="ellipse">
+            <a:avLst/>
+          </a:prstGeom>
+          <a:solidFill>
+            <a:srgbClr val="0E9C9C"/>
+          </a:solidFill>
+          <a:ln w="12700">
+            <a:solidFill>
+              <a:srgbClr val="0E9C9C"/>
+            </a:solidFill>
+            <a:prstDash val="solid"/>
+          </a:ln>
+        </p:spPr>
+      </p:sp>
+      <p:sp>
+        <p:nvSpPr>
+          <p:cNvPr id="10" name="Text 7"/>
+          <p:cNvSpPr txBox="1"/>
+          <p:nvPr/>
+        </p:nvSpPr>
+        <p:spPr>
+          <a:xfrm>
+            <a:off x="6720840" y="4206240"/>
+            <a:ext cx="2194560" cy="457200"/>
+          </a:xfrm>
+          <a:prstGeom prst="rect">
+            <a:avLst/>
+          </a:prstGeom>
+          <a:noFill/>
+          <a:ln/>
+        </p:spPr>
+        <p:txBody>
+          <a:bodyPr wrap="square" lIns="0" tIns="0" rIns="0" bIns="0" rtlCol="0" anchor="t"/>
+          <a:lstStyle/>
+          <a:p>
+            <a:pPr indent="0" marL="0">
+              <a:buNone/>
+            </a:pPr>
+            <a:r>
+              <a:rPr lang="en-US" sz="2000" b="1" dirty="0">
+                <a:solidFill>
+                  <a:schemeClr val="tx1"/>
+                </a:solidFill>
+              </a:rPr>
+              <a:t>이탈률 낮음</a:t>
+            </a:r>
+            <a:endParaRPr lang="en-US" sz="2000" dirty="0"/>
+          </a:p>
+        </p:txBody>
+      </p:sp>
+      <p:sp>
+        <p:nvSpPr>
+          <p:cNvPr id="11" name="Shape 8"/>
+          <p:cNvSpPr/>
+          <p:nvPr/>
+        </p:nvSpPr>
+        <p:spPr>
+          <a:xfrm flipH="1">
+            <a:off x="1737360" y="2743200"/>
+            <a:ext cx="1828800" cy="1280160"/>
+          </a:xfrm>
+          <a:prstGeom prst="line">
+            <a:avLst/>
+          </a:prstGeom>
+          <a:noFill/>
+          <a:ln w="25400">
+            <a:solidFill>
+              <a:srgbClr val="B87700"/>
+            </a:solidFill>
+            <a:prstDash val="solid"/>
+            <a:tailEnd type="triangle"/>
+          </a:ln>
+        </p:spPr>
+      </p:sp>
+      <p:sp>
+        <p:nvSpPr>
+          <p:cNvPr id="12" name="Shape 9"/>
+          <p:cNvSpPr/>
+          <p:nvPr/>
+        </p:nvSpPr>
+        <p:spPr>
+          <a:xfrm>
+            <a:off x="4572000" y="2743200"/>
+            <a:ext cx="1920240" cy="1280160"/>
+          </a:xfrm>
+          <a:prstGeom prst="line">
+            <a:avLst/>
+          </a:prstGeom>
+          <a:noFill/>
+          <a:ln w="25400">
+            <a:solidFill>
+              <a:srgbClr val="B87700"/>
+            </a:solidFill>
+            <a:prstDash val="solid"/>
+            <a:tailEnd type="triangle"/>
+          </a:ln>
+        </p:spPr>
+      </p:sp>
+      <p:sp>
+        <p:nvSpPr>
+          <p:cNvPr id="13" name="Shape 10"/>
+          <p:cNvSpPr/>
+          <p:nvPr/>
+        </p:nvSpPr>
+        <p:spPr>
+          <a:xfrm>
+            <a:off x="3017520" y="4315968"/>
+            <a:ext cx="3200400" cy="0"/>
+          </a:xfrm>
+          <a:prstGeom prst="line">
+            <a:avLst/>
+          </a:prstGeom>
+          <a:noFill/>
+          <a:ln w="25400">
+            <a:solidFill>
+              <a:srgbClr val="8A90A8"/>
+            </a:solidFill>
+            <a:prstDash val="dash"/>
+            <a:tailEnd type="triangle"/>
+          </a:ln>
+        </p:spPr>
+      </p:sp>
+      <p:sp>
+        <p:nvSpPr>
+          <p:cNvPr id="14" name="Text 11"/>
+          <p:cNvSpPr txBox="1"/>
+          <p:nvPr/>
+        </p:nvSpPr>
+        <p:spPr>
+          <a:xfrm>
+            <a:off x="4434840" y="4434840"/>
+            <a:ext cx="457200" cy="457200"/>
+          </a:xfrm>
+          <a:prstGeom prst="rect">
+            <a:avLst/>
+          </a:prstGeom>
+          <a:noFill/>
+          <a:ln/>
+        </p:spPr>
+        <p:txBody>
+          <a:bodyPr wrap="square" lIns="0" tIns="0" rIns="0" bIns="0" rtlCol="0" anchor="t"/>
+          <a:lstStyle/>
+          <a:p>
+            <a:pPr algn="ctr" indent="0" marL="0">
+              <a:buNone/>
+            </a:pPr>
+            <a:r>
+              <a:rPr lang="en-US" sz="2000" b="1" dirty="0">
+                <a:solidFill>
+                  <a:schemeClr val="accent6"/>
+                </a:solidFill>
+              </a:rPr>
+              <a:t>?</a:t>
+            </a:r>
+            <a:endParaRPr lang="en-US" sz="2000" dirty="0"/>
+          </a:p>
+        </p:txBody>
+      </p:sp>
+      <p:sp>
+        <p:nvSpPr>
+          <p:cNvPr id="15" name="Text 12"/>
+          <p:cNvSpPr txBox="1"/>
+          <p:nvPr/>
+        </p:nvSpPr>
+        <p:spPr>
+          <a:xfrm>
+            <a:off x="8229600" y="1920240"/>
+            <a:ext cx="3291840" cy="3840480"/>
+          </a:xfrm>
+          <a:prstGeom prst="rect">
+            <a:avLst/>
+          </a:prstGeom>
+          <a:noFill/>
+          <a:ln/>
+        </p:spPr>
+        <p:txBody>
+          <a:bodyPr wrap="square" lIns="0" tIns="0" rIns="0" bIns="0" rtlCol="0" anchor="t"/>
+          <a:lstStyle/>
+          <a:p>
+            <a:pPr indent="0" marL="0">
+              <a:buNone/>
+            </a:pPr>
+            <a:r>
+              <a:rPr lang="en-US" sz="2000" b="1" dirty="0">
+                <a:solidFill>
+                  <a:schemeClr val="accent5"/>
+                </a:solidFill>
+              </a:rPr>
+              <a:t>Confounding</a:t>
+            </a:r>
+            <a:endParaRPr lang="en-US" sz="1500" dirty="0"/>
+          </a:p>
+          <a:p>
+            <a:pPr indent="0" marL="0">
+              <a:spcAft>
+                <a:spcPts val="1400"/>
+              </a:spcAft>
+              <a:buNone/>
+            </a:pPr>
+            <a:r>
+              <a:rPr lang="en-US" sz="1500" dirty="0">
+                <a:solidFill>
+                  <a:schemeClr val="tx2"/>
+                </a:solidFill>
+              </a:rPr>
+              <a:t>두 변수를 동시에 움직이는 제3의 변수</a:t>
+            </a:r>
+            <a:endParaRPr lang="en-US" sz="1500" dirty="0"/>
+          </a:p>
+          <a:p>
+            <a:pPr indent="0" marL="0">
+              <a:buNone/>
+            </a:pPr>
+            <a:r>
+              <a:rPr lang="en-US" sz="2000" b="1" dirty="0">
+                <a:solidFill>
+                  <a:schemeClr val="accent5"/>
+                </a:solidFill>
+              </a:rPr>
+              <a:t>Selection Bias</a:t>
+            </a:r>
+            <a:endParaRPr lang="en-US" sz="1500" dirty="0"/>
+          </a:p>
+          <a:p>
+            <a:pPr indent="0" marL="0">
+              <a:spcAft>
+                <a:spcPts val="1400"/>
+              </a:spcAft>
+              <a:buNone/>
+            </a:pPr>
+            <a:r>
+              <a:rPr lang="en-US" sz="1500" dirty="0">
+                <a:solidFill>
+                  <a:schemeClr val="tx2"/>
+                </a:solidFill>
+              </a:rPr>
+              <a:t>처치를 스스로 고른 사람은 처음부터 다르다</a:t>
+            </a:r>
+            <a:endParaRPr lang="en-US" sz="1500" dirty="0"/>
+          </a:p>
+          <a:p>
+            <a:pPr indent="0" marL="0">
+              <a:buNone/>
+            </a:pPr>
+            <a:r>
+              <a:rPr lang="en-US" sz="2000" b="1" dirty="0">
+                <a:solidFill>
+                  <a:schemeClr val="tx1"/>
+                </a:solidFill>
+              </a:rPr>
+              <a:t>확인할 수 있는 것</a:t>
+            </a:r>
+            <a:endParaRPr lang="en-US" sz="1500" dirty="0"/>
+          </a:p>
+          <a:p>
+            <a:pPr indent="0" marL="0">
+              <a:buNone/>
+            </a:pPr>
+            <a:r>
+              <a:rPr lang="en-US" sz="1500" dirty="0">
+                <a:solidFill>
+                  <a:schemeClr val="tx2"/>
+                </a:solidFill>
+              </a:rPr>
+              <a:t>새 기능 사용 ↔ 낮은 이탈률 (상관)</a:t>
+            </a:r>
+            <a:endParaRPr lang="en-US" sz="1500" dirty="0"/>
+          </a:p>
+          <a:p>
+            <a:pPr indent="0" marL="0">
+              <a:buNone/>
+            </a:pPr>
+            <a:r>
+              <a:rPr lang="en-US" sz="1500" dirty="0">
+                <a:solidFill>
+                  <a:schemeClr val="tx2"/>
+                </a:solidFill>
+              </a:rPr>
+              <a:t>새 기능 사용 → 이탈률 감소 (인과)는 무작위 실험으로만</a:t>
+            </a:r>
+            <a:endParaRPr lang="en-US" sz="1500" dirty="0"/>
+          </a:p>
+        </p:txBody>
+      </p:sp>
+      <p:sp>
+        <p:nvSpPr>
+          <p:cNvPr id="16" name="Text 13"/>
+          <p:cNvSpPr txBox="1"/>
+          <p:nvPr/>
+        </p:nvSpPr>
+        <p:spPr>
+          <a:xfrm>
+            <a:off x="640080" y="5989320"/>
+            <a:ext cx="10911535" cy="274320"/>
+          </a:xfrm>
+          <a:prstGeom prst="rect">
+            <a:avLst/>
+          </a:prstGeom>
+          <a:noFill/>
+          <a:ln/>
+        </p:spPr>
+        <p:txBody>
+          <a:bodyPr wrap="square" lIns="0" tIns="0" rIns="0" bIns="0" rtlCol="0" anchor="t"/>
+          <a:lstStyle/>
+          <a:p>
+            <a:pPr indent="0" marL="0">
+              <a:buNone/>
+            </a:pPr>
+            <a:r>
+              <a:rPr lang="en-US" sz="1100" dirty="0">
+                <a:solidFill>
+                  <a:schemeClr val="accent6"/>
+                </a:solidFill>
+              </a:rPr>
+              <a:t>출처: Kohavi, Tang, Xu (2020) 예시를 각색 · 위키 01편 5장</a:t>
+            </a:r>
+            <a:endParaRPr lang="en-US" sz="1100" dirty="0"/>
+          </a:p>
+        </p:txBody>
+      </p:sp>
+      <p:sp>
+        <p:nvSpPr>
+          <p:cNvPr id="25" name="Slide Number Placeholder 0"/>
+          <p:cNvSpPr>
+            <a:spLocks noGrp="1"/>
+          </p:cNvSpPr>
+          <p:nvPr>
+            <p:ph type="sldNum" sz="quarter" idx="4294967295"/>
+          </p:nvPr>
+        </p:nvSpPr>
+        <p:spPr>
+          <a:xfrm>
+            <a:off x="11109960" y="6355080"/>
+            <a:ext cx="457200" cy="274320"/>
+          </a:xfrm>
+          <a:prstGeom prst="rect">
+            <a:avLst/>
+          </a:prstGeom>
+          <a:extLst>
+            <a:ext uri="{C572A759-6A51-4108-AA02-DFA0A04FC94B}">
+              <ma14:wrappingTextBoxFlag xmlns:ma14="http://schemas.microsoft.com/office/mac/drawingml/2011/main" val="0"/>
+            </a:ext>
+          </a:extLst>
+        </p:spPr>
+        <p:txBody>
+          <a:bodyPr/>
+          <a:lstStyle>
+            <a:lvl1pPr>
+              <a:defRPr sz="1000">
+                <a:solidFill>
+                  <a:srgbClr val="8A90A8"/>
+                </a:solidFill>
+              </a:defRPr>
+            </a:lvl1pPr>
+          </a:lstStyle>
+          <a:p>
+            <a:pPr algn="r"/>
+            <a:fld id="{F7021451-1387-4CA6-816F-3879F97B5CBC}" type="slidenum">
+              <a:rPr b="0" lang="en-US"/>
+              <a:t>6</a:t>
+            </a:fld>
+            <a:endParaRPr lang="en-US"/>
+          </a:p>
+        </p:txBody>
+      </p:sp>
+    </p:spTree>
+  </p:cSld>
+  <p:clrMapOvr>
+    <a:masterClrMapping/>
+  </p:clrMapOvr>
+</p:sld>
+</file>
+
+<file path=ppt/slides/slide60.xml><?xml version="1.0" encoding="utf-8"?>
+<p:sld xmlns:a="http://schemas.openxmlformats.org/drawingml/2006/main" xmlns:r="http://schemas.openxmlformats.org/officeDocument/2006/relationships" xmlns:p="http://schemas.openxmlformats.org/presentationml/2006/main">
+  <p:cSld name="Slide 60">
+    <p:spTree>
+      <p:nvGrpSpPr>
+        <p:cNvPr id="1" name=""/>
+        <p:cNvGrpSpPr/>
+        <p:nvPr/>
+      </p:nvGrpSpPr>
+      <p:grpSpPr>
+        <a:xfrm>
+          <a:off x="0" y="0"/>
+          <a:ext cx="0" cy="0"/>
+          <a:chOff x="0" y="0"/>
+          <a:chExt cx="0" cy="0"/>
+        </a:xfrm>
+      </p:grpSpPr>
+      <p:sp>
+        <p:nvSpPr>
+          <p:cNvPr id="2" name="Text 0"/>
+          <p:cNvSpPr/>
+          <p:nvPr>
+            <p:ph idx="100" type="body" hasCustomPrompt="1"/>
+          </p:nvPr>
+        </p:nvSpPr>
+        <p:spPr>
+          <a:xfrm>
+            <a:off x="640080" y="411480"/>
+            <a:ext cx="7315200" cy="320040"/>
+          </a:xfrm>
+          <a:prstGeom prst="rect">
+            <a:avLst/>
+          </a:prstGeom>
+          <a:noFill/>
+          <a:ln/>
+        </p:spPr>
+        <p:txBody>
+          <a:bodyPr wrap="square" lIns="0" tIns="0" rIns="0" bIns="0" rtlCol="0" anchor="t"/>
+          <a:lstStyle/>
+          <a:p>
+            <a:pPr algn="l" indent="0" marL="0">
+              <a:buNone/>
+            </a:pPr>
+            <a:r>
+              <a:rPr lang="en-US" sz="1500" b="1" dirty="0">
+                <a:solidFill>
+                  <a:srgbClr val="3A5BFF"/>
+                </a:solidFill>
+              </a:rPr>
+              <a:t>Ch4 · 고급 설계</a:t>
+            </a:r>
+            <a:endParaRPr lang="en-US" sz="1500" dirty="0"/>
+          </a:p>
+        </p:txBody>
+      </p:sp>
+      <p:sp>
+        <p:nvSpPr>
+          <p:cNvPr id="3" name="Text 0"/>
+          <p:cNvSpPr/>
+          <p:nvPr>
+            <p:ph idx="101" type="title" hasCustomPrompt="1"/>
+          </p:nvPr>
+        </p:nvSpPr>
+        <p:spPr>
+          <a:xfrm>
+            <a:off x="640080" y="749808"/>
+            <a:ext cx="10911535" cy="777240"/>
+          </a:xfrm>
+          <a:prstGeom prst="rect">
+            <a:avLst/>
+          </a:prstGeom>
+          <a:noFill/>
+          <a:ln/>
+        </p:spPr>
+        <p:txBody>
+          <a:bodyPr wrap="square" lIns="0" tIns="0" rIns="0" bIns="0" rtlCol="0" anchor="t"/>
+          <a:lstStyle/>
+          <a:p>
+            <a:pPr algn="l" indent="0" marL="0">
+              <a:buNone/>
+            </a:pPr>
+            <a:r>
+              <a:rPr lang="en-US" sz="2000" b="1" dirty="0">
+                <a:solidFill>
+                  <a:srgbClr val="1B1F3B"/>
+                </a:solidFill>
+              </a:rPr>
+              <a:t>목적이 다르면 실험 방식도 다르다</a:t>
+            </a:r>
+            <a:endParaRPr lang="en-US" sz="2000" dirty="0"/>
+          </a:p>
+        </p:txBody>
+      </p:sp>
+      <p:graphicFrame>
+        <p:nvGraphicFramePr>
+          <p:cNvPr id="61" name="Table 0"/>
           <p:cNvGraphicFramePr>
             <a:graphicFrameLocks noGrp="1"/>
           </p:cNvGraphicFramePr>
@@ -48539,330 +52026,6 @@
                             <a:srgbClr val="1B1F3B"/>
                           </a:solidFill>
                         </a:rPr>
-                        <a:t>Switchback</a:t>
-                      </a:r>
-                      <a:endParaRPr lang="en-US" sz="1500" dirty="0"/>
-                    </a:p>
-                  </a:txBody>
-                  <a:tcPr marL="0" marR="109728" marT="73152" marB="73152" anchor="ctr">
-                    <a:lnL w="0" cap="flat" cmpd="sng" algn="ctr">
-                      <a:noFill/>
-                    </a:lnL>
-                    <a:lnR w="0" cap="flat" cmpd="sng" algn="ctr">
-                      <a:noFill/>
-                    </a:lnR>
-                    <a:lnT w="0" cap="flat" cmpd="sng" algn="ctr">
-                      <a:noFill/>
-                    </a:lnT>
-                    <a:lnB w="9525" cap="flat" cmpd="sng" algn="ctr">
-                      <a:solidFill>
-                        <a:srgbClr val="E3E7F1"/>
-                      </a:solidFill>
-                      <a:prstDash val="solid"/>
-                      <a:round/>
-                      <a:headEnd type="none" w="med" len="med"/>
-                      <a:tailEnd type="none" w="med" len="med"/>
-                    </a:lnB>
-                  </a:tcPr>
-                </a:tc>
-                <a:tc>
-                  <a:txBody>
-                    <a:bodyPr/>
-                    <a:lstStyle/>
-                    <a:p>
-                      <a:pPr indent="0" marL="0">
-                        <a:buNone/>
-                      </a:pPr>
-                      <a:r>
-                        <a:rPr lang="en-US" sz="1500" dirty="0">
-                          <a:solidFill>
-                            <a:srgbClr val="1B1F3B"/>
-                          </a:solidFill>
-                        </a:rPr>
-                        <a:t>시장 전체가 엮여 사용자 단위로 못 나눌 때</a:t>
-                      </a:r>
-                      <a:endParaRPr lang="en-US" sz="1500" dirty="0"/>
-                    </a:p>
-                  </a:txBody>
-                  <a:tcPr marL="0" marR="109728" marT="73152" marB="73152" anchor="ctr">
-                    <a:lnL w="0" cap="flat" cmpd="sng" algn="ctr">
-                      <a:noFill/>
-                    </a:lnL>
-                    <a:lnR w="0" cap="flat" cmpd="sng" algn="ctr">
-                      <a:noFill/>
-                    </a:lnR>
-                    <a:lnT w="0" cap="flat" cmpd="sng" algn="ctr">
-                      <a:noFill/>
-                    </a:lnT>
-                    <a:lnB w="9525" cap="flat" cmpd="sng" algn="ctr">
-                      <a:solidFill>
-                        <a:srgbClr val="E3E7F1"/>
-                      </a:solidFill>
-                      <a:prstDash val="solid"/>
-                      <a:round/>
-                      <a:headEnd type="none" w="med" len="med"/>
-                      <a:tailEnd type="none" w="med" len="med"/>
-                    </a:lnB>
-                  </a:tcPr>
-                </a:tc>
-                <a:tc>
-                  <a:txBody>
-                    <a:bodyPr/>
-                    <a:lstStyle/>
-                    <a:p>
-                      <a:pPr indent="0" marL="0">
-                        <a:buNone/>
-                      </a:pPr>
-                      <a:r>
-                        <a:rPr lang="en-US" sz="1500" dirty="0">
-                          <a:solidFill>
-                            <a:srgbClr val="1B1F3B"/>
-                          </a:solidFill>
-                        </a:rPr>
-                        <a:t>시간 구간마다 지역 전체를 A ↔ B로 전환</a:t>
-                      </a:r>
-                      <a:endParaRPr lang="en-US" sz="1500" dirty="0"/>
-                    </a:p>
-                  </a:txBody>
-                  <a:tcPr marL="0" marR="109728" marT="73152" marB="73152" anchor="ctr">
-                    <a:lnL w="0" cap="flat" cmpd="sng" algn="ctr">
-                      <a:noFill/>
-                    </a:lnL>
-                    <a:lnR w="0" cap="flat" cmpd="sng" algn="ctr">
-                      <a:noFill/>
-                    </a:lnR>
-                    <a:lnT w="0" cap="flat" cmpd="sng" algn="ctr">
-                      <a:noFill/>
-                    </a:lnT>
-                    <a:lnB w="9525" cap="flat" cmpd="sng" algn="ctr">
-                      <a:solidFill>
-                        <a:srgbClr val="E3E7F1"/>
-                      </a:solidFill>
-                      <a:prstDash val="solid"/>
-                      <a:round/>
-                      <a:headEnd type="none" w="med" len="med"/>
-                      <a:tailEnd type="none" w="med" len="med"/>
-                    </a:lnB>
-                  </a:tcPr>
-                </a:tc>
-                <a:tc>
-                  <a:txBody>
-                    <a:bodyPr/>
-                    <a:lstStyle/>
-                    <a:p>
-                      <a:pPr indent="0" marL="0">
-                        <a:buNone/>
-                      </a:pPr>
-                      <a:r>
-                        <a:rPr lang="en-US" sz="1500" dirty="0">
-                          <a:solidFill>
-                            <a:srgbClr val="1B1F3B"/>
-                          </a:solidFill>
-                        </a:rPr>
-                        <a:t>배달·라이드쉐어 배차</a:t>
-                      </a:r>
-                      <a:endParaRPr lang="en-US" sz="1500" dirty="0"/>
-                    </a:p>
-                  </a:txBody>
-                  <a:tcPr marL="0" marR="109728" marT="73152" marB="73152" anchor="ctr">
-                    <a:lnL w="0" cap="flat" cmpd="sng" algn="ctr">
-                      <a:noFill/>
-                    </a:lnL>
-                    <a:lnR w="0" cap="flat" cmpd="sng" algn="ctr">
-                      <a:noFill/>
-                    </a:lnR>
-                    <a:lnT w="0" cap="flat" cmpd="sng" algn="ctr">
-                      <a:noFill/>
-                    </a:lnT>
-                    <a:lnB w="9525" cap="flat" cmpd="sng" algn="ctr">
-                      <a:solidFill>
-                        <a:srgbClr val="E3E7F1"/>
-                      </a:solidFill>
-                      <a:prstDash val="solid"/>
-                      <a:round/>
-                      <a:headEnd type="none" w="med" len="med"/>
-                      <a:tailEnd type="none" w="med" len="med"/>
-                    </a:lnB>
-                  </a:tcPr>
-                </a:tc>
-              </a:tr>
-              <a:tr h="731520">
-                <a:tc>
-                  <a:txBody>
-                    <a:bodyPr/>
-                    <a:lstStyle/>
-                    <a:p>
-                      <a:pPr indent="0" marL="0">
-                        <a:buNone/>
-                      </a:pPr>
-                      <a:r>
-                        <a:rPr lang="en-US" sz="1500" b="1" dirty="0">
-                          <a:solidFill>
-                            <a:srgbClr val="1B1F3B"/>
-                          </a:solidFill>
-                        </a:rPr>
-                        <a:t>Cluster Randomization</a:t>
-                      </a:r>
-                      <a:endParaRPr lang="en-US" sz="1500" dirty="0"/>
-                    </a:p>
-                  </a:txBody>
-                  <a:tcPr marL="0" marR="109728" marT="73152" marB="73152" anchor="ctr">
-                    <a:lnL w="0" cap="flat" cmpd="sng" algn="ctr">
-                      <a:noFill/>
-                    </a:lnL>
-                    <a:lnR w="0" cap="flat" cmpd="sng" algn="ctr">
-                      <a:noFill/>
-                    </a:lnR>
-                    <a:lnT w="0" cap="flat" cmpd="sng" algn="ctr">
-                      <a:noFill/>
-                    </a:lnT>
-                    <a:lnB w="9525" cap="flat" cmpd="sng" algn="ctr">
-                      <a:solidFill>
-                        <a:srgbClr val="E3E7F1"/>
-                      </a:solidFill>
-                      <a:prstDash val="solid"/>
-                      <a:round/>
-                      <a:headEnd type="none" w="med" len="med"/>
-                      <a:tailEnd type="none" w="med" len="med"/>
-                    </a:lnB>
-                  </a:tcPr>
-                </a:tc>
-                <a:tc>
-                  <a:txBody>
-                    <a:bodyPr/>
-                    <a:lstStyle/>
-                    <a:p>
-                      <a:pPr indent="0" marL="0">
-                        <a:buNone/>
-                      </a:pPr>
-                      <a:r>
-                        <a:rPr lang="en-US" sz="1500" dirty="0">
-                          <a:solidFill>
-                            <a:srgbClr val="1B1F3B"/>
-                          </a:solidFill>
-                        </a:rPr>
-                        <a:t>사용자끼리 영향을 주고받을 때</a:t>
-                      </a:r>
-                      <a:endParaRPr lang="en-US" sz="1500" dirty="0"/>
-                    </a:p>
-                  </a:txBody>
-                  <a:tcPr marL="0" marR="109728" marT="73152" marB="73152" anchor="ctr">
-                    <a:lnL w="0" cap="flat" cmpd="sng" algn="ctr">
-                      <a:noFill/>
-                    </a:lnL>
-                    <a:lnR w="0" cap="flat" cmpd="sng" algn="ctr">
-                      <a:noFill/>
-                    </a:lnR>
-                    <a:lnT w="0" cap="flat" cmpd="sng" algn="ctr">
-                      <a:noFill/>
-                    </a:lnT>
-                    <a:lnB w="9525" cap="flat" cmpd="sng" algn="ctr">
-                      <a:solidFill>
-                        <a:srgbClr val="E3E7F1"/>
-                      </a:solidFill>
-                      <a:prstDash val="solid"/>
-                      <a:round/>
-                      <a:headEnd type="none" w="med" len="med"/>
-                      <a:tailEnd type="none" w="med" len="med"/>
-                    </a:lnB>
-                  </a:tcPr>
-                </a:tc>
-                <a:tc>
-                  <a:txBody>
-                    <a:bodyPr/>
-                    <a:lstStyle/>
-                    <a:p>
-                      <a:pPr indent="0" marL="0">
-                        <a:buNone/>
-                      </a:pPr>
-                      <a:r>
-                        <a:rPr lang="en-US" sz="1500" dirty="0">
-                          <a:solidFill>
-                            <a:srgbClr val="1B1F3B"/>
-                          </a:solidFill>
-                        </a:rPr>
-                        <a:t>친구 그룹·동네 단위로 통째로 배정</a:t>
-                      </a:r>
-                      <a:endParaRPr lang="en-US" sz="1500" dirty="0"/>
-                    </a:p>
-                  </a:txBody>
-                  <a:tcPr marL="0" marR="109728" marT="73152" marB="73152" anchor="ctr">
-                    <a:lnL w="0" cap="flat" cmpd="sng" algn="ctr">
-                      <a:noFill/>
-                    </a:lnL>
-                    <a:lnR w="0" cap="flat" cmpd="sng" algn="ctr">
-                      <a:noFill/>
-                    </a:lnR>
-                    <a:lnT w="0" cap="flat" cmpd="sng" algn="ctr">
-                      <a:noFill/>
-                    </a:lnT>
-                    <a:lnB w="9525" cap="flat" cmpd="sng" algn="ctr">
-                      <a:solidFill>
-                        <a:srgbClr val="E3E7F1"/>
-                      </a:solidFill>
-                      <a:prstDash val="solid"/>
-                      <a:round/>
-                      <a:headEnd type="none" w="med" len="med"/>
-                      <a:tailEnd type="none" w="med" len="med"/>
-                    </a:lnB>
-                  </a:tcPr>
-                </a:tc>
-                <a:tc>
-                  <a:txBody>
-                    <a:bodyPr/>
-                    <a:lstStyle/>
-                    <a:p>
-                      <a:pPr indent="0" marL="0">
-                        <a:buNone/>
-                      </a:pPr>
-                      <a:r>
-                        <a:rPr lang="en-US" sz="1500" dirty="0">
-                          <a:solidFill>
-                            <a:srgbClr val="1B1F3B"/>
-                          </a:solidFill>
-                        </a:rPr>
-                        <a:t>메신저, 동네 기반 서비스</a:t>
-                      </a:r>
-                      <a:endParaRPr lang="en-US" sz="1500" dirty="0"/>
-                    </a:p>
-                  </a:txBody>
-                  <a:tcPr marL="0" marR="109728" marT="73152" marB="73152" anchor="ctr">
-                    <a:lnL w="0" cap="flat" cmpd="sng" algn="ctr">
-                      <a:noFill/>
-                    </a:lnL>
-                    <a:lnR w="0" cap="flat" cmpd="sng" algn="ctr">
-                      <a:noFill/>
-                    </a:lnR>
-                    <a:lnT w="0" cap="flat" cmpd="sng" algn="ctr">
-                      <a:noFill/>
-                    </a:lnT>
-                    <a:lnB w="9525" cap="flat" cmpd="sng" algn="ctr">
-                      <a:solidFill>
-                        <a:srgbClr val="E3E7F1"/>
-                      </a:solidFill>
-                      <a:prstDash val="solid"/>
-                      <a:round/>
-                      <a:headEnd type="none" w="med" len="med"/>
-                      <a:tailEnd type="none" w="med" len="med"/>
-                    </a:lnB>
-                  </a:tcPr>
-                </a:tc>
-              </a:tr>
-              <a:tr h="731520">
-                <a:tc>
-                  <a:txBody>
-                    <a:bodyPr/>
-                    <a:lstStyle/>
-                    <a:p>
-                      <a:pPr indent="0" marL="0">
-                        <a:buNone/>
-                      </a:pPr>
-                      <a:r>
-                        <a:rPr lang="en-US" sz="1500" b="1" dirty="0">
-                          <a:solidFill>
-                            <a:srgbClr val="1B1F3B"/>
-                          </a:solidFill>
-                        </a:rPr>
                         <a:t>Interleaving</a:t>
                       </a:r>
                       <a:endParaRPr lang="en-US" sz="1500" dirty="0"/>
@@ -49022,8 +52185,8 @@
         </p:nvSpPr>
         <p:spPr>
           <a:xfrm>
-            <a:off x="640080" y="5715000"/>
-            <a:ext cx="10911535" cy="365760"/>
+            <a:off x="640080" y="4343400"/>
+            <a:ext cx="10911535" cy="822960"/>
           </a:xfrm>
           <a:prstGeom prst="rect">
             <a:avLst/>
@@ -49036,6 +52199,9 @@
           <a:lstStyle/>
           <a:p>
             <a:pPr indent="0" marL="0">
+              <a:spcAft>
+                <a:spcPts val="600"/>
+              </a:spcAft>
               <a:buNone/>
             </a:pPr>
             <a:r>
@@ -49045,6 +52211,20 @@
                 </a:solidFill>
               </a:rPr>
               <a:t>밴딧은 빨리 이기는 쪽을 찾지만, 효과 크기 추정은 A/B 테스트보다 부정확합니다</a:t>
+            </a:r>
+            <a:endParaRPr lang="en-US" sz="1500" dirty="0"/>
+          </a:p>
+          <a:p>
+            <a:pPr indent="0" marL="0">
+              <a:buNone/>
+            </a:pPr>
+            <a:r>
+              <a:rPr lang="en-US" sz="1500" dirty="0">
+                <a:solidFill>
+                  <a:schemeClr val="tx2"/>
+                </a:solidFill>
+              </a:rPr>
+              <a:t>간섭에 대응하는 Cluster · Geo · Switchback 설계는 앞 장에서 다뤘습니다</a:t>
             </a:r>
             <a:endParaRPr lang="en-US" sz="1500" dirty="0"/>
           </a:p>
@@ -49089,7 +52269,7 @@
             <a:pPr algn="r"/>
             <a:fld id="{F7021451-1387-4CA6-816F-3879F97B5CBC}" type="slidenum">
               <a:rPr b="0" lang="en-US"/>
-              <a:t>57</a:t>
+              <a:t>60</a:t>
             </a:fld>
             <a:endParaRPr lang="en-US"/>
           </a:p>
@@ -49103,9 +52283,9 @@
 </p:sld>
 </file>
 
-<file path=ppt/slides/slide58.xml><?xml version="1.0" encoding="utf-8"?>
+<file path=ppt/slides/slide61.xml><?xml version="1.0" encoding="utf-8"?>
 <p:sld xmlns:a="http://schemas.openxmlformats.org/drawingml/2006/main" xmlns:r="http://schemas.openxmlformats.org/officeDocument/2006/relationships" xmlns:p="http://schemas.openxmlformats.org/presentationml/2006/main">
-  <p:cSld name="Slide 58">
+  <p:cSld name="Slide 61">
     <p:spTree>
       <p:nvGrpSpPr>
         <p:cNvPr id="1" name=""/>
@@ -49405,7 +52585,7 @@
             <a:pPr algn="r"/>
             <a:fld id="{F7021451-1387-4CA6-816F-3879F97B5CBC}" type="slidenum">
               <a:rPr b="0" lang="en-US"/>
-              <a:t>58</a:t>
+              <a:t>61</a:t>
             </a:fld>
             <a:endParaRPr lang="en-US"/>
           </a:p>
@@ -49419,9 +52599,9 @@
 </p:sld>
 </file>
 
-<file path=ppt/slides/slide59.xml><?xml version="1.0" encoding="utf-8"?>
+<file path=ppt/slides/slide62.xml><?xml version="1.0" encoding="utf-8"?>
 <p:sld xmlns:a="http://schemas.openxmlformats.org/drawingml/2006/main" xmlns:r="http://schemas.openxmlformats.org/officeDocument/2006/relationships" xmlns:p="http://schemas.openxmlformats.org/presentationml/2006/main">
-  <p:cSld name="Slide 59">
+  <p:cSld name="Slide 62">
     <p:spTree>
       <p:nvGrpSpPr>
         <p:cNvPr id="1" name=""/>
@@ -49558,9 +52738,9 @@
 </p:sld>
 </file>
 
-<file path=ppt/slides/slide6.xml><?xml version="1.0" encoding="utf-8"?>
+<file path=ppt/slides/slide63.xml><?xml version="1.0" encoding="utf-8"?>
 <p:sld xmlns:a="http://schemas.openxmlformats.org/drawingml/2006/main" xmlns:r="http://schemas.openxmlformats.org/officeDocument/2006/relationships" xmlns:p="http://schemas.openxmlformats.org/presentationml/2006/main">
-  <p:cSld name="Slide 6">
+  <p:cSld name="Slide 63">
     <p:spTree>
       <p:nvGrpSpPr>
         <p:cNvPr id="1" name=""/>
@@ -49607,7 +52787,7 @@
                   <a:srgbClr val="3A5BFF"/>
                 </a:solidFill>
               </a:rPr>
-              <a:t>Ch1 · 상관관계 vs 인과관계</a:t>
+              <a:t>Ch5 · 산업 사례</a:t>
             </a:r>
             <a:endParaRPr lang="en-US" sz="1500" dirty="0"/>
           </a:p>
@@ -49645,619 +52825,6 @@
                   <a:srgbClr val="1B1F3B"/>
                 </a:solidFill>
               </a:rPr>
-              <a:t>새 기능을 쓰는 사람이 덜 떠난다면, 기능 덕분일까?</a:t>
-            </a:r>
-            <a:endParaRPr lang="en-US" sz="2000" dirty="0"/>
-          </a:p>
-        </p:txBody>
-      </p:sp>
-      <p:sp>
-        <p:nvSpPr>
-          <p:cNvPr id="5" name="Shape 2"/>
-          <p:cNvSpPr/>
-          <p:nvPr/>
-        </p:nvSpPr>
-        <p:spPr>
-          <a:xfrm>
-            <a:off x="3749040" y="2039112"/>
-            <a:ext cx="201168" cy="201168"/>
-          </a:xfrm>
-          <a:prstGeom prst="ellipse">
-            <a:avLst/>
-          </a:prstGeom>
-          <a:solidFill>
-            <a:srgbClr val="B87700"/>
-          </a:solidFill>
-          <a:ln w="12700">
-            <a:solidFill>
-              <a:srgbClr val="B87700"/>
-            </a:solidFill>
-            <a:prstDash val="solid"/>
-          </a:ln>
-        </p:spPr>
-      </p:sp>
-      <p:sp>
-        <p:nvSpPr>
-          <p:cNvPr id="6" name="Text 3"/>
-          <p:cNvSpPr txBox="1"/>
-          <p:nvPr/>
-        </p:nvSpPr>
-        <p:spPr>
-          <a:xfrm>
-            <a:off x="4069080" y="1965960"/>
-            <a:ext cx="2377440" cy="731520"/>
-          </a:xfrm>
-          <a:prstGeom prst="rect">
-            <a:avLst/>
-          </a:prstGeom>
-          <a:noFill/>
-          <a:ln/>
-        </p:spPr>
-        <p:txBody>
-          <a:bodyPr wrap="square" lIns="0" tIns="0" rIns="0" bIns="0" rtlCol="0" anchor="t"/>
-          <a:lstStyle/>
-          <a:p>
-            <a:pPr indent="0" marL="0">
-              <a:buNone/>
-            </a:pPr>
-            <a:r>
-              <a:rPr lang="en-US" sz="2000" b="1" dirty="0">
-                <a:solidFill>
-                  <a:schemeClr val="tx1"/>
-                </a:solidFill>
-              </a:rPr>
-              <a:t>충성도</a:t>
-            </a:r>
-            <a:endParaRPr lang="en-US" sz="1500" dirty="0"/>
-          </a:p>
-          <a:p>
-            <a:pPr indent="0" marL="0">
-              <a:buNone/>
-            </a:pPr>
-            <a:r>
-              <a:rPr lang="en-US" sz="1400" dirty="0">
-                <a:solidFill>
-                  <a:schemeClr val="tx2"/>
-                </a:solidFill>
-              </a:rPr>
-              <a:t>관측하기 어려움</a:t>
-            </a:r>
-            <a:endParaRPr lang="en-US" sz="1500" dirty="0"/>
-          </a:p>
-        </p:txBody>
-      </p:sp>
-      <p:sp>
-        <p:nvSpPr>
-          <p:cNvPr id="7" name="Shape 4"/>
-          <p:cNvSpPr/>
-          <p:nvPr/>
-        </p:nvSpPr>
-        <p:spPr>
-          <a:xfrm>
-            <a:off x="1097280" y="4279392"/>
-            <a:ext cx="201168" cy="201168"/>
-          </a:xfrm>
-          <a:prstGeom prst="ellipse">
-            <a:avLst/>
-          </a:prstGeom>
-          <a:solidFill>
-            <a:srgbClr val="3A5BFF"/>
-          </a:solidFill>
-          <a:ln w="12700">
-            <a:solidFill>
-              <a:srgbClr val="3A5BFF"/>
-            </a:solidFill>
-            <a:prstDash val="solid"/>
-          </a:ln>
-        </p:spPr>
-      </p:sp>
-      <p:sp>
-        <p:nvSpPr>
-          <p:cNvPr id="8" name="Text 5"/>
-          <p:cNvSpPr txBox="1"/>
-          <p:nvPr/>
-        </p:nvSpPr>
-        <p:spPr>
-          <a:xfrm>
-            <a:off x="1417320" y="4206240"/>
-            <a:ext cx="2194560" cy="457200"/>
-          </a:xfrm>
-          <a:prstGeom prst="rect">
-            <a:avLst/>
-          </a:prstGeom>
-          <a:noFill/>
-          <a:ln/>
-        </p:spPr>
-        <p:txBody>
-          <a:bodyPr wrap="square" lIns="0" tIns="0" rIns="0" bIns="0" rtlCol="0" anchor="t"/>
-          <a:lstStyle/>
-          <a:p>
-            <a:pPr indent="0" marL="0">
-              <a:buNone/>
-            </a:pPr>
-            <a:r>
-              <a:rPr lang="en-US" sz="2000" b="1" dirty="0">
-                <a:solidFill>
-                  <a:schemeClr val="tx1"/>
-                </a:solidFill>
-              </a:rPr>
-              <a:t>새 기능 사용</a:t>
-            </a:r>
-            <a:endParaRPr lang="en-US" sz="2000" dirty="0"/>
-          </a:p>
-        </p:txBody>
-      </p:sp>
-      <p:sp>
-        <p:nvSpPr>
-          <p:cNvPr id="9" name="Shape 6"/>
-          <p:cNvSpPr/>
-          <p:nvPr/>
-        </p:nvSpPr>
-        <p:spPr>
-          <a:xfrm>
-            <a:off x="6400800" y="4279392"/>
-            <a:ext cx="201168" cy="201168"/>
-          </a:xfrm>
-          <a:prstGeom prst="ellipse">
-            <a:avLst/>
-          </a:prstGeom>
-          <a:solidFill>
-            <a:srgbClr val="0E9C9C"/>
-          </a:solidFill>
-          <a:ln w="12700">
-            <a:solidFill>
-              <a:srgbClr val="0E9C9C"/>
-            </a:solidFill>
-            <a:prstDash val="solid"/>
-          </a:ln>
-        </p:spPr>
-      </p:sp>
-      <p:sp>
-        <p:nvSpPr>
-          <p:cNvPr id="10" name="Text 7"/>
-          <p:cNvSpPr txBox="1"/>
-          <p:nvPr/>
-        </p:nvSpPr>
-        <p:spPr>
-          <a:xfrm>
-            <a:off x="6720840" y="4206240"/>
-            <a:ext cx="2194560" cy="457200"/>
-          </a:xfrm>
-          <a:prstGeom prst="rect">
-            <a:avLst/>
-          </a:prstGeom>
-          <a:noFill/>
-          <a:ln/>
-        </p:spPr>
-        <p:txBody>
-          <a:bodyPr wrap="square" lIns="0" tIns="0" rIns="0" bIns="0" rtlCol="0" anchor="t"/>
-          <a:lstStyle/>
-          <a:p>
-            <a:pPr indent="0" marL="0">
-              <a:buNone/>
-            </a:pPr>
-            <a:r>
-              <a:rPr lang="en-US" sz="2000" b="1" dirty="0">
-                <a:solidFill>
-                  <a:schemeClr val="tx1"/>
-                </a:solidFill>
-              </a:rPr>
-              <a:t>이탈률 낮음</a:t>
-            </a:r>
-            <a:endParaRPr lang="en-US" sz="2000" dirty="0"/>
-          </a:p>
-        </p:txBody>
-      </p:sp>
-      <p:sp>
-        <p:nvSpPr>
-          <p:cNvPr id="11" name="Shape 8"/>
-          <p:cNvSpPr/>
-          <p:nvPr/>
-        </p:nvSpPr>
-        <p:spPr>
-          <a:xfrm flipH="1">
-            <a:off x="1737360" y="2743200"/>
-            <a:ext cx="1828800" cy="1280160"/>
-          </a:xfrm>
-          <a:prstGeom prst="line">
-            <a:avLst/>
-          </a:prstGeom>
-          <a:noFill/>
-          <a:ln w="25400">
-            <a:solidFill>
-              <a:srgbClr val="B87700"/>
-            </a:solidFill>
-            <a:prstDash val="solid"/>
-            <a:tailEnd type="triangle"/>
-          </a:ln>
-        </p:spPr>
-      </p:sp>
-      <p:sp>
-        <p:nvSpPr>
-          <p:cNvPr id="12" name="Shape 9"/>
-          <p:cNvSpPr/>
-          <p:nvPr/>
-        </p:nvSpPr>
-        <p:spPr>
-          <a:xfrm>
-            <a:off x="4572000" y="2743200"/>
-            <a:ext cx="1920240" cy="1280160"/>
-          </a:xfrm>
-          <a:prstGeom prst="line">
-            <a:avLst/>
-          </a:prstGeom>
-          <a:noFill/>
-          <a:ln w="25400">
-            <a:solidFill>
-              <a:srgbClr val="B87700"/>
-            </a:solidFill>
-            <a:prstDash val="solid"/>
-            <a:tailEnd type="triangle"/>
-          </a:ln>
-        </p:spPr>
-      </p:sp>
-      <p:sp>
-        <p:nvSpPr>
-          <p:cNvPr id="13" name="Shape 10"/>
-          <p:cNvSpPr/>
-          <p:nvPr/>
-        </p:nvSpPr>
-        <p:spPr>
-          <a:xfrm>
-            <a:off x="3017520" y="4315968"/>
-            <a:ext cx="3200400" cy="0"/>
-          </a:xfrm>
-          <a:prstGeom prst="line">
-            <a:avLst/>
-          </a:prstGeom>
-          <a:noFill/>
-          <a:ln w="25400">
-            <a:solidFill>
-              <a:srgbClr val="8A90A8"/>
-            </a:solidFill>
-            <a:prstDash val="dash"/>
-            <a:tailEnd type="triangle"/>
-          </a:ln>
-        </p:spPr>
-      </p:sp>
-      <p:sp>
-        <p:nvSpPr>
-          <p:cNvPr id="14" name="Text 11"/>
-          <p:cNvSpPr txBox="1"/>
-          <p:nvPr/>
-        </p:nvSpPr>
-        <p:spPr>
-          <a:xfrm>
-            <a:off x="4434840" y="4434840"/>
-            <a:ext cx="457200" cy="457200"/>
-          </a:xfrm>
-          <a:prstGeom prst="rect">
-            <a:avLst/>
-          </a:prstGeom>
-          <a:noFill/>
-          <a:ln/>
-        </p:spPr>
-        <p:txBody>
-          <a:bodyPr wrap="square" lIns="0" tIns="0" rIns="0" bIns="0" rtlCol="0" anchor="t"/>
-          <a:lstStyle/>
-          <a:p>
-            <a:pPr algn="ctr" indent="0" marL="0">
-              <a:buNone/>
-            </a:pPr>
-            <a:r>
-              <a:rPr lang="en-US" sz="2000" b="1" dirty="0">
-                <a:solidFill>
-                  <a:schemeClr val="accent6"/>
-                </a:solidFill>
-              </a:rPr>
-              <a:t>?</a:t>
-            </a:r>
-            <a:endParaRPr lang="en-US" sz="2000" dirty="0"/>
-          </a:p>
-        </p:txBody>
-      </p:sp>
-      <p:sp>
-        <p:nvSpPr>
-          <p:cNvPr id="15" name="Text 12"/>
-          <p:cNvSpPr txBox="1"/>
-          <p:nvPr/>
-        </p:nvSpPr>
-        <p:spPr>
-          <a:xfrm>
-            <a:off x="8229600" y="1920240"/>
-            <a:ext cx="3291840" cy="3840480"/>
-          </a:xfrm>
-          <a:prstGeom prst="rect">
-            <a:avLst/>
-          </a:prstGeom>
-          <a:noFill/>
-          <a:ln/>
-        </p:spPr>
-        <p:txBody>
-          <a:bodyPr wrap="square" lIns="0" tIns="0" rIns="0" bIns="0" rtlCol="0" anchor="t"/>
-          <a:lstStyle/>
-          <a:p>
-            <a:pPr indent="0" marL="0">
-              <a:buNone/>
-            </a:pPr>
-            <a:r>
-              <a:rPr lang="en-US" sz="2000" b="1" dirty="0">
-                <a:solidFill>
-                  <a:schemeClr val="accent5"/>
-                </a:solidFill>
-              </a:rPr>
-              <a:t>Confounding</a:t>
-            </a:r>
-            <a:endParaRPr lang="en-US" sz="1500" dirty="0"/>
-          </a:p>
-          <a:p>
-            <a:pPr indent="0" marL="0">
-              <a:spcAft>
-                <a:spcPts val="1400"/>
-              </a:spcAft>
-              <a:buNone/>
-            </a:pPr>
-            <a:r>
-              <a:rPr lang="en-US" sz="1500" dirty="0">
-                <a:solidFill>
-                  <a:schemeClr val="tx2"/>
-                </a:solidFill>
-              </a:rPr>
-              <a:t>두 변수를 동시에 움직이는 제3의 변수</a:t>
-            </a:r>
-            <a:endParaRPr lang="en-US" sz="1500" dirty="0"/>
-          </a:p>
-          <a:p>
-            <a:pPr indent="0" marL="0">
-              <a:buNone/>
-            </a:pPr>
-            <a:r>
-              <a:rPr lang="en-US" sz="2000" b="1" dirty="0">
-                <a:solidFill>
-                  <a:schemeClr val="accent5"/>
-                </a:solidFill>
-              </a:rPr>
-              <a:t>Selection Bias</a:t>
-            </a:r>
-            <a:endParaRPr lang="en-US" sz="1500" dirty="0"/>
-          </a:p>
-          <a:p>
-            <a:pPr indent="0" marL="0">
-              <a:spcAft>
-                <a:spcPts val="1400"/>
-              </a:spcAft>
-              <a:buNone/>
-            </a:pPr>
-            <a:r>
-              <a:rPr lang="en-US" sz="1500" dirty="0">
-                <a:solidFill>
-                  <a:schemeClr val="tx2"/>
-                </a:solidFill>
-              </a:rPr>
-              <a:t>처치를 스스로 고른 사람은 처음부터 다르다</a:t>
-            </a:r>
-            <a:endParaRPr lang="en-US" sz="1500" dirty="0"/>
-          </a:p>
-          <a:p>
-            <a:pPr indent="0" marL="0">
-              <a:buNone/>
-            </a:pPr>
-            <a:r>
-              <a:rPr lang="en-US" sz="2000" b="1" dirty="0">
-                <a:solidFill>
-                  <a:schemeClr val="tx1"/>
-                </a:solidFill>
-              </a:rPr>
-              <a:t>확인할 수 있는 것</a:t>
-            </a:r>
-            <a:endParaRPr lang="en-US" sz="1500" dirty="0"/>
-          </a:p>
-          <a:p>
-            <a:pPr indent="0" marL="0">
-              <a:buNone/>
-            </a:pPr>
-            <a:r>
-              <a:rPr lang="en-US" sz="1500" dirty="0">
-                <a:solidFill>
-                  <a:schemeClr val="tx2"/>
-                </a:solidFill>
-              </a:rPr>
-              <a:t>새 기능 사용 ↔ 낮은 이탈률 (상관)</a:t>
-            </a:r>
-            <a:endParaRPr lang="en-US" sz="1500" dirty="0"/>
-          </a:p>
-          <a:p>
-            <a:pPr indent="0" marL="0">
-              <a:buNone/>
-            </a:pPr>
-            <a:r>
-              <a:rPr lang="en-US" sz="1500" dirty="0">
-                <a:solidFill>
-                  <a:schemeClr val="tx2"/>
-                </a:solidFill>
-              </a:rPr>
-              <a:t>새 기능 사용 → 이탈률 감소 (인과)는 무작위 실험으로만</a:t>
-            </a:r>
-            <a:endParaRPr lang="en-US" sz="1500" dirty="0"/>
-          </a:p>
-        </p:txBody>
-      </p:sp>
-      <p:sp>
-        <p:nvSpPr>
-          <p:cNvPr id="16" name="Text 13"/>
-          <p:cNvSpPr txBox="1"/>
-          <p:nvPr/>
-        </p:nvSpPr>
-        <p:spPr>
-          <a:xfrm>
-            <a:off x="640080" y="5989320"/>
-            <a:ext cx="10911535" cy="274320"/>
-          </a:xfrm>
-          <a:prstGeom prst="rect">
-            <a:avLst/>
-          </a:prstGeom>
-          <a:noFill/>
-          <a:ln/>
-        </p:spPr>
-        <p:txBody>
-          <a:bodyPr wrap="square" lIns="0" tIns="0" rIns="0" bIns="0" rtlCol="0" anchor="t"/>
-          <a:lstStyle/>
-          <a:p>
-            <a:pPr indent="0" marL="0">
-              <a:buNone/>
-            </a:pPr>
-            <a:r>
-              <a:rPr lang="en-US" sz="1100" dirty="0">
-                <a:solidFill>
-                  <a:schemeClr val="accent6"/>
-                </a:solidFill>
-              </a:rPr>
-              <a:t>출처: Kohavi, Tang, Xu (2020) 예시를 각색 · 위키 01편 5장</a:t>
-            </a:r>
-            <a:endParaRPr lang="en-US" sz="1100" dirty="0"/>
-          </a:p>
-        </p:txBody>
-      </p:sp>
-      <p:sp>
-        <p:nvSpPr>
-          <p:cNvPr id="25" name="Slide Number Placeholder 0"/>
-          <p:cNvSpPr>
-            <a:spLocks noGrp="1"/>
-          </p:cNvSpPr>
-          <p:nvPr>
-            <p:ph type="sldNum" sz="quarter" idx="4294967295"/>
-          </p:nvPr>
-        </p:nvSpPr>
-        <p:spPr>
-          <a:xfrm>
-            <a:off x="11109960" y="6355080"/>
-            <a:ext cx="457200" cy="274320"/>
-          </a:xfrm>
-          <a:prstGeom prst="rect">
-            <a:avLst/>
-          </a:prstGeom>
-          <a:extLst>
-            <a:ext uri="{C572A759-6A51-4108-AA02-DFA0A04FC94B}">
-              <ma14:wrappingTextBoxFlag xmlns:ma14="http://schemas.microsoft.com/office/mac/drawingml/2011/main" val="0"/>
-            </a:ext>
-          </a:extLst>
-        </p:spPr>
-        <p:txBody>
-          <a:bodyPr/>
-          <a:lstStyle>
-            <a:lvl1pPr>
-              <a:defRPr sz="1000">
-                <a:solidFill>
-                  <a:srgbClr val="8A90A8"/>
-                </a:solidFill>
-              </a:defRPr>
-            </a:lvl1pPr>
-          </a:lstStyle>
-          <a:p>
-            <a:pPr algn="r"/>
-            <a:fld id="{F7021451-1387-4CA6-816F-3879F97B5CBC}" type="slidenum">
-              <a:rPr b="0" lang="en-US"/>
-              <a:t>6</a:t>
-            </a:fld>
-            <a:endParaRPr lang="en-US"/>
-          </a:p>
-        </p:txBody>
-      </p:sp>
-    </p:spTree>
-  </p:cSld>
-  <p:clrMapOvr>
-    <a:masterClrMapping/>
-  </p:clrMapOvr>
-</p:sld>
-</file>
-
-<file path=ppt/slides/slide60.xml><?xml version="1.0" encoding="utf-8"?>
-<p:sld xmlns:a="http://schemas.openxmlformats.org/drawingml/2006/main" xmlns:r="http://schemas.openxmlformats.org/officeDocument/2006/relationships" xmlns:p="http://schemas.openxmlformats.org/presentationml/2006/main">
-  <p:cSld name="Slide 60">
-    <p:spTree>
-      <p:nvGrpSpPr>
-        <p:cNvPr id="1" name=""/>
-        <p:cNvGrpSpPr/>
-        <p:nvPr/>
-      </p:nvGrpSpPr>
-      <p:grpSpPr>
-        <a:xfrm>
-          <a:off x="0" y="0"/>
-          <a:ext cx="0" cy="0"/>
-          <a:chOff x="0" y="0"/>
-          <a:chExt cx="0" cy="0"/>
-        </a:xfrm>
-      </p:grpSpPr>
-      <p:sp>
-        <p:nvSpPr>
-          <p:cNvPr id="2" name="Text 0"/>
-          <p:cNvSpPr/>
-          <p:nvPr>
-            <p:ph idx="100" type="body" hasCustomPrompt="1"/>
-          </p:nvPr>
-        </p:nvSpPr>
-        <p:spPr>
-          <a:xfrm>
-            <a:off x="640080" y="411480"/>
-            <a:ext cx="7315200" cy="320040"/>
-          </a:xfrm>
-          <a:prstGeom prst="rect">
-            <a:avLst/>
-          </a:prstGeom>
-          <a:noFill/>
-          <a:ln/>
-        </p:spPr>
-        <p:txBody>
-          <a:bodyPr wrap="square" lIns="0" tIns="0" rIns="0" bIns="0" rtlCol="0" anchor="t"/>
-          <a:lstStyle/>
-          <a:p>
-            <a:pPr algn="l" indent="0" marL="0">
-              <a:buNone/>
-            </a:pPr>
-            <a:r>
-              <a:rPr lang="en-US" sz="1500" b="1" dirty="0">
-                <a:solidFill>
-                  <a:srgbClr val="3A5BFF"/>
-                </a:solidFill>
-              </a:rPr>
-              <a:t>Ch5 · 산업 사례</a:t>
-            </a:r>
-            <a:endParaRPr lang="en-US" sz="1500" dirty="0"/>
-          </a:p>
-        </p:txBody>
-      </p:sp>
-      <p:sp>
-        <p:nvSpPr>
-          <p:cNvPr id="3" name="Text 0"/>
-          <p:cNvSpPr/>
-          <p:nvPr>
-            <p:ph idx="101" type="title" hasCustomPrompt="1"/>
-          </p:nvPr>
-        </p:nvSpPr>
-        <p:spPr>
-          <a:xfrm>
-            <a:off x="640080" y="749808"/>
-            <a:ext cx="10911535" cy="777240"/>
-          </a:xfrm>
-          <a:prstGeom prst="rect">
-            <a:avLst/>
-          </a:prstGeom>
-          <a:noFill/>
-          <a:ln/>
-        </p:spPr>
-        <p:txBody>
-          <a:bodyPr wrap="square" lIns="0" tIns="0" rIns="0" bIns="0" rtlCol="0" anchor="t"/>
-          <a:lstStyle/>
-          <a:p>
-            <a:pPr algn="l" indent="0" marL="0">
-              <a:buNone/>
-            </a:pPr>
-            <a:r>
-              <a:rPr lang="en-US" sz="2000" b="1" dirty="0">
-                <a:solidFill>
-                  <a:srgbClr val="1B1F3B"/>
-                </a:solidFill>
-              </a:rPr>
               <a:t>실험을 잘하는 회사들이 오늘 개념을 어떻게 쓰나</a:t>
             </a:r>
             <a:endParaRPr lang="en-US" sz="2000" dirty="0"/>
@@ -50266,7 +52833,7 @@
       </p:sp>
       <p:graphicFrame>
         <p:nvGraphicFramePr>
-          <p:cNvPr id="61" name="Table 0"/>
+          <p:cNvPr id="64" name="Table 0"/>
           <p:cNvGraphicFramePr>
             <a:graphicFrameLocks noGrp="1"/>
           </p:cNvGraphicFramePr>
@@ -51066,7 +53633,7 @@
             <a:pPr algn="r"/>
             <a:fld id="{F7021451-1387-4CA6-816F-3879F97B5CBC}" type="slidenum">
               <a:rPr b="0" lang="en-US"/>
-              <a:t>60</a:t>
+              <a:t>63</a:t>
             </a:fld>
             <a:endParaRPr lang="en-US"/>
           </a:p>
@@ -51080,9 +53647,9 @@
 </p:sld>
 </file>
 
-<file path=ppt/slides/slide61.xml><?xml version="1.0" encoding="utf-8"?>
+<file path=ppt/slides/slide64.xml><?xml version="1.0" encoding="utf-8"?>
 <p:sld xmlns:a="http://schemas.openxmlformats.org/drawingml/2006/main" xmlns:r="http://schemas.openxmlformats.org/officeDocument/2006/relationships" xmlns:p="http://schemas.openxmlformats.org/presentationml/2006/main">
-  <p:cSld name="Slide 61">
+  <p:cSld name="Slide 64">
     <p:spTree>
       <p:nvGrpSpPr>
         <p:cNvPr id="1" name=""/>
@@ -51568,7 +54135,7 @@
                   <a:schemeClr val="accent6"/>
                 </a:solidFill>
               </a:rPr>
-              <a:t>출처: Kohavi, Tang, Xu (2020) · 위키 05편 1장</a:t>
+              <a:t>출처: Kohavi, Tang, Xu (2020) · 위키 07편 1장</a:t>
             </a:r>
             <a:endParaRPr lang="en-US" sz="1100" dirty="0"/>
           </a:p>
@@ -51613,7 +54180,7 @@
             <a:pPr algn="r"/>
             <a:fld id="{F7021451-1387-4CA6-816F-3879F97B5CBC}" type="slidenum">
               <a:rPr b="0" lang="en-US"/>
-              <a:t>61</a:t>
+              <a:t>64</a:t>
             </a:fld>
             <a:endParaRPr lang="en-US"/>
           </a:p>
@@ -51627,9 +54194,9 @@
 </p:sld>
 </file>
 
-<file path=ppt/slides/slide62.xml><?xml version="1.0" encoding="utf-8"?>
+<file path=ppt/slides/slide65.xml><?xml version="1.0" encoding="utf-8"?>
 <p:sld xmlns:a="http://schemas.openxmlformats.org/drawingml/2006/main" xmlns:r="http://schemas.openxmlformats.org/officeDocument/2006/relationships" xmlns:p="http://schemas.openxmlformats.org/presentationml/2006/main">
-  <p:cSld name="Slide 62">
+  <p:cSld name="Slide 65">
     <p:spTree>
       <p:nvGrpSpPr>
         <p:cNvPr id="1" name=""/>
@@ -51722,7 +54289,7 @@
       </p:sp>
       <p:graphicFrame>
         <p:nvGraphicFramePr>
-          <p:cNvPr id="63" name="Table 0"/>
+          <p:cNvPr id="66" name="Table 0"/>
           <p:cNvGraphicFramePr>
             <a:graphicFrameLocks noGrp="1"/>
           </p:cNvGraphicFramePr>
@@ -52730,1874 +55297,9 @@
                   <a:schemeClr val="accent6"/>
                 </a:solidFill>
               </a:rPr>
-              <a:t>출처: Kohavi, Tang, Xu (2020) · 위키 05편 3.1</a:t>
+              <a:t>출처: Kohavi, Tang, Xu (2020) · 위키 07편 3.1</a:t>
             </a:r>
             <a:endParaRPr lang="en-US" sz="1100" dirty="0"/>
-          </a:p>
-        </p:txBody>
-      </p:sp>
-      <p:sp>
-        <p:nvSpPr>
-          <p:cNvPr id="25" name="Slide Number Placeholder 0"/>
-          <p:cNvSpPr>
-            <a:spLocks noGrp="1"/>
-          </p:cNvSpPr>
-          <p:nvPr>
-            <p:ph type="sldNum" sz="quarter" idx="4294967295"/>
-          </p:nvPr>
-        </p:nvSpPr>
-        <p:spPr>
-          <a:xfrm>
-            <a:off x="11109960" y="6355080"/>
-            <a:ext cx="457200" cy="274320"/>
-          </a:xfrm>
-          <a:prstGeom prst="rect">
-            <a:avLst/>
-          </a:prstGeom>
-          <a:extLst>
-            <a:ext uri="{C572A759-6A51-4108-AA02-DFA0A04FC94B}">
-              <ma14:wrappingTextBoxFlag xmlns:ma14="http://schemas.microsoft.com/office/mac/drawingml/2011/main" val="0"/>
-            </a:ext>
-          </a:extLst>
-        </p:spPr>
-        <p:txBody>
-          <a:bodyPr/>
-          <a:lstStyle>
-            <a:lvl1pPr>
-              <a:defRPr sz="1000">
-                <a:solidFill>
-                  <a:srgbClr val="8A90A8"/>
-                </a:solidFill>
-              </a:defRPr>
-            </a:lvl1pPr>
-          </a:lstStyle>
-          <a:p>
-            <a:pPr algn="r"/>
-            <a:fld id="{F7021451-1387-4CA6-816F-3879F97B5CBC}" type="slidenum">
-              <a:rPr b="0" lang="en-US"/>
-              <a:t>62</a:t>
-            </a:fld>
-            <a:endParaRPr lang="en-US"/>
-          </a:p>
-        </p:txBody>
-      </p:sp>
-    </p:spTree>
-  </p:cSld>
-  <p:clrMapOvr>
-    <a:masterClrMapping/>
-  </p:clrMapOvr>
-</p:sld>
-</file>
-
-<file path=ppt/slides/slide63.xml><?xml version="1.0" encoding="utf-8"?>
-<p:sld xmlns:a="http://schemas.openxmlformats.org/drawingml/2006/main" xmlns:r="http://schemas.openxmlformats.org/officeDocument/2006/relationships" xmlns:p="http://schemas.openxmlformats.org/presentationml/2006/main">
-  <p:cSld name="Slide 63">
-    <p:spTree>
-      <p:nvGrpSpPr>
-        <p:cNvPr id="1" name=""/>
-        <p:cNvGrpSpPr/>
-        <p:nvPr/>
-      </p:nvGrpSpPr>
-      <p:grpSpPr>
-        <a:xfrm>
-          <a:off x="0" y="0"/>
-          <a:ext cx="0" cy="0"/>
-          <a:chOff x="0" y="0"/>
-          <a:chExt cx="0" cy="0"/>
-        </a:xfrm>
-      </p:grpSpPr>
-      <p:sp>
-        <p:nvSpPr>
-          <p:cNvPr id="2" name="Text 0"/>
-          <p:cNvSpPr/>
-          <p:nvPr>
-            <p:ph idx="100" type="body" hasCustomPrompt="1"/>
-          </p:nvPr>
-        </p:nvSpPr>
-        <p:spPr>
-          <a:xfrm>
-            <a:off x="640080" y="411480"/>
-            <a:ext cx="7315200" cy="320040"/>
-          </a:xfrm>
-          <a:prstGeom prst="rect">
-            <a:avLst/>
-          </a:prstGeom>
-          <a:noFill/>
-          <a:ln/>
-        </p:spPr>
-        <p:txBody>
-          <a:bodyPr wrap="square" lIns="0" tIns="0" rIns="0" bIns="0" rtlCol="0" anchor="t"/>
-          <a:lstStyle/>
-          <a:p>
-            <a:pPr algn="l" indent="0" marL="0">
-              <a:buNone/>
-            </a:pPr>
-            <a:r>
-              <a:rPr lang="en-US" sz="1500" b="1" dirty="0">
-                <a:solidFill>
-                  <a:srgbClr val="3A5BFF"/>
-                </a:solidFill>
-              </a:rPr>
-              <a:t>Ch5 · 실험 문화</a:t>
-            </a:r>
-            <a:endParaRPr lang="en-US" sz="1500" dirty="0"/>
-          </a:p>
-        </p:txBody>
-      </p:sp>
-      <p:sp>
-        <p:nvSpPr>
-          <p:cNvPr id="3" name="Text 0"/>
-          <p:cNvSpPr/>
-          <p:nvPr>
-            <p:ph idx="101" type="title" hasCustomPrompt="1"/>
-          </p:nvPr>
-        </p:nvSpPr>
-        <p:spPr>
-          <a:xfrm>
-            <a:off x="640080" y="749808"/>
-            <a:ext cx="10911535" cy="777240"/>
-          </a:xfrm>
-          <a:prstGeom prst="rect">
-            <a:avLst/>
-          </a:prstGeom>
-          <a:noFill/>
-          <a:ln/>
-        </p:spPr>
-        <p:txBody>
-          <a:bodyPr wrap="square" lIns="0" tIns="0" rIns="0" bIns="0" rtlCol="0" anchor="t"/>
-          <a:lstStyle/>
-          <a:p>
-            <a:pPr algn="l" indent="0" marL="0">
-              <a:buNone/>
-            </a:pPr>
-            <a:r>
-              <a:rPr lang="en-US" sz="2000" b="1" dirty="0">
-                <a:solidFill>
-                  <a:srgbClr val="1B1F3B"/>
-                </a:solidFill>
-              </a:rPr>
-              <a:t>실험 문화를 받치는 세 가지</a:t>
-            </a:r>
-            <a:endParaRPr lang="en-US" sz="2000" dirty="0"/>
-          </a:p>
-        </p:txBody>
-      </p:sp>
-      <p:sp>
-        <p:nvSpPr>
-          <p:cNvPr id="5" name="Text 2"/>
-          <p:cNvSpPr txBox="1"/>
-          <p:nvPr/>
-        </p:nvSpPr>
-        <p:spPr>
-          <a:xfrm>
-            <a:off x="640080" y="1874520"/>
-            <a:ext cx="914400" cy="548640"/>
-          </a:xfrm>
-          <a:prstGeom prst="rect">
-            <a:avLst/>
-          </a:prstGeom>
-          <a:noFill/>
-          <a:ln/>
-        </p:spPr>
-        <p:txBody>
-          <a:bodyPr wrap="square" lIns="0" tIns="0" rIns="0" bIns="0" rtlCol="0" anchor="t"/>
-          <a:lstStyle/>
-          <a:p>
-            <a:pPr indent="0" marL="0">
-              <a:buNone/>
-            </a:pPr>
-            <a:r>
-              <a:rPr lang="en-US" sz="3000" b="1" dirty="0">
-                <a:solidFill>
-                  <a:schemeClr val="accent1"/>
-                </a:solidFill>
-              </a:rPr>
-              <a:t>01</a:t>
-            </a:r>
-            <a:endParaRPr lang="en-US" sz="3000" dirty="0"/>
-          </a:p>
-        </p:txBody>
-      </p:sp>
-      <p:sp>
-        <p:nvSpPr>
-          <p:cNvPr id="6" name="Text 3"/>
-          <p:cNvSpPr txBox="1"/>
-          <p:nvPr/>
-        </p:nvSpPr>
-        <p:spPr>
-          <a:xfrm>
-            <a:off x="640080" y="2514600"/>
-            <a:ext cx="3383280" cy="2194560"/>
-          </a:xfrm>
-          <a:prstGeom prst="rect">
-            <a:avLst/>
-          </a:prstGeom>
-          <a:noFill/>
-          <a:ln/>
-        </p:spPr>
-        <p:txBody>
-          <a:bodyPr wrap="square" lIns="0" tIns="0" rIns="0" bIns="0" rtlCol="0" anchor="t"/>
-          <a:lstStyle/>
-          <a:p>
-            <a:pPr indent="0" marL="0">
-              <a:buNone/>
-            </a:pPr>
-            <a:r>
-              <a:rPr lang="en-US" sz="2000" b="1" dirty="0">
-                <a:solidFill>
-                  <a:schemeClr val="tx1"/>
-                </a:solidFill>
-              </a:rPr>
-              <a:t>Feature Flag</a:t>
-            </a:r>
-            <a:endParaRPr lang="en-US" sz="1500" dirty="0"/>
-          </a:p>
-          <a:p>
-            <a:pPr indent="0" marL="0">
-              <a:spcAft>
-                <a:spcPts val="800"/>
-              </a:spcAft>
-              <a:buNone/>
-            </a:pPr>
-            <a:r>
-              <a:rPr lang="en-US" sz="1500" dirty="0">
-                <a:solidFill>
-                  <a:schemeClr val="tx1"/>
-                </a:solidFill>
-              </a:rPr>
-              <a:t>코드 배포와 기능 노출을 분리한다</a:t>
-            </a:r>
-            <a:endParaRPr lang="en-US" sz="1500" dirty="0"/>
-          </a:p>
-          <a:p>
-            <a:pPr indent="0" marL="0">
-              <a:buNone/>
-            </a:pPr>
-            <a:r>
-              <a:rPr lang="en-US" sz="1400" dirty="0">
-                <a:solidFill>
-                  <a:schemeClr val="tx2"/>
-                </a:solidFill>
-              </a:rPr>
-              <a:t>램프업, 즉시 롤백, 단계별 노출</a:t>
-            </a:r>
-            <a:endParaRPr lang="en-US" sz="1500" dirty="0"/>
-          </a:p>
-        </p:txBody>
-      </p:sp>
-      <p:sp>
-        <p:nvSpPr>
-          <p:cNvPr id="7" name="Shape 4"/>
-          <p:cNvSpPr/>
-          <p:nvPr/>
-        </p:nvSpPr>
-        <p:spPr>
-          <a:xfrm>
-            <a:off x="3657600" y="2176272"/>
-            <a:ext cx="502920" cy="0"/>
-          </a:xfrm>
-          <a:prstGeom prst="line">
-            <a:avLst/>
-          </a:prstGeom>
-          <a:noFill/>
-          <a:ln w="19050">
-            <a:solidFill>
-              <a:srgbClr val="8A90A8"/>
-            </a:solidFill>
-            <a:prstDash val="solid"/>
-            <a:tailEnd type="triangle"/>
-          </a:ln>
-        </p:spPr>
-      </p:sp>
-      <p:sp>
-        <p:nvSpPr>
-          <p:cNvPr id="8" name="Text 5"/>
-          <p:cNvSpPr txBox="1"/>
-          <p:nvPr/>
-        </p:nvSpPr>
-        <p:spPr>
-          <a:xfrm>
-            <a:off x="4343400" y="1874520"/>
-            <a:ext cx="914400" cy="548640"/>
-          </a:xfrm>
-          <a:prstGeom prst="rect">
-            <a:avLst/>
-          </a:prstGeom>
-          <a:noFill/>
-          <a:ln/>
-        </p:spPr>
-        <p:txBody>
-          <a:bodyPr wrap="square" lIns="0" tIns="0" rIns="0" bIns="0" rtlCol="0" anchor="t"/>
-          <a:lstStyle/>
-          <a:p>
-            <a:pPr indent="0" marL="0">
-              <a:buNone/>
-            </a:pPr>
-            <a:r>
-              <a:rPr lang="en-US" sz="3000" b="1" dirty="0">
-                <a:solidFill>
-                  <a:schemeClr val="accent1"/>
-                </a:solidFill>
-              </a:rPr>
-              <a:t>02</a:t>
-            </a:r>
-            <a:endParaRPr lang="en-US" sz="3000" dirty="0"/>
-          </a:p>
-        </p:txBody>
-      </p:sp>
-      <p:sp>
-        <p:nvSpPr>
-          <p:cNvPr id="9" name="Text 6"/>
-          <p:cNvSpPr txBox="1"/>
-          <p:nvPr/>
-        </p:nvSpPr>
-        <p:spPr>
-          <a:xfrm>
-            <a:off x="4343400" y="2514600"/>
-            <a:ext cx="3383280" cy="2194560"/>
-          </a:xfrm>
-          <a:prstGeom prst="rect">
-            <a:avLst/>
-          </a:prstGeom>
-          <a:noFill/>
-          <a:ln/>
-        </p:spPr>
-        <p:txBody>
-          <a:bodyPr wrap="square" lIns="0" tIns="0" rIns="0" bIns="0" rtlCol="0" anchor="t"/>
-          <a:lstStyle/>
-          <a:p>
-            <a:pPr indent="0" marL="0">
-              <a:buNone/>
-            </a:pPr>
-            <a:r>
-              <a:rPr lang="en-US" sz="2000" b="1" dirty="0">
-                <a:solidFill>
-                  <a:schemeClr val="tx1"/>
-                </a:solidFill>
-              </a:rPr>
-              <a:t>Experimentation Platform</a:t>
-            </a:r>
-            <a:endParaRPr lang="en-US" sz="1500" dirty="0"/>
-          </a:p>
-          <a:p>
-            <a:pPr indent="0" marL="0">
-              <a:spcAft>
-                <a:spcPts val="800"/>
-              </a:spcAft>
-              <a:buNone/>
-            </a:pPr>
-            <a:r>
-              <a:rPr lang="en-US" sz="1500" dirty="0">
-                <a:solidFill>
-                  <a:schemeClr val="tx1"/>
-                </a:solidFill>
-              </a:rPr>
-              <a:t>배정·로깅·분석을 자동화한다</a:t>
-            </a:r>
-            <a:endParaRPr lang="en-US" sz="1500" dirty="0"/>
-          </a:p>
-          <a:p>
-            <a:pPr indent="0" marL="0">
-              <a:buNone/>
-            </a:pPr>
-            <a:r>
-              <a:rPr lang="en-US" sz="1400" dirty="0">
-                <a:solidFill>
-                  <a:schemeClr val="tx2"/>
-                </a:solidFill>
-              </a:rPr>
-              <a:t>실험 한 번의 비용이 낮아진다. Bing의 아이디어도 이 덕분에 쉽게 시험할 수 있었다</a:t>
-            </a:r>
-            <a:endParaRPr lang="en-US" sz="1500" dirty="0"/>
-          </a:p>
-        </p:txBody>
-      </p:sp>
-      <p:sp>
-        <p:nvSpPr>
-          <p:cNvPr id="10" name="Shape 7"/>
-          <p:cNvSpPr/>
-          <p:nvPr/>
-        </p:nvSpPr>
-        <p:spPr>
-          <a:xfrm>
-            <a:off x="7360920" y="2176272"/>
-            <a:ext cx="502920" cy="0"/>
-          </a:xfrm>
-          <a:prstGeom prst="line">
-            <a:avLst/>
-          </a:prstGeom>
-          <a:noFill/>
-          <a:ln w="19050">
-            <a:solidFill>
-              <a:srgbClr val="8A90A8"/>
-            </a:solidFill>
-            <a:prstDash val="solid"/>
-            <a:tailEnd type="triangle"/>
-          </a:ln>
-        </p:spPr>
-      </p:sp>
-      <p:sp>
-        <p:nvSpPr>
-          <p:cNvPr id="11" name="Text 8"/>
-          <p:cNvSpPr txBox="1"/>
-          <p:nvPr/>
-        </p:nvSpPr>
-        <p:spPr>
-          <a:xfrm>
-            <a:off x="8046720" y="1874520"/>
-            <a:ext cx="914400" cy="548640"/>
-          </a:xfrm>
-          <a:prstGeom prst="rect">
-            <a:avLst/>
-          </a:prstGeom>
-          <a:noFill/>
-          <a:ln/>
-        </p:spPr>
-        <p:txBody>
-          <a:bodyPr wrap="square" lIns="0" tIns="0" rIns="0" bIns="0" rtlCol="0" anchor="t"/>
-          <a:lstStyle/>
-          <a:p>
-            <a:pPr indent="0" marL="0">
-              <a:buNone/>
-            </a:pPr>
-            <a:r>
-              <a:rPr lang="en-US" sz="3000" b="1" dirty="0">
-                <a:solidFill>
-                  <a:schemeClr val="accent1"/>
-                </a:solidFill>
-              </a:rPr>
-              <a:t>03</a:t>
-            </a:r>
-            <a:endParaRPr lang="en-US" sz="3000" dirty="0"/>
-          </a:p>
-        </p:txBody>
-      </p:sp>
-      <p:sp>
-        <p:nvSpPr>
-          <p:cNvPr id="12" name="Text 9"/>
-          <p:cNvSpPr txBox="1"/>
-          <p:nvPr/>
-        </p:nvSpPr>
-        <p:spPr>
-          <a:xfrm>
-            <a:off x="8046720" y="2514600"/>
-            <a:ext cx="3383280" cy="2194560"/>
-          </a:xfrm>
-          <a:prstGeom prst="rect">
-            <a:avLst/>
-          </a:prstGeom>
-          <a:noFill/>
-          <a:ln/>
-        </p:spPr>
-        <p:txBody>
-          <a:bodyPr wrap="square" lIns="0" tIns="0" rIns="0" bIns="0" rtlCol="0" anchor="t"/>
-          <a:lstStyle/>
-          <a:p>
-            <a:pPr indent="0" marL="0">
-              <a:buNone/>
-            </a:pPr>
-            <a:r>
-              <a:rPr lang="en-US" sz="2000" b="1" dirty="0">
-                <a:solidFill>
-                  <a:schemeClr val="tx1"/>
-                </a:solidFill>
-              </a:rPr>
-              <a:t>Democratization</a:t>
-            </a:r>
-            <a:endParaRPr lang="en-US" sz="1500" dirty="0"/>
-          </a:p>
-          <a:p>
-            <a:pPr indent="0" marL="0">
-              <a:spcAft>
-                <a:spcPts val="800"/>
-              </a:spcAft>
-              <a:buNone/>
-            </a:pPr>
-            <a:r>
-              <a:rPr lang="en-US" sz="1500" dirty="0">
-                <a:solidFill>
-                  <a:schemeClr val="tx1"/>
-                </a:solidFill>
-              </a:rPr>
-              <a:t>누구나 가설을 실험으로 옮긴다</a:t>
-            </a:r>
-            <a:endParaRPr lang="en-US" sz="1500" dirty="0"/>
-          </a:p>
-          <a:p>
-            <a:pPr indent="0" marL="0">
-              <a:buNone/>
-            </a:pPr>
-            <a:r>
-              <a:rPr lang="en-US" sz="1400" dirty="0">
-                <a:solidFill>
-                  <a:schemeClr val="tx2"/>
-                </a:solidFill>
-              </a:rPr>
-              <a:t>대신 가드레일, SRM 자동 검사, 실험 리뷰로 품질을 지킨다</a:t>
-            </a:r>
-            <a:endParaRPr lang="en-US" sz="1500" dirty="0"/>
-          </a:p>
-        </p:txBody>
-      </p:sp>
-      <p:sp>
-        <p:nvSpPr>
-          <p:cNvPr id="25" name="Slide Number Placeholder 0"/>
-          <p:cNvSpPr>
-            <a:spLocks noGrp="1"/>
-          </p:cNvSpPr>
-          <p:nvPr>
-            <p:ph type="sldNum" sz="quarter" idx="4294967295"/>
-          </p:nvPr>
-        </p:nvSpPr>
-        <p:spPr>
-          <a:xfrm>
-            <a:off x="11109960" y="6355080"/>
-            <a:ext cx="457200" cy="274320"/>
-          </a:xfrm>
-          <a:prstGeom prst="rect">
-            <a:avLst/>
-          </a:prstGeom>
-          <a:extLst>
-            <a:ext uri="{C572A759-6A51-4108-AA02-DFA0A04FC94B}">
-              <ma14:wrappingTextBoxFlag xmlns:ma14="http://schemas.microsoft.com/office/mac/drawingml/2011/main" val="0"/>
-            </a:ext>
-          </a:extLst>
-        </p:spPr>
-        <p:txBody>
-          <a:bodyPr/>
-          <a:lstStyle>
-            <a:lvl1pPr>
-              <a:defRPr sz="1000">
-                <a:solidFill>
-                  <a:srgbClr val="8A90A8"/>
-                </a:solidFill>
-              </a:defRPr>
-            </a:lvl1pPr>
-          </a:lstStyle>
-          <a:p>
-            <a:pPr algn="r"/>
-            <a:fld id="{F7021451-1387-4CA6-816F-3879F97B5CBC}" type="slidenum">
-              <a:rPr b="0" lang="en-US"/>
-              <a:t>63</a:t>
-            </a:fld>
-            <a:endParaRPr lang="en-US"/>
-          </a:p>
-        </p:txBody>
-      </p:sp>
-    </p:spTree>
-  </p:cSld>
-  <p:clrMapOvr>
-    <a:masterClrMapping/>
-  </p:clrMapOvr>
-</p:sld>
-</file>
-
-<file path=ppt/slides/slide64.xml><?xml version="1.0" encoding="utf-8"?>
-<p:sld xmlns:a="http://schemas.openxmlformats.org/drawingml/2006/main" xmlns:r="http://schemas.openxmlformats.org/officeDocument/2006/relationships" xmlns:p="http://schemas.openxmlformats.org/presentationml/2006/main">
-  <p:cSld name="Slide 64">
-    <p:spTree>
-      <p:nvGrpSpPr>
-        <p:cNvPr id="1" name=""/>
-        <p:cNvGrpSpPr/>
-        <p:nvPr/>
-      </p:nvGrpSpPr>
-      <p:grpSpPr>
-        <a:xfrm>
-          <a:off x="0" y="0"/>
-          <a:ext cx="0" cy="0"/>
-          <a:chOff x="0" y="0"/>
-          <a:chExt cx="0" cy="0"/>
-        </a:xfrm>
-      </p:grpSpPr>
-      <p:sp>
-        <p:nvSpPr>
-          <p:cNvPr id="2" name="Text 0"/>
-          <p:cNvSpPr/>
-          <p:nvPr>
-            <p:ph idx="100" type="body" hasCustomPrompt="1"/>
-          </p:nvPr>
-        </p:nvSpPr>
-        <p:spPr>
-          <a:xfrm>
-            <a:off x="640080" y="411480"/>
-            <a:ext cx="7315200" cy="320040"/>
-          </a:xfrm>
-          <a:prstGeom prst="rect">
-            <a:avLst/>
-          </a:prstGeom>
-          <a:noFill/>
-          <a:ln/>
-        </p:spPr>
-        <p:txBody>
-          <a:bodyPr wrap="square" lIns="0" tIns="0" rIns="0" bIns="0" rtlCol="0" anchor="t"/>
-          <a:lstStyle/>
-          <a:p>
-            <a:pPr algn="l" indent="0" marL="0">
-              <a:buNone/>
-            </a:pPr>
-            <a:r>
-              <a:rPr lang="en-US" sz="1500" b="1" dirty="0">
-                <a:solidFill>
-                  <a:srgbClr val="3A5BFF"/>
-                </a:solidFill>
-              </a:rPr>
-              <a:t>Ch5 · 의사결정</a:t>
-            </a:r>
-            <a:endParaRPr lang="en-US" sz="1500" dirty="0"/>
-          </a:p>
-        </p:txBody>
-      </p:sp>
-      <p:sp>
-        <p:nvSpPr>
-          <p:cNvPr id="3" name="Text 0"/>
-          <p:cNvSpPr/>
-          <p:nvPr>
-            <p:ph idx="101" type="title" hasCustomPrompt="1"/>
-          </p:nvPr>
-        </p:nvSpPr>
-        <p:spPr>
-          <a:xfrm>
-            <a:off x="640080" y="749808"/>
-            <a:ext cx="10911535" cy="777240"/>
-          </a:xfrm>
-          <a:prstGeom prst="rect">
-            <a:avLst/>
-          </a:prstGeom>
-          <a:noFill/>
-          <a:ln/>
-        </p:spPr>
-        <p:txBody>
-          <a:bodyPr wrap="square" lIns="0" tIns="0" rIns="0" bIns="0" rtlCol="0" anchor="t"/>
-          <a:lstStyle/>
-          <a:p>
-            <a:pPr algn="l" indent="0" marL="0">
-              <a:buNone/>
-            </a:pPr>
-            <a:r>
-              <a:rPr lang="en-US" sz="2000" b="1" dirty="0">
-                <a:solidFill>
-                  <a:srgbClr val="1B1F3B"/>
-                </a:solidFill>
-              </a:rPr>
-              <a:t>'유의하다'에서 멈추지 말고 결정으로 닫는다</a:t>
-            </a:r>
-            <a:endParaRPr lang="en-US" sz="2000" dirty="0"/>
-          </a:p>
-        </p:txBody>
-      </p:sp>
-      <p:sp>
-        <p:nvSpPr>
-          <p:cNvPr id="5" name="Text 2"/>
-          <p:cNvSpPr txBox="1"/>
-          <p:nvPr/>
-        </p:nvSpPr>
-        <p:spPr>
-          <a:xfrm>
-            <a:off x="640080" y="1828800"/>
-            <a:ext cx="457200" cy="457200"/>
-          </a:xfrm>
-          <a:prstGeom prst="rect">
-            <a:avLst/>
-          </a:prstGeom>
-          <a:noFill/>
-          <a:ln/>
-        </p:spPr>
-        <p:txBody>
-          <a:bodyPr wrap="square" lIns="0" tIns="0" rIns="0" bIns="0" rtlCol="0" anchor="t"/>
-          <a:lstStyle/>
-          <a:p>
-            <a:pPr indent="0" marL="0">
-              <a:buNone/>
-            </a:pPr>
-            <a:r>
-              <a:rPr lang="en-US" sz="2000" b="1" dirty="0">
-                <a:solidFill>
-                  <a:schemeClr val="accent6"/>
-                </a:solidFill>
-              </a:rPr>
-              <a:t>1</a:t>
-            </a:r>
-            <a:endParaRPr lang="en-US" sz="2000" dirty="0"/>
-          </a:p>
-        </p:txBody>
-      </p:sp>
-      <p:sp>
-        <p:nvSpPr>
-          <p:cNvPr id="6" name="Text 3"/>
-          <p:cNvSpPr txBox="1"/>
-          <p:nvPr/>
-        </p:nvSpPr>
-        <p:spPr>
-          <a:xfrm>
-            <a:off x="1188720" y="1856232"/>
-            <a:ext cx="5120640" cy="731520"/>
-          </a:xfrm>
-          <a:prstGeom prst="rect">
-            <a:avLst/>
-          </a:prstGeom>
-          <a:noFill/>
-          <a:ln/>
-        </p:spPr>
-        <p:txBody>
-          <a:bodyPr wrap="square" lIns="0" tIns="0" rIns="0" bIns="0" rtlCol="0" anchor="t"/>
-          <a:lstStyle/>
-          <a:p>
-            <a:pPr indent="0" marL="0">
-              <a:buNone/>
-            </a:pPr>
-            <a:r>
-              <a:rPr lang="en-US" sz="2000" dirty="0">
-                <a:solidFill>
-                  <a:schemeClr val="tx1"/>
-                </a:solidFill>
-              </a:rPr>
-              <a:t>SRM이나 가드레일에 이상이 있다</a:t>
-            </a:r>
-            <a:endParaRPr lang="en-US" sz="2000" dirty="0"/>
-          </a:p>
-        </p:txBody>
-      </p:sp>
-      <p:sp>
-        <p:nvSpPr>
-          <p:cNvPr id="7" name="Shape 4"/>
-          <p:cNvSpPr/>
-          <p:nvPr/>
-        </p:nvSpPr>
-        <p:spPr>
-          <a:xfrm>
-            <a:off x="5943600" y="2029968"/>
-            <a:ext cx="548640" cy="0"/>
-          </a:xfrm>
-          <a:prstGeom prst="line">
-            <a:avLst/>
-          </a:prstGeom>
-          <a:noFill/>
-          <a:ln w="19050">
-            <a:solidFill>
-              <a:srgbClr val="8A90A8"/>
-            </a:solidFill>
-            <a:prstDash val="solid"/>
-            <a:tailEnd type="triangle"/>
-          </a:ln>
-        </p:spPr>
-      </p:sp>
-      <p:sp>
-        <p:nvSpPr>
-          <p:cNvPr id="8" name="Text 5"/>
-          <p:cNvSpPr txBox="1"/>
-          <p:nvPr/>
-        </p:nvSpPr>
-        <p:spPr>
-          <a:xfrm>
-            <a:off x="6675120" y="1810512"/>
-            <a:ext cx="1737360" cy="548640"/>
-          </a:xfrm>
-          <a:prstGeom prst="rect">
-            <a:avLst/>
-          </a:prstGeom>
-          <a:noFill/>
-          <a:ln/>
-        </p:spPr>
-        <p:txBody>
-          <a:bodyPr wrap="square" lIns="0" tIns="0" rIns="0" bIns="0" rtlCol="0" anchor="t"/>
-          <a:lstStyle/>
-          <a:p>
-            <a:pPr indent="0" marL="0">
-              <a:buNone/>
-            </a:pPr>
-            <a:r>
-              <a:rPr lang="en-US" sz="2000" b="1" dirty="0">
-                <a:solidFill>
-                  <a:srgbClr val="D93B41"/>
-                </a:solidFill>
-              </a:rPr>
-              <a:t>중단</a:t>
-            </a:r>
-            <a:endParaRPr lang="en-US" sz="2000" dirty="0"/>
-          </a:p>
-        </p:txBody>
-      </p:sp>
-      <p:sp>
-        <p:nvSpPr>
-          <p:cNvPr id="9" name="Text 6"/>
-          <p:cNvSpPr txBox="1"/>
-          <p:nvPr/>
-        </p:nvSpPr>
-        <p:spPr>
-          <a:xfrm>
-            <a:off x="8412480" y="1856232"/>
-            <a:ext cx="3154680" cy="731520"/>
-          </a:xfrm>
-          <a:prstGeom prst="rect">
-            <a:avLst/>
-          </a:prstGeom>
-          <a:noFill/>
-          <a:ln/>
-        </p:spPr>
-        <p:txBody>
-          <a:bodyPr wrap="square" lIns="0" tIns="0" rIns="0" bIns="0" rtlCol="0" anchor="t"/>
-          <a:lstStyle/>
-          <a:p>
-            <a:pPr indent="0" marL="0">
-              <a:buNone/>
-            </a:pPr>
-            <a:r>
-              <a:rPr lang="en-US" sz="1400" dirty="0">
-                <a:solidFill>
-                  <a:schemeClr val="tx2"/>
-                </a:solidFill>
-              </a:rPr>
-              <a:t>결과 해석을 멈추고 원인을 고친 뒤 다시 돌린다</a:t>
-            </a:r>
-            <a:endParaRPr lang="en-US" sz="1400" dirty="0"/>
-          </a:p>
-        </p:txBody>
-      </p:sp>
-      <p:sp>
-        <p:nvSpPr>
-          <p:cNvPr id="10" name="Text 7"/>
-          <p:cNvSpPr txBox="1"/>
-          <p:nvPr/>
-        </p:nvSpPr>
-        <p:spPr>
-          <a:xfrm>
-            <a:off x="640080" y="2743200"/>
-            <a:ext cx="457200" cy="457200"/>
-          </a:xfrm>
-          <a:prstGeom prst="rect">
-            <a:avLst/>
-          </a:prstGeom>
-          <a:noFill/>
-          <a:ln/>
-        </p:spPr>
-        <p:txBody>
-          <a:bodyPr wrap="square" lIns="0" tIns="0" rIns="0" bIns="0" rtlCol="0" anchor="t"/>
-          <a:lstStyle/>
-          <a:p>
-            <a:pPr indent="0" marL="0">
-              <a:buNone/>
-            </a:pPr>
-            <a:r>
-              <a:rPr lang="en-US" sz="2000" b="1" dirty="0">
-                <a:solidFill>
-                  <a:schemeClr val="accent6"/>
-                </a:solidFill>
-              </a:rPr>
-              <a:t>2</a:t>
-            </a:r>
-            <a:endParaRPr lang="en-US" sz="2000" dirty="0"/>
-          </a:p>
-        </p:txBody>
-      </p:sp>
-      <p:sp>
-        <p:nvSpPr>
-          <p:cNvPr id="11" name="Text 8"/>
-          <p:cNvSpPr txBox="1"/>
-          <p:nvPr/>
-        </p:nvSpPr>
-        <p:spPr>
-          <a:xfrm>
-            <a:off x="1188720" y="2770632"/>
-            <a:ext cx="5120640" cy="731520"/>
-          </a:xfrm>
-          <a:prstGeom prst="rect">
-            <a:avLst/>
-          </a:prstGeom>
-          <a:noFill/>
-          <a:ln/>
-        </p:spPr>
-        <p:txBody>
-          <a:bodyPr wrap="square" lIns="0" tIns="0" rIns="0" bIns="0" rtlCol="0" anchor="t"/>
-          <a:lstStyle/>
-          <a:p>
-            <a:pPr indent="0" marL="0">
-              <a:buNone/>
-            </a:pPr>
-            <a:r>
-              <a:rPr lang="en-US" sz="2000" dirty="0">
-                <a:solidFill>
-                  <a:schemeClr val="tx1"/>
-                </a:solidFill>
-              </a:rPr>
-              <a:t>신뢰구간 전체가 0보다 위, 크기도 의미 있다</a:t>
-            </a:r>
-            <a:endParaRPr lang="en-US" sz="2000" dirty="0"/>
-          </a:p>
-        </p:txBody>
-      </p:sp>
-      <p:sp>
-        <p:nvSpPr>
-          <p:cNvPr id="12" name="Shape 9"/>
-          <p:cNvSpPr/>
-          <p:nvPr/>
-        </p:nvSpPr>
-        <p:spPr>
-          <a:xfrm>
-            <a:off x="5943600" y="2944368"/>
-            <a:ext cx="548640" cy="0"/>
-          </a:xfrm>
-          <a:prstGeom prst="line">
-            <a:avLst/>
-          </a:prstGeom>
-          <a:noFill/>
-          <a:ln w="19050">
-            <a:solidFill>
-              <a:srgbClr val="8A90A8"/>
-            </a:solidFill>
-            <a:prstDash val="solid"/>
-            <a:tailEnd type="triangle"/>
-          </a:ln>
-        </p:spPr>
-      </p:sp>
-      <p:sp>
-        <p:nvSpPr>
-          <p:cNvPr id="13" name="Text 10"/>
-          <p:cNvSpPr txBox="1"/>
-          <p:nvPr/>
-        </p:nvSpPr>
-        <p:spPr>
-          <a:xfrm>
-            <a:off x="6675120" y="2724912"/>
-            <a:ext cx="1737360" cy="548640"/>
-          </a:xfrm>
-          <a:prstGeom prst="rect">
-            <a:avLst/>
-          </a:prstGeom>
-          <a:noFill/>
-          <a:ln/>
-        </p:spPr>
-        <p:txBody>
-          <a:bodyPr wrap="square" lIns="0" tIns="0" rIns="0" bIns="0" rtlCol="0" anchor="t"/>
-          <a:lstStyle/>
-          <a:p>
-            <a:pPr indent="0" marL="0">
-              <a:buNone/>
-            </a:pPr>
-            <a:r>
-              <a:rPr lang="en-US" sz="2000" b="1" dirty="0">
-                <a:solidFill>
-                  <a:srgbClr val="0F9D63"/>
-                </a:solidFill>
-              </a:rPr>
-              <a:t>배포한다</a:t>
-            </a:r>
-            <a:endParaRPr lang="en-US" sz="2000" dirty="0"/>
-          </a:p>
-        </p:txBody>
-      </p:sp>
-      <p:sp>
-        <p:nvSpPr>
-          <p:cNvPr id="14" name="Text 11"/>
-          <p:cNvSpPr txBox="1"/>
-          <p:nvPr/>
-        </p:nvSpPr>
-        <p:spPr>
-          <a:xfrm>
-            <a:off x="8412480" y="2770632"/>
-            <a:ext cx="3154680" cy="731520"/>
-          </a:xfrm>
-          <a:prstGeom prst="rect">
-            <a:avLst/>
-          </a:prstGeom>
-          <a:noFill/>
-          <a:ln/>
-        </p:spPr>
-        <p:txBody>
-          <a:bodyPr wrap="square" lIns="0" tIns="0" rIns="0" bIns="0" rtlCol="0" anchor="t"/>
-          <a:lstStyle/>
-          <a:p>
-            <a:pPr indent="0" marL="0">
-              <a:buNone/>
-            </a:pPr>
-            <a:r>
-              <a:rPr lang="en-US" sz="1400" dirty="0">
-                <a:solidFill>
-                  <a:schemeClr val="tx2"/>
-                </a:solidFill>
-              </a:rPr>
-              <a:t>비용·리스크를 확인하고 단계적으로 출시</a:t>
-            </a:r>
-            <a:endParaRPr lang="en-US" sz="1400" dirty="0"/>
-          </a:p>
-        </p:txBody>
-      </p:sp>
-      <p:sp>
-        <p:nvSpPr>
-          <p:cNvPr id="15" name="Text 12"/>
-          <p:cNvSpPr txBox="1"/>
-          <p:nvPr/>
-        </p:nvSpPr>
-        <p:spPr>
-          <a:xfrm>
-            <a:off x="640080" y="3657600"/>
-            <a:ext cx="457200" cy="457200"/>
-          </a:xfrm>
-          <a:prstGeom prst="rect">
-            <a:avLst/>
-          </a:prstGeom>
-          <a:noFill/>
-          <a:ln/>
-        </p:spPr>
-        <p:txBody>
-          <a:bodyPr wrap="square" lIns="0" tIns="0" rIns="0" bIns="0" rtlCol="0" anchor="t"/>
-          <a:lstStyle/>
-          <a:p>
-            <a:pPr indent="0" marL="0">
-              <a:buNone/>
-            </a:pPr>
-            <a:r>
-              <a:rPr lang="en-US" sz="2000" b="1" dirty="0">
-                <a:solidFill>
-                  <a:schemeClr val="accent6"/>
-                </a:solidFill>
-              </a:rPr>
-              <a:t>3</a:t>
-            </a:r>
-            <a:endParaRPr lang="en-US" sz="2000" dirty="0"/>
-          </a:p>
-        </p:txBody>
-      </p:sp>
-      <p:sp>
-        <p:nvSpPr>
-          <p:cNvPr id="16" name="Text 13"/>
-          <p:cNvSpPr txBox="1"/>
-          <p:nvPr/>
-        </p:nvSpPr>
-        <p:spPr>
-          <a:xfrm>
-            <a:off x="1188720" y="3685032"/>
-            <a:ext cx="5120640" cy="731520"/>
-          </a:xfrm>
-          <a:prstGeom prst="rect">
-            <a:avLst/>
-          </a:prstGeom>
-          <a:noFill/>
-          <a:ln/>
-        </p:spPr>
-        <p:txBody>
-          <a:bodyPr wrap="square" lIns="0" tIns="0" rIns="0" bIns="0" rtlCol="0" anchor="t"/>
-          <a:lstStyle/>
-          <a:p>
-            <a:pPr indent="0" marL="0">
-              <a:buNone/>
-            </a:pPr>
-            <a:r>
-              <a:rPr lang="en-US" sz="2000" dirty="0">
-                <a:solidFill>
-                  <a:schemeClr val="tx1"/>
-                </a:solidFill>
-              </a:rPr>
-              <a:t>구간이 0을 포함하지만 좁다</a:t>
-            </a:r>
-            <a:endParaRPr lang="en-US" sz="2000" dirty="0"/>
-          </a:p>
-        </p:txBody>
-      </p:sp>
-      <p:sp>
-        <p:nvSpPr>
-          <p:cNvPr id="17" name="Shape 14"/>
-          <p:cNvSpPr/>
-          <p:nvPr/>
-        </p:nvSpPr>
-        <p:spPr>
-          <a:xfrm>
-            <a:off x="5943600" y="3858768"/>
-            <a:ext cx="548640" cy="0"/>
-          </a:xfrm>
-          <a:prstGeom prst="line">
-            <a:avLst/>
-          </a:prstGeom>
-          <a:noFill/>
-          <a:ln w="19050">
-            <a:solidFill>
-              <a:srgbClr val="8A90A8"/>
-            </a:solidFill>
-            <a:prstDash val="solid"/>
-            <a:tailEnd type="triangle"/>
-          </a:ln>
-        </p:spPr>
-      </p:sp>
-      <p:sp>
-        <p:nvSpPr>
-          <p:cNvPr id="18" name="Text 15"/>
-          <p:cNvSpPr txBox="1"/>
-          <p:nvPr/>
-        </p:nvSpPr>
-        <p:spPr>
-          <a:xfrm>
-            <a:off x="6675120" y="3639312"/>
-            <a:ext cx="1737360" cy="548640"/>
-          </a:xfrm>
-          <a:prstGeom prst="rect">
-            <a:avLst/>
-          </a:prstGeom>
-          <a:noFill/>
-          <a:ln/>
-        </p:spPr>
-        <p:txBody>
-          <a:bodyPr wrap="square" lIns="0" tIns="0" rIns="0" bIns="0" rtlCol="0" anchor="t"/>
-          <a:lstStyle/>
-          <a:p>
-            <a:pPr indent="0" marL="0">
-              <a:buNone/>
-            </a:pPr>
-            <a:r>
-              <a:rPr lang="en-US" sz="2000" b="1" dirty="0">
-                <a:solidFill>
-                  <a:srgbClr val="8A90A8"/>
-                </a:solidFill>
-              </a:rPr>
-              <a:t>안 한다</a:t>
-            </a:r>
-            <a:endParaRPr lang="en-US" sz="2000" dirty="0"/>
-          </a:p>
-        </p:txBody>
-      </p:sp>
-      <p:sp>
-        <p:nvSpPr>
-          <p:cNvPr id="19" name="Text 16"/>
-          <p:cNvSpPr txBox="1"/>
-          <p:nvPr/>
-        </p:nvSpPr>
-        <p:spPr>
-          <a:xfrm>
-            <a:off x="8412480" y="3685032"/>
-            <a:ext cx="3154680" cy="731520"/>
-          </a:xfrm>
-          <a:prstGeom prst="rect">
-            <a:avLst/>
-          </a:prstGeom>
-          <a:noFill/>
-          <a:ln/>
-        </p:spPr>
-        <p:txBody>
-          <a:bodyPr wrap="square" lIns="0" tIns="0" rIns="0" bIns="0" rtlCol="0" anchor="t"/>
-          <a:lstStyle/>
-          <a:p>
-            <a:pPr indent="0" marL="0">
-              <a:buNone/>
-            </a:pPr>
-            <a:r>
-              <a:rPr lang="en-US" sz="1400" dirty="0">
-                <a:solidFill>
-                  <a:schemeClr val="tx2"/>
-                </a:solidFill>
-              </a:rPr>
-              <a:t>효과가 있어도 MDE보다 작다. 아이디어를 접는다</a:t>
-            </a:r>
-            <a:endParaRPr lang="en-US" sz="1400" dirty="0"/>
-          </a:p>
-        </p:txBody>
-      </p:sp>
-      <p:sp>
-        <p:nvSpPr>
-          <p:cNvPr id="20" name="Text 17"/>
-          <p:cNvSpPr txBox="1"/>
-          <p:nvPr/>
-        </p:nvSpPr>
-        <p:spPr>
-          <a:xfrm>
-            <a:off x="640080" y="4572000"/>
-            <a:ext cx="457200" cy="457200"/>
-          </a:xfrm>
-          <a:prstGeom prst="rect">
-            <a:avLst/>
-          </a:prstGeom>
-          <a:noFill/>
-          <a:ln/>
-        </p:spPr>
-        <p:txBody>
-          <a:bodyPr wrap="square" lIns="0" tIns="0" rIns="0" bIns="0" rtlCol="0" anchor="t"/>
-          <a:lstStyle/>
-          <a:p>
-            <a:pPr indent="0" marL="0">
-              <a:buNone/>
-            </a:pPr>
-            <a:r>
-              <a:rPr lang="en-US" sz="2000" b="1" dirty="0">
-                <a:solidFill>
-                  <a:schemeClr val="accent6"/>
-                </a:solidFill>
-              </a:rPr>
-              <a:t>4</a:t>
-            </a:r>
-            <a:endParaRPr lang="en-US" sz="2000" dirty="0"/>
-          </a:p>
-        </p:txBody>
-      </p:sp>
-      <p:sp>
-        <p:nvSpPr>
-          <p:cNvPr id="21" name="Text 18"/>
-          <p:cNvSpPr txBox="1"/>
-          <p:nvPr/>
-        </p:nvSpPr>
-        <p:spPr>
-          <a:xfrm>
-            <a:off x="1188720" y="4599432"/>
-            <a:ext cx="5120640" cy="731520"/>
-          </a:xfrm>
-          <a:prstGeom prst="rect">
-            <a:avLst/>
-          </a:prstGeom>
-          <a:noFill/>
-          <a:ln/>
-        </p:spPr>
-        <p:txBody>
-          <a:bodyPr wrap="square" lIns="0" tIns="0" rIns="0" bIns="0" rtlCol="0" anchor="t"/>
-          <a:lstStyle/>
-          <a:p>
-            <a:pPr indent="0" marL="0">
-              <a:buNone/>
-            </a:pPr>
-            <a:r>
-              <a:rPr lang="en-US" sz="2000" dirty="0">
-                <a:solidFill>
-                  <a:schemeClr val="tx1"/>
-                </a:solidFill>
-              </a:rPr>
-              <a:t>구간이 0을 포함하고 넓다</a:t>
-            </a:r>
-            <a:endParaRPr lang="en-US" sz="2000" dirty="0"/>
-          </a:p>
-        </p:txBody>
-      </p:sp>
-      <p:sp>
-        <p:nvSpPr>
-          <p:cNvPr id="22" name="Shape 19"/>
-          <p:cNvSpPr/>
-          <p:nvPr/>
-        </p:nvSpPr>
-        <p:spPr>
-          <a:xfrm>
-            <a:off x="5943600" y="4773168"/>
-            <a:ext cx="548640" cy="0"/>
-          </a:xfrm>
-          <a:prstGeom prst="line">
-            <a:avLst/>
-          </a:prstGeom>
-          <a:noFill/>
-          <a:ln w="19050">
-            <a:solidFill>
-              <a:srgbClr val="8A90A8"/>
-            </a:solidFill>
-            <a:prstDash val="solid"/>
-            <a:tailEnd type="triangle"/>
-          </a:ln>
-        </p:spPr>
-      </p:sp>
-      <p:sp>
-        <p:nvSpPr>
-          <p:cNvPr id="23" name="Text 20"/>
-          <p:cNvSpPr txBox="1"/>
-          <p:nvPr/>
-        </p:nvSpPr>
-        <p:spPr>
-          <a:xfrm>
-            <a:off x="6675120" y="4553712"/>
-            <a:ext cx="1737360" cy="548640"/>
-          </a:xfrm>
-          <a:prstGeom prst="rect">
-            <a:avLst/>
-          </a:prstGeom>
-          <a:noFill/>
-          <a:ln/>
-        </p:spPr>
-        <p:txBody>
-          <a:bodyPr wrap="square" lIns="0" tIns="0" rIns="0" bIns="0" rtlCol="0" anchor="t"/>
-          <a:lstStyle/>
-          <a:p>
-            <a:pPr indent="0" marL="0">
-              <a:buNone/>
-            </a:pPr>
-            <a:r>
-              <a:rPr lang="en-US" sz="2000" b="1" dirty="0">
-                <a:solidFill>
-                  <a:srgbClr val="B87700"/>
-                </a:solidFill>
-              </a:rPr>
-              <a:t>재실험한다</a:t>
-            </a:r>
-            <a:endParaRPr lang="en-US" sz="2000" dirty="0"/>
-          </a:p>
-        </p:txBody>
-      </p:sp>
-      <p:sp>
-        <p:nvSpPr>
-          <p:cNvPr id="24" name="Text 21"/>
-          <p:cNvSpPr txBox="1"/>
-          <p:nvPr/>
-        </p:nvSpPr>
-        <p:spPr>
-          <a:xfrm>
-            <a:off x="8412480" y="4599432"/>
-            <a:ext cx="3154680" cy="731520"/>
-          </a:xfrm>
-          <a:prstGeom prst="rect">
-            <a:avLst/>
-          </a:prstGeom>
-          <a:noFill/>
-          <a:ln/>
-        </p:spPr>
-        <p:txBody>
-          <a:bodyPr wrap="square" lIns="0" tIns="0" rIns="0" bIns="0" rtlCol="0" anchor="t"/>
-          <a:lstStyle/>
-          <a:p>
-            <a:pPr indent="0" marL="0">
-              <a:buNone/>
-            </a:pPr>
-            <a:r>
-              <a:rPr lang="en-US" sz="1400" dirty="0">
-                <a:solidFill>
-                  <a:schemeClr val="tx2"/>
-                </a:solidFill>
-              </a:rPr>
-              <a:t>표본·기간을 늘리거나 설계를 고친다</a:t>
-            </a:r>
-            <a:endParaRPr lang="en-US" sz="1400" dirty="0"/>
-          </a:p>
-        </p:txBody>
-      </p:sp>
-      <p:sp>
-        <p:nvSpPr>
-          <p:cNvPr id="25" name="Slide Number Placeholder 0"/>
-          <p:cNvSpPr>
-            <a:spLocks noGrp="1"/>
-          </p:cNvSpPr>
-          <p:nvPr>
-            <p:ph type="sldNum" sz="quarter" idx="4294967295"/>
-          </p:nvPr>
-        </p:nvSpPr>
-        <p:spPr>
-          <a:xfrm>
-            <a:off x="11109960" y="6355080"/>
-            <a:ext cx="457200" cy="274320"/>
-          </a:xfrm>
-          <a:prstGeom prst="rect">
-            <a:avLst/>
-          </a:prstGeom>
-          <a:extLst>
-            <a:ext uri="{C572A759-6A51-4108-AA02-DFA0A04FC94B}">
-              <ma14:wrappingTextBoxFlag xmlns:ma14="http://schemas.microsoft.com/office/mac/drawingml/2011/main" val="0"/>
-            </a:ext>
-          </a:extLst>
-        </p:spPr>
-        <p:txBody>
-          <a:bodyPr/>
-          <a:lstStyle>
-            <a:lvl1pPr>
-              <a:defRPr sz="1000">
-                <a:solidFill>
-                  <a:srgbClr val="8A90A8"/>
-                </a:solidFill>
-              </a:defRPr>
-            </a:lvl1pPr>
-          </a:lstStyle>
-          <a:p>
-            <a:pPr algn="r"/>
-            <a:fld id="{F7021451-1387-4CA6-816F-3879F97B5CBC}" type="slidenum">
-              <a:rPr b="0" lang="en-US"/>
-              <a:t>64</a:t>
-            </a:fld>
-            <a:endParaRPr lang="en-US"/>
-          </a:p>
-        </p:txBody>
-      </p:sp>
-    </p:spTree>
-  </p:cSld>
-  <p:clrMapOvr>
-    <a:masterClrMapping/>
-  </p:clrMapOvr>
-</p:sld>
-</file>
-
-<file path=ppt/slides/slide65.xml><?xml version="1.0" encoding="utf-8"?>
-<p:sld xmlns:a="http://schemas.openxmlformats.org/drawingml/2006/main" xmlns:r="http://schemas.openxmlformats.org/officeDocument/2006/relationships" xmlns:p="http://schemas.openxmlformats.org/presentationml/2006/main">
-  <p:cSld name="Slide 65">
-    <p:spTree>
-      <p:nvGrpSpPr>
-        <p:cNvPr id="1" name=""/>
-        <p:cNvGrpSpPr/>
-        <p:nvPr/>
-      </p:nvGrpSpPr>
-      <p:grpSpPr>
-        <a:xfrm>
-          <a:off x="0" y="0"/>
-          <a:ext cx="0" cy="0"/>
-          <a:chOff x="0" y="0"/>
-          <a:chExt cx="0" cy="0"/>
-        </a:xfrm>
-      </p:grpSpPr>
-      <p:sp>
-        <p:nvSpPr>
-          <p:cNvPr id="2" name="Text 0"/>
-          <p:cNvSpPr/>
-          <p:nvPr>
-            <p:ph idx="100" type="body" hasCustomPrompt="1"/>
-          </p:nvPr>
-        </p:nvSpPr>
-        <p:spPr>
-          <a:xfrm>
-            <a:off x="640080" y="411480"/>
-            <a:ext cx="7315200" cy="320040"/>
-          </a:xfrm>
-          <a:prstGeom prst="rect">
-            <a:avLst/>
-          </a:prstGeom>
-          <a:noFill/>
-          <a:ln/>
-        </p:spPr>
-        <p:txBody>
-          <a:bodyPr wrap="square" lIns="0" tIns="0" rIns="0" bIns="0" rtlCol="0" anchor="t"/>
-          <a:lstStyle/>
-          <a:p>
-            <a:pPr algn="l" indent="0" marL="0">
-              <a:buNone/>
-            </a:pPr>
-            <a:r>
-              <a:rPr lang="en-US" sz="1500" b="1" dirty="0">
-                <a:solidFill>
-                  <a:srgbClr val="3A5BFF"/>
-                </a:solidFill>
-              </a:rPr>
-              <a:t>Ch5 · 판단 프레임</a:t>
-            </a:r>
-            <a:endParaRPr lang="en-US" sz="1500" dirty="0"/>
-          </a:p>
-        </p:txBody>
-      </p:sp>
-      <p:sp>
-        <p:nvSpPr>
-          <p:cNvPr id="3" name="Text 0"/>
-          <p:cNvSpPr/>
-          <p:nvPr>
-            <p:ph idx="101" type="title" hasCustomPrompt="1"/>
-          </p:nvPr>
-        </p:nvSpPr>
-        <p:spPr>
-          <a:xfrm>
-            <a:off x="640080" y="749808"/>
-            <a:ext cx="10911535" cy="777240"/>
-          </a:xfrm>
-          <a:prstGeom prst="rect">
-            <a:avLst/>
-          </a:prstGeom>
-          <a:noFill/>
-          <a:ln/>
-        </p:spPr>
-        <p:txBody>
-          <a:bodyPr wrap="square" lIns="0" tIns="0" rIns="0" bIns="0" rtlCol="0" anchor="t"/>
-          <a:lstStyle/>
-          <a:p>
-            <a:pPr algn="l" indent="0" marL="0">
-              <a:buNone/>
-            </a:pPr>
-            <a:r>
-              <a:rPr lang="en-US" sz="2000" b="1" dirty="0">
-                <a:solidFill>
-                  <a:srgbClr val="1B1F3B"/>
-                </a:solidFill>
-              </a:rPr>
-              <a:t>효과 크기 × 비용 × 리스크를 함께 본다</a:t>
-            </a:r>
-            <a:endParaRPr lang="en-US" sz="2000" dirty="0"/>
-          </a:p>
-        </p:txBody>
-      </p:sp>
-      <p:sp>
-        <p:nvSpPr>
-          <p:cNvPr id="5" name="Text 2"/>
-          <p:cNvSpPr txBox="1"/>
-          <p:nvPr/>
-        </p:nvSpPr>
-        <p:spPr>
-          <a:xfrm>
-            <a:off x="640080" y="1874520"/>
-            <a:ext cx="3383280" cy="2377440"/>
-          </a:xfrm>
-          <a:prstGeom prst="rect">
-            <a:avLst/>
-          </a:prstGeom>
-          <a:noFill/>
-          <a:ln/>
-        </p:spPr>
-        <p:txBody>
-          <a:bodyPr wrap="square" lIns="0" tIns="0" rIns="0" bIns="0" rtlCol="0" anchor="t"/>
-          <a:lstStyle/>
-          <a:p>
-            <a:pPr indent="0" marL="0">
-              <a:spcAft>
-                <a:spcPts val="1000"/>
-              </a:spcAft>
-              <a:buNone/>
-            </a:pPr>
-            <a:r>
-              <a:rPr lang="en-US" sz="2000" b="1" dirty="0">
-                <a:solidFill>
-                  <a:schemeClr val="accent1"/>
-                </a:solidFill>
-              </a:rPr>
-              <a:t>효과 크기</a:t>
-            </a:r>
-            <a:endParaRPr lang="en-US" sz="1500" dirty="0"/>
-          </a:p>
-          <a:p>
-            <a:pPr marL="342900" indent="-342900">
-              <a:spcAft>
-                <a:spcPts val="800"/>
-              </a:spcAft>
-              <a:buSzPct val="100000"/>
-              <a:buChar char="•"/>
-            </a:pPr>
-            <a:r>
-              <a:rPr lang="en-US" sz="1500" dirty="0">
-                <a:solidFill>
-                  <a:schemeClr val="tx1"/>
-                </a:solidFill>
-              </a:rPr>
-              <a:t>구간의 하한이어도 의미 있나?</a:t>
-            </a:r>
-            <a:endParaRPr lang="en-US" sz="1500" dirty="0"/>
-          </a:p>
-          <a:p>
-            <a:pPr marL="342900" indent="-342900">
-              <a:spcAft>
-                <a:spcPts val="800"/>
-              </a:spcAft>
-              <a:buSzPct val="100000"/>
-              <a:buChar char="•"/>
-            </a:pPr>
-            <a:r>
-              <a:rPr lang="en-US" sz="1500" dirty="0">
-                <a:solidFill>
-                  <a:schemeClr val="tx1"/>
-                </a:solidFill>
-              </a:rPr>
-              <a:t>몇 명에게 영향을 주나?</a:t>
-            </a:r>
-            <a:endParaRPr lang="en-US" sz="1500" dirty="0"/>
-          </a:p>
-          <a:p>
-            <a:pPr marL="342900" indent="-342900">
-              <a:spcAft>
-                <a:spcPts val="800"/>
-              </a:spcAft>
-              <a:buSzPct val="100000"/>
-              <a:buChar char="•"/>
-            </a:pPr>
-            <a:r>
-              <a:rPr lang="en-US" sz="1500" dirty="0">
-                <a:solidFill>
-                  <a:schemeClr val="tx1"/>
-                </a:solidFill>
-              </a:rPr>
-              <a:t>장기적으로 유지될 효과인가?</a:t>
-            </a:r>
-            <a:endParaRPr lang="en-US" sz="1500" dirty="0"/>
-          </a:p>
-        </p:txBody>
-      </p:sp>
-      <p:sp>
-        <p:nvSpPr>
-          <p:cNvPr id="6" name="Text 3"/>
-          <p:cNvSpPr txBox="1"/>
-          <p:nvPr/>
-        </p:nvSpPr>
-        <p:spPr>
-          <a:xfrm>
-            <a:off x="3977640" y="1828800"/>
-            <a:ext cx="365760" cy="548640"/>
-          </a:xfrm>
-          <a:prstGeom prst="rect">
-            <a:avLst/>
-          </a:prstGeom>
-          <a:noFill/>
-          <a:ln/>
-        </p:spPr>
-        <p:txBody>
-          <a:bodyPr wrap="square" lIns="0" tIns="0" rIns="0" bIns="0" rtlCol="0" anchor="t"/>
-          <a:lstStyle/>
-          <a:p>
-            <a:pPr algn="ctr" indent="0" marL="0">
-              <a:buNone/>
-            </a:pPr>
-            <a:r>
-              <a:rPr lang="en-US" sz="3000" b="1" dirty="0">
-                <a:solidFill>
-                  <a:schemeClr val="accent6"/>
-                </a:solidFill>
-              </a:rPr>
-              <a:t>×</a:t>
-            </a:r>
-            <a:endParaRPr lang="en-US" sz="3000" dirty="0"/>
-          </a:p>
-        </p:txBody>
-      </p:sp>
-      <p:sp>
-        <p:nvSpPr>
-          <p:cNvPr id="7" name="Text 4"/>
-          <p:cNvSpPr txBox="1"/>
-          <p:nvPr/>
-        </p:nvSpPr>
-        <p:spPr>
-          <a:xfrm>
-            <a:off x="4343400" y="1874520"/>
-            <a:ext cx="3383280" cy="2377440"/>
-          </a:xfrm>
-          <a:prstGeom prst="rect">
-            <a:avLst/>
-          </a:prstGeom>
-          <a:noFill/>
-          <a:ln/>
-        </p:spPr>
-        <p:txBody>
-          <a:bodyPr wrap="square" lIns="0" tIns="0" rIns="0" bIns="0" rtlCol="0" anchor="t"/>
-          <a:lstStyle/>
-          <a:p>
-            <a:pPr indent="0" marL="0">
-              <a:spcAft>
-                <a:spcPts val="1000"/>
-              </a:spcAft>
-              <a:buNone/>
-            </a:pPr>
-            <a:r>
-              <a:rPr lang="en-US" sz="2000" b="1" dirty="0">
-                <a:solidFill>
-                  <a:schemeClr val="accent5"/>
-                </a:solidFill>
-              </a:rPr>
-              <a:t>비용</a:t>
-            </a:r>
-            <a:endParaRPr lang="en-US" sz="1500" dirty="0"/>
-          </a:p>
-          <a:p>
-            <a:pPr marL="342900" indent="-342900">
-              <a:spcAft>
-                <a:spcPts val="800"/>
-              </a:spcAft>
-              <a:buSzPct val="100000"/>
-              <a:buChar char="•"/>
-            </a:pPr>
-            <a:r>
-              <a:rPr lang="en-US" sz="1500" dirty="0">
-                <a:solidFill>
-                  <a:schemeClr val="tx1"/>
-                </a:solidFill>
-              </a:rPr>
-              <a:t>구현·운영·유지보수 비용</a:t>
-            </a:r>
-            <a:endParaRPr lang="en-US" sz="1500" dirty="0"/>
-          </a:p>
-          <a:p>
-            <a:pPr marL="342900" indent="-342900">
-              <a:spcAft>
-                <a:spcPts val="800"/>
-              </a:spcAft>
-              <a:buSzPct val="100000"/>
-              <a:buChar char="•"/>
-            </a:pPr>
-            <a:r>
-              <a:rPr lang="en-US" sz="1500" dirty="0">
-                <a:solidFill>
-                  <a:schemeClr val="tx1"/>
-                </a:solidFill>
-              </a:rPr>
-              <a:t>다른 실험 기회를 막는 비용</a:t>
-            </a:r>
-            <a:endParaRPr lang="en-US" sz="1500" dirty="0"/>
-          </a:p>
-          <a:p>
-            <a:pPr marL="342900" indent="-342900">
-              <a:spcAft>
-                <a:spcPts val="800"/>
-              </a:spcAft>
-              <a:buSzPct val="100000"/>
-              <a:buChar char="•"/>
-            </a:pPr>
-            <a:r>
-              <a:rPr lang="en-US" sz="1500" dirty="0">
-                <a:solidFill>
-                  <a:schemeClr val="tx1"/>
-                </a:solidFill>
-              </a:rPr>
-              <a:t>복잡도가 늘어나는 비용</a:t>
-            </a:r>
-            <a:endParaRPr lang="en-US" sz="1500" dirty="0"/>
-          </a:p>
-        </p:txBody>
-      </p:sp>
-      <p:sp>
-        <p:nvSpPr>
-          <p:cNvPr id="8" name="Text 5"/>
-          <p:cNvSpPr txBox="1"/>
-          <p:nvPr/>
-        </p:nvSpPr>
-        <p:spPr>
-          <a:xfrm>
-            <a:off x="7680960" y="1828800"/>
-            <a:ext cx="365760" cy="548640"/>
-          </a:xfrm>
-          <a:prstGeom prst="rect">
-            <a:avLst/>
-          </a:prstGeom>
-          <a:noFill/>
-          <a:ln/>
-        </p:spPr>
-        <p:txBody>
-          <a:bodyPr wrap="square" lIns="0" tIns="0" rIns="0" bIns="0" rtlCol="0" anchor="t"/>
-          <a:lstStyle/>
-          <a:p>
-            <a:pPr algn="ctr" indent="0" marL="0">
-              <a:buNone/>
-            </a:pPr>
-            <a:r>
-              <a:rPr lang="en-US" sz="3000" b="1" dirty="0">
-                <a:solidFill>
-                  <a:schemeClr val="accent6"/>
-                </a:solidFill>
-              </a:rPr>
-              <a:t>×</a:t>
-            </a:r>
-            <a:endParaRPr lang="en-US" sz="3000" dirty="0"/>
-          </a:p>
-        </p:txBody>
-      </p:sp>
-      <p:sp>
-        <p:nvSpPr>
-          <p:cNvPr id="9" name="Text 6"/>
-          <p:cNvSpPr txBox="1"/>
-          <p:nvPr/>
-        </p:nvSpPr>
-        <p:spPr>
-          <a:xfrm>
-            <a:off x="8046720" y="1874520"/>
-            <a:ext cx="3383280" cy="2377440"/>
-          </a:xfrm>
-          <a:prstGeom prst="rect">
-            <a:avLst/>
-          </a:prstGeom>
-          <a:noFill/>
-          <a:ln/>
-        </p:spPr>
-        <p:txBody>
-          <a:bodyPr wrap="square" lIns="0" tIns="0" rIns="0" bIns="0" rtlCol="0" anchor="t"/>
-          <a:lstStyle/>
-          <a:p>
-            <a:pPr indent="0" marL="0">
-              <a:spcAft>
-                <a:spcPts val="1000"/>
-              </a:spcAft>
-              <a:buNone/>
-            </a:pPr>
-            <a:r>
-              <a:rPr lang="en-US" sz="2000" b="1" dirty="0">
-                <a:solidFill>
-                  <a:schemeClr val="accent4"/>
-                </a:solidFill>
-              </a:rPr>
-              <a:t>리스크</a:t>
-            </a:r>
-            <a:endParaRPr lang="en-US" sz="1500" dirty="0"/>
-          </a:p>
-          <a:p>
-            <a:pPr marL="342900" indent="-342900">
-              <a:spcAft>
-                <a:spcPts val="800"/>
-              </a:spcAft>
-              <a:buSzPct val="100000"/>
-              <a:buChar char="•"/>
-            </a:pPr>
-            <a:r>
-              <a:rPr lang="en-US" sz="1500" dirty="0">
-                <a:solidFill>
-                  <a:schemeClr val="tx1"/>
-                </a:solidFill>
-              </a:rPr>
-              <a:t>가드레일이 조금이라도 나빠졌나?</a:t>
-            </a:r>
-            <a:endParaRPr lang="en-US" sz="1500" dirty="0"/>
-          </a:p>
-          <a:p>
-            <a:pPr marL="342900" indent="-342900">
-              <a:spcAft>
-                <a:spcPts val="800"/>
-              </a:spcAft>
-              <a:buSzPct val="100000"/>
-              <a:buChar char="•"/>
-            </a:pPr>
-            <a:r>
-              <a:rPr lang="en-US" sz="1500" dirty="0">
-                <a:solidFill>
-                  <a:schemeClr val="tx1"/>
-                </a:solidFill>
-              </a:rPr>
-              <a:t>되돌리기 어려운 변화인가?</a:t>
-            </a:r>
-            <a:endParaRPr lang="en-US" sz="1500" dirty="0"/>
-          </a:p>
-          <a:p>
-            <a:pPr marL="342900" indent="-342900">
-              <a:spcAft>
-                <a:spcPts val="800"/>
-              </a:spcAft>
-              <a:buSzPct val="100000"/>
-              <a:buChar char="•"/>
-            </a:pPr>
-            <a:r>
-              <a:rPr lang="en-US" sz="1500" dirty="0">
-                <a:solidFill>
-                  <a:schemeClr val="tx1"/>
-                </a:solidFill>
-              </a:rPr>
-              <a:t>특정 세그먼트에 해가 가나?</a:t>
-            </a:r>
-            <a:endParaRPr lang="en-US" sz="1500" dirty="0"/>
-          </a:p>
-        </p:txBody>
-      </p:sp>
-      <p:sp>
-        <p:nvSpPr>
-          <p:cNvPr id="10" name="Text 7"/>
-          <p:cNvSpPr txBox="1"/>
-          <p:nvPr/>
-        </p:nvSpPr>
-        <p:spPr>
-          <a:xfrm>
-            <a:off x="640080" y="4846320"/>
-            <a:ext cx="10911535" cy="822960"/>
-          </a:xfrm>
-          <a:prstGeom prst="rect">
-            <a:avLst/>
-          </a:prstGeom>
-          <a:noFill/>
-          <a:ln/>
-        </p:spPr>
-        <p:txBody>
-          <a:bodyPr wrap="square" lIns="0" tIns="0" rIns="0" bIns="0" rtlCol="0" anchor="t"/>
-          <a:lstStyle/>
-          <a:p>
-            <a:pPr indent="0" marL="0">
-              <a:buNone/>
-            </a:pPr>
-            <a:r>
-              <a:rPr lang="en-US" sz="1500" b="1" dirty="0">
-                <a:solidFill>
-                  <a:schemeClr val="accent1"/>
-                </a:solidFill>
-              </a:rPr>
-              <a:t>실무에서 이렇게 말한다  </a:t>
-            </a:r>
-            <a:pPr indent="0" marL="0">
-              <a:buNone/>
-            </a:pPr>
-            <a:r>
-              <a:rPr lang="en-US" sz="1500" dirty="0">
-                <a:solidFill>
-                  <a:schemeClr val="tx1"/>
-                </a:solidFill>
-              </a:rPr>
-              <a:t>"전환율 +0.8%p, 하한 +0.1%p여도 연 유지비를 넘고 가드레일도 문제없어 50%에서 100%로 확대합니다"</a:t>
-            </a:r>
-            <a:endParaRPr lang="en-US" sz="1500" dirty="0"/>
           </a:p>
         </p:txBody>
       </p:sp>
@@ -54676,13 +55378,13 @@
           <p:cNvPr id="2" name="Text 0"/>
           <p:cNvSpPr/>
           <p:nvPr>
-            <p:ph idx="100" type="title" hasCustomPrompt="1"/>
+            <p:ph idx="100" type="body" hasCustomPrompt="1"/>
           </p:nvPr>
         </p:nvSpPr>
         <p:spPr>
           <a:xfrm>
-            <a:off x="640080" y="2011680"/>
-            <a:ext cx="6949440" cy="1737360"/>
+            <a:off x="640080" y="411480"/>
+            <a:ext cx="7315200" cy="320040"/>
           </a:xfrm>
           <a:prstGeom prst="rect">
             <a:avLst/>
@@ -54691,21 +55393,21 @@
           <a:ln/>
         </p:spPr>
         <p:txBody>
-          <a:bodyPr wrap="square" lIns="0" tIns="0" rIns="0" bIns="0" rtlCol="0" anchor="b"/>
+          <a:bodyPr wrap="square" lIns="0" tIns="0" rIns="0" bIns="0" rtlCol="0" anchor="t"/>
           <a:lstStyle/>
           <a:p>
             <a:pPr algn="l" indent="0" marL="0">
               <a:buNone/>
             </a:pPr>
             <a:r>
-              <a:rPr lang="en-US" sz="4400" b="1" dirty="0">
-                <a:solidFill>
-                  <a:srgbClr val="FFFFFF"/>
-                </a:solidFill>
-              </a:rPr>
-              <a:t>정리</a:t>
-            </a:r>
-            <a:endParaRPr lang="en-US" sz="4400" dirty="0"/>
+              <a:rPr lang="en-US" sz="1500" b="1" dirty="0">
+                <a:solidFill>
+                  <a:srgbClr val="3A5BFF"/>
+                </a:solidFill>
+              </a:rPr>
+              <a:t>Ch5 · 실험 문화</a:t>
+            </a:r>
+            <a:endParaRPr lang="en-US" sz="1500" dirty="0"/>
           </a:p>
         </p:txBody>
       </p:sp>
@@ -54714,13 +55416,13 @@
           <p:cNvPr id="3" name="Text 0"/>
           <p:cNvSpPr/>
           <p:nvPr>
-            <p:ph idx="101" type="body" hasCustomPrompt="1"/>
+            <p:ph idx="101" type="title" hasCustomPrompt="1"/>
           </p:nvPr>
         </p:nvSpPr>
         <p:spPr>
           <a:xfrm>
-            <a:off x="640080" y="3977640"/>
-            <a:ext cx="6583680" cy="1097280"/>
+            <a:off x="640080" y="749808"/>
+            <a:ext cx="10911535" cy="777240"/>
           </a:xfrm>
           <a:prstGeom prst="rect">
             <a:avLst/>
@@ -54736,12 +55438,12 @@
               <a:buNone/>
             </a:pPr>
             <a:r>
-              <a:rPr lang="en-US" sz="2000" dirty="0">
-                <a:solidFill>
-                  <a:srgbClr val="AEB3CC"/>
-                </a:solidFill>
-              </a:rPr>
-              <a:t>이제 우리 조 사례로 직접 설계하고 돌려봅니다 → 실습 75분</a:t>
+              <a:rPr lang="en-US" sz="2000" b="1" dirty="0">
+                <a:solidFill>
+                  <a:srgbClr val="1B1F3B"/>
+                </a:solidFill>
+              </a:rPr>
+              <a:t>실험 문화를 받치는 세 가지</a:t>
             </a:r>
             <a:endParaRPr lang="en-US" sz="2000" dirty="0"/>
           </a:p>
@@ -54749,14 +55451,14 @@
       </p:sp>
       <p:sp>
         <p:nvSpPr>
-          <p:cNvPr id="4" name="Text 2"/>
+          <p:cNvPr id="5" name="Text 2"/>
           <p:cNvSpPr txBox="1"/>
           <p:nvPr/>
         </p:nvSpPr>
         <p:spPr>
           <a:xfrm>
-            <a:off x="6949440" y="2377440"/>
-            <a:ext cx="4754880" cy="2743200"/>
+            <a:off x="640080" y="1874520"/>
+            <a:ext cx="914400" cy="548640"/>
           </a:xfrm>
           <a:prstGeom prst="rect">
             <a:avLst/>
@@ -54769,35 +55471,195 @@
           <a:lstStyle/>
           <a:p>
             <a:pPr indent="0" marL="0">
+              <a:buNone/>
+            </a:pPr>
+            <a:r>
+              <a:rPr lang="en-US" sz="3000" b="1" dirty="0">
+                <a:solidFill>
+                  <a:schemeClr val="accent1"/>
+                </a:solidFill>
+              </a:rPr>
+              <a:t>01</a:t>
+            </a:r>
+            <a:endParaRPr lang="en-US" sz="3000" dirty="0"/>
+          </a:p>
+        </p:txBody>
+      </p:sp>
+      <p:sp>
+        <p:nvSpPr>
+          <p:cNvPr id="6" name="Text 3"/>
+          <p:cNvSpPr txBox="1"/>
+          <p:nvPr/>
+        </p:nvSpPr>
+        <p:spPr>
+          <a:xfrm>
+            <a:off x="640080" y="2514600"/>
+            <a:ext cx="3383280" cy="2194560"/>
+          </a:xfrm>
+          <a:prstGeom prst="rect">
+            <a:avLst/>
+          </a:prstGeom>
+          <a:noFill/>
+          <a:ln/>
+        </p:spPr>
+        <p:txBody>
+          <a:bodyPr wrap="square" lIns="0" tIns="0" rIns="0" bIns="0" rtlCol="0" anchor="t"/>
+          <a:lstStyle/>
+          <a:p>
+            <a:pPr indent="0" marL="0">
+              <a:buNone/>
+            </a:pPr>
+            <a:r>
+              <a:rPr lang="en-US" sz="2000" b="1" dirty="0">
+                <a:solidFill>
+                  <a:schemeClr val="tx1"/>
+                </a:solidFill>
+              </a:rPr>
+              <a:t>Feature Flag</a:t>
+            </a:r>
+            <a:endParaRPr lang="en-US" sz="1500" dirty="0"/>
+          </a:p>
+          <a:p>
+            <a:pPr indent="0" marL="0">
               <a:spcAft>
-                <a:spcPts val="1400"/>
+                <a:spcPts val="800"/>
               </a:spcAft>
               <a:buNone/>
             </a:pPr>
             <a:r>
-              <a:rPr lang="en-US" sz="1500" b="1" dirty="0">
-                <a:solidFill>
-                  <a:srgbClr val="FFFFFF"/>
-                </a:solidFill>
-              </a:rPr>
-              <a:t>1   랜덤 배정이 인과를 말할 수 있게 해 준다</a:t>
+              <a:rPr lang="en-US" sz="1500" dirty="0">
+                <a:solidFill>
+                  <a:schemeClr val="tx1"/>
+                </a:solidFill>
+              </a:rPr>
+              <a:t>코드 배포와 기능 노출을 분리한다</a:t>
             </a:r>
             <a:endParaRPr lang="en-US" sz="1500" dirty="0"/>
           </a:p>
           <a:p>
             <a:pPr indent="0" marL="0">
+              <a:buNone/>
+            </a:pPr>
+            <a:r>
+              <a:rPr lang="en-US" sz="1400" dirty="0">
+                <a:solidFill>
+                  <a:schemeClr val="tx2"/>
+                </a:solidFill>
+              </a:rPr>
+              <a:t>램프업, 즉시 롤백, 단계별 노출</a:t>
+            </a:r>
+            <a:endParaRPr lang="en-US" sz="1500" dirty="0"/>
+          </a:p>
+        </p:txBody>
+      </p:sp>
+      <p:sp>
+        <p:nvSpPr>
+          <p:cNvPr id="7" name="Shape 4"/>
+          <p:cNvSpPr/>
+          <p:nvPr/>
+        </p:nvSpPr>
+        <p:spPr>
+          <a:xfrm>
+            <a:off x="3657600" y="2176272"/>
+            <a:ext cx="502920" cy="0"/>
+          </a:xfrm>
+          <a:prstGeom prst="line">
+            <a:avLst/>
+          </a:prstGeom>
+          <a:noFill/>
+          <a:ln w="19050">
+            <a:solidFill>
+              <a:srgbClr val="8A90A8"/>
+            </a:solidFill>
+            <a:prstDash val="solid"/>
+            <a:tailEnd type="triangle"/>
+          </a:ln>
+        </p:spPr>
+      </p:sp>
+      <p:sp>
+        <p:nvSpPr>
+          <p:cNvPr id="8" name="Text 5"/>
+          <p:cNvSpPr txBox="1"/>
+          <p:nvPr/>
+        </p:nvSpPr>
+        <p:spPr>
+          <a:xfrm>
+            <a:off x="4343400" y="1874520"/>
+            <a:ext cx="914400" cy="548640"/>
+          </a:xfrm>
+          <a:prstGeom prst="rect">
+            <a:avLst/>
+          </a:prstGeom>
+          <a:noFill/>
+          <a:ln/>
+        </p:spPr>
+        <p:txBody>
+          <a:bodyPr wrap="square" lIns="0" tIns="0" rIns="0" bIns="0" rtlCol="0" anchor="t"/>
+          <a:lstStyle/>
+          <a:p>
+            <a:pPr indent="0" marL="0">
+              <a:buNone/>
+            </a:pPr>
+            <a:r>
+              <a:rPr lang="en-US" sz="3000" b="1" dirty="0">
+                <a:solidFill>
+                  <a:schemeClr val="accent1"/>
+                </a:solidFill>
+              </a:rPr>
+              <a:t>02</a:t>
+            </a:r>
+            <a:endParaRPr lang="en-US" sz="3000" dirty="0"/>
+          </a:p>
+        </p:txBody>
+      </p:sp>
+      <p:sp>
+        <p:nvSpPr>
+          <p:cNvPr id="9" name="Text 6"/>
+          <p:cNvSpPr txBox="1"/>
+          <p:nvPr/>
+        </p:nvSpPr>
+        <p:spPr>
+          <a:xfrm>
+            <a:off x="4343400" y="2514600"/>
+            <a:ext cx="3383280" cy="2194560"/>
+          </a:xfrm>
+          <a:prstGeom prst="rect">
+            <a:avLst/>
+          </a:prstGeom>
+          <a:noFill/>
+          <a:ln/>
+        </p:spPr>
+        <p:txBody>
+          <a:bodyPr wrap="square" lIns="0" tIns="0" rIns="0" bIns="0" rtlCol="0" anchor="t"/>
+          <a:lstStyle/>
+          <a:p>
+            <a:pPr indent="0" marL="0">
+              <a:buNone/>
+            </a:pPr>
+            <a:r>
+              <a:rPr lang="en-US" sz="2000" b="1" dirty="0">
+                <a:solidFill>
+                  <a:schemeClr val="tx1"/>
+                </a:solidFill>
+              </a:rPr>
+              <a:t>Experimentation Platform</a:t>
+            </a:r>
+            <a:endParaRPr lang="en-US" sz="1500" dirty="0"/>
+          </a:p>
+          <a:p>
+            <a:pPr indent="0" marL="0">
               <a:spcAft>
-                <a:spcPts val="1400"/>
+                <a:spcPts val="800"/>
               </a:spcAft>
               <a:buNone/>
             </a:pPr>
             <a:r>
-              <a:rPr lang="en-US" sz="1500" b="1" dirty="0">
-                <a:solidFill>
-                  <a:srgbClr val="FFFFFF"/>
-                </a:solidFill>
-              </a:rPr>
-              <a:t>2   가설·OEC·가드레일·MDE는 실험 전에 정한다</a:t>
+              <a:rPr lang="en-US" sz="1500" dirty="0">
+                <a:solidFill>
+                  <a:schemeClr val="tx1"/>
+                </a:solidFill>
+              </a:rPr>
+              <a:t>배정·로깅·분석을 자동화한다</a:t>
             </a:r>
             <a:endParaRPr lang="en-US" sz="1500" dirty="0"/>
           </a:p>
@@ -54806,14 +55668,186 @@
               <a:buNone/>
             </a:pPr>
             <a:r>
-              <a:rPr lang="en-US" sz="1500" b="1" dirty="0">
-                <a:solidFill>
-                  <a:srgbClr val="FFFFFF"/>
-                </a:solidFill>
-              </a:rPr>
-              <a:t>3   결과는 구간으로 읽고, 배포 · 접기 · 재실험으로 닫는다</a:t>
+              <a:rPr lang="en-US" sz="1400" dirty="0">
+                <a:solidFill>
+                  <a:schemeClr val="tx2"/>
+                </a:solidFill>
+              </a:rPr>
+              <a:t>실험 한 번의 비용이 낮아진다. Bing의 아이디어도 이 덕분에 쉽게 시험할 수 있었다</a:t>
             </a:r>
             <a:endParaRPr lang="en-US" sz="1500" dirty="0"/>
+          </a:p>
+        </p:txBody>
+      </p:sp>
+      <p:sp>
+        <p:nvSpPr>
+          <p:cNvPr id="10" name="Shape 7"/>
+          <p:cNvSpPr/>
+          <p:nvPr/>
+        </p:nvSpPr>
+        <p:spPr>
+          <a:xfrm>
+            <a:off x="7360920" y="2176272"/>
+            <a:ext cx="502920" cy="0"/>
+          </a:xfrm>
+          <a:prstGeom prst="line">
+            <a:avLst/>
+          </a:prstGeom>
+          <a:noFill/>
+          <a:ln w="19050">
+            <a:solidFill>
+              <a:srgbClr val="8A90A8"/>
+            </a:solidFill>
+            <a:prstDash val="solid"/>
+            <a:tailEnd type="triangle"/>
+          </a:ln>
+        </p:spPr>
+      </p:sp>
+      <p:sp>
+        <p:nvSpPr>
+          <p:cNvPr id="11" name="Text 8"/>
+          <p:cNvSpPr txBox="1"/>
+          <p:nvPr/>
+        </p:nvSpPr>
+        <p:spPr>
+          <a:xfrm>
+            <a:off x="8046720" y="1874520"/>
+            <a:ext cx="914400" cy="548640"/>
+          </a:xfrm>
+          <a:prstGeom prst="rect">
+            <a:avLst/>
+          </a:prstGeom>
+          <a:noFill/>
+          <a:ln/>
+        </p:spPr>
+        <p:txBody>
+          <a:bodyPr wrap="square" lIns="0" tIns="0" rIns="0" bIns="0" rtlCol="0" anchor="t"/>
+          <a:lstStyle/>
+          <a:p>
+            <a:pPr indent="0" marL="0">
+              <a:buNone/>
+            </a:pPr>
+            <a:r>
+              <a:rPr lang="en-US" sz="3000" b="1" dirty="0">
+                <a:solidFill>
+                  <a:schemeClr val="accent1"/>
+                </a:solidFill>
+              </a:rPr>
+              <a:t>03</a:t>
+            </a:r>
+            <a:endParaRPr lang="en-US" sz="3000" dirty="0"/>
+          </a:p>
+        </p:txBody>
+      </p:sp>
+      <p:sp>
+        <p:nvSpPr>
+          <p:cNvPr id="12" name="Text 9"/>
+          <p:cNvSpPr txBox="1"/>
+          <p:nvPr/>
+        </p:nvSpPr>
+        <p:spPr>
+          <a:xfrm>
+            <a:off x="8046720" y="2514600"/>
+            <a:ext cx="3383280" cy="2194560"/>
+          </a:xfrm>
+          <a:prstGeom prst="rect">
+            <a:avLst/>
+          </a:prstGeom>
+          <a:noFill/>
+          <a:ln/>
+        </p:spPr>
+        <p:txBody>
+          <a:bodyPr wrap="square" lIns="0" tIns="0" rIns="0" bIns="0" rtlCol="0" anchor="t"/>
+          <a:lstStyle/>
+          <a:p>
+            <a:pPr indent="0" marL="0">
+              <a:buNone/>
+            </a:pPr>
+            <a:r>
+              <a:rPr lang="en-US" sz="2000" b="1" dirty="0">
+                <a:solidFill>
+                  <a:schemeClr val="tx1"/>
+                </a:solidFill>
+              </a:rPr>
+              <a:t>Democratization</a:t>
+            </a:r>
+            <a:endParaRPr lang="en-US" sz="1500" dirty="0"/>
+          </a:p>
+          <a:p>
+            <a:pPr indent="0" marL="0">
+              <a:spcAft>
+                <a:spcPts val="800"/>
+              </a:spcAft>
+              <a:buNone/>
+            </a:pPr>
+            <a:r>
+              <a:rPr lang="en-US" sz="1500" dirty="0">
+                <a:solidFill>
+                  <a:schemeClr val="tx1"/>
+                </a:solidFill>
+              </a:rPr>
+              <a:t>누구나 가설을 실험으로 옮긴다</a:t>
+            </a:r>
+            <a:endParaRPr lang="en-US" sz="1500" dirty="0"/>
+          </a:p>
+          <a:p>
+            <a:pPr indent="0" marL="0">
+              <a:buNone/>
+            </a:pPr>
+            <a:r>
+              <a:rPr lang="en-US" sz="1400" dirty="0">
+                <a:solidFill>
+                  <a:schemeClr val="tx2"/>
+                </a:solidFill>
+              </a:rPr>
+              <a:t>대신 가드레일, SRM 자동 검사, 실험 리뷰로 품질을 지킨다</a:t>
+            </a:r>
+            <a:endParaRPr lang="en-US" sz="1500" dirty="0"/>
+          </a:p>
+        </p:txBody>
+      </p:sp>
+      <p:sp>
+        <p:nvSpPr>
+          <p:cNvPr id="25" name="Slide Number Placeholder 0"/>
+          <p:cNvSpPr>
+            <a:spLocks noGrp="1"/>
+          </p:cNvSpPr>
+          <p:nvPr>
+            <p:ph type="sldNum" sz="quarter" idx="4294967295"/>
+          </p:nvPr>
+        </p:nvSpPr>
+        <p:spPr>
+          <a:xfrm>
+            <a:off x="11109960" y="6355080"/>
+            <a:ext cx="457200" cy="274320"/>
+          </a:xfrm>
+          <a:prstGeom prst="rect">
+            <a:avLst/>
+          </a:prstGeom>
+          <a:extLst>
+            <a:ext uri="{C572A759-6A51-4108-AA02-DFA0A04FC94B}">
+              <ma14:wrappingTextBoxFlag xmlns:ma14="http://schemas.microsoft.com/office/mac/drawingml/2011/main" val="0"/>
+            </a:ext>
+          </a:extLst>
+        </p:spPr>
+        <p:txBody>
+          <a:bodyPr/>
+          <a:lstStyle>
+            <a:lvl1pPr>
+              <a:defRPr sz="1000">
+                <a:solidFill>
+                  <a:srgbClr val="8A90A8"/>
+                </a:solidFill>
+              </a:defRPr>
+            </a:lvl1pPr>
+          </a:lstStyle>
+          <a:p>
+            <a:pPr algn="r"/>
+            <a:fld id="{F7021451-1387-4CA6-816F-3879F97B5CBC}" type="slidenum">
+              <a:rPr b="0" lang="en-US"/>
+              <a:t>66</a:t>
+            </a:fld>
+            <a:endParaRPr lang="en-US"/>
           </a:p>
         </p:txBody>
       </p:sp>
@@ -54874,7 +55908,7 @@
                   <a:srgbClr val="3A5BFF"/>
                 </a:solidFill>
               </a:rPr>
-              <a:t>참고자료</a:t>
+              <a:t>Ch5 · 의사결정</a:t>
             </a:r>
             <a:endParaRPr lang="en-US" sz="1500" dirty="0"/>
           </a:p>
@@ -54912,7 +55946,7 @@
                   <a:srgbClr val="1B1F3B"/>
                 </a:solidFill>
               </a:rPr>
-              <a:t>더 읽을거리</a:t>
+              <a:t>'유의하다'에서 멈추지 말고 결정으로 닫는다</a:t>
             </a:r>
             <a:endParaRPr lang="en-US" sz="2000" dirty="0"/>
           </a:p>
@@ -54926,8 +55960,8 @@
         </p:nvSpPr>
         <p:spPr>
           <a:xfrm>
-            <a:off x="640080" y="1737360"/>
-            <a:ext cx="10911535" cy="4389120"/>
+            <a:off x="640080" y="1828800"/>
+            <a:ext cx="457200" cy="457200"/>
           </a:xfrm>
           <a:prstGeom prst="rect">
             <a:avLst/>
@@ -54943,15 +55977,301 @@
               <a:buNone/>
             </a:pPr>
             <a:r>
-              <a:rPr lang="en-US" sz="1400" b="1" dirty="0">
-                <a:solidFill>
-                  <a:schemeClr val="accent1"/>
-                </a:solidFill>
-              </a:rPr>
-              <a:t>메인 교재</a:t>
+              <a:rPr lang="en-US" sz="2000" b="1" dirty="0">
+                <a:solidFill>
+                  <a:schemeClr val="accent6"/>
+                </a:solidFill>
+              </a:rPr>
+              <a:t>1</a:t>
+            </a:r>
+            <a:endParaRPr lang="en-US" sz="2000" dirty="0"/>
+          </a:p>
+        </p:txBody>
+      </p:sp>
+      <p:sp>
+        <p:nvSpPr>
+          <p:cNvPr id="6" name="Text 3"/>
+          <p:cNvSpPr txBox="1"/>
+          <p:nvPr/>
+        </p:nvSpPr>
+        <p:spPr>
+          <a:xfrm>
+            <a:off x="1188720" y="1856232"/>
+            <a:ext cx="5120640" cy="731520"/>
+          </a:xfrm>
+          <a:prstGeom prst="rect">
+            <a:avLst/>
+          </a:prstGeom>
+          <a:noFill/>
+          <a:ln/>
+        </p:spPr>
+        <p:txBody>
+          <a:bodyPr wrap="square" lIns="0" tIns="0" rIns="0" bIns="0" rtlCol="0" anchor="t"/>
+          <a:lstStyle/>
+          <a:p>
+            <a:pPr indent="0" marL="0">
+              <a:buNone/>
+            </a:pPr>
+            <a:r>
+              <a:rPr lang="en-US" sz="2000" dirty="0">
+                <a:solidFill>
+                  <a:schemeClr val="tx1"/>
+                </a:solidFill>
+              </a:rPr>
+              <a:t>SRM이나 가드레일에 이상이 있다</a:t>
+            </a:r>
+            <a:endParaRPr lang="en-US" sz="2000" dirty="0"/>
+          </a:p>
+        </p:txBody>
+      </p:sp>
+      <p:sp>
+        <p:nvSpPr>
+          <p:cNvPr id="7" name="Shape 4"/>
+          <p:cNvSpPr/>
+          <p:nvPr/>
+        </p:nvSpPr>
+        <p:spPr>
+          <a:xfrm>
+            <a:off x="5943600" y="2029968"/>
+            <a:ext cx="548640" cy="0"/>
+          </a:xfrm>
+          <a:prstGeom prst="line">
+            <a:avLst/>
+          </a:prstGeom>
+          <a:noFill/>
+          <a:ln w="19050">
+            <a:solidFill>
+              <a:srgbClr val="8A90A8"/>
+            </a:solidFill>
+            <a:prstDash val="solid"/>
+            <a:tailEnd type="triangle"/>
+          </a:ln>
+        </p:spPr>
+      </p:sp>
+      <p:sp>
+        <p:nvSpPr>
+          <p:cNvPr id="8" name="Text 5"/>
+          <p:cNvSpPr txBox="1"/>
+          <p:nvPr/>
+        </p:nvSpPr>
+        <p:spPr>
+          <a:xfrm>
+            <a:off x="6675120" y="1810512"/>
+            <a:ext cx="1737360" cy="548640"/>
+          </a:xfrm>
+          <a:prstGeom prst="rect">
+            <a:avLst/>
+          </a:prstGeom>
+          <a:noFill/>
+          <a:ln/>
+        </p:spPr>
+        <p:txBody>
+          <a:bodyPr wrap="square" lIns="0" tIns="0" rIns="0" bIns="0" rtlCol="0" anchor="t"/>
+          <a:lstStyle/>
+          <a:p>
+            <a:pPr indent="0" marL="0">
+              <a:buNone/>
+            </a:pPr>
+            <a:r>
+              <a:rPr lang="en-US" sz="2000" b="1" dirty="0">
+                <a:solidFill>
+                  <a:srgbClr val="D93B41"/>
+                </a:solidFill>
+              </a:rPr>
+              <a:t>중단</a:t>
+            </a:r>
+            <a:endParaRPr lang="en-US" sz="2000" dirty="0"/>
+          </a:p>
+        </p:txBody>
+      </p:sp>
+      <p:sp>
+        <p:nvSpPr>
+          <p:cNvPr id="9" name="Text 6"/>
+          <p:cNvSpPr txBox="1"/>
+          <p:nvPr/>
+        </p:nvSpPr>
+        <p:spPr>
+          <a:xfrm>
+            <a:off x="8412480" y="1856232"/>
+            <a:ext cx="3154680" cy="731520"/>
+          </a:xfrm>
+          <a:prstGeom prst="rect">
+            <a:avLst/>
+          </a:prstGeom>
+          <a:noFill/>
+          <a:ln/>
+        </p:spPr>
+        <p:txBody>
+          <a:bodyPr wrap="square" lIns="0" tIns="0" rIns="0" bIns="0" rtlCol="0" anchor="t"/>
+          <a:lstStyle/>
+          <a:p>
+            <a:pPr indent="0" marL="0">
+              <a:buNone/>
+            </a:pPr>
+            <a:r>
+              <a:rPr lang="en-US" sz="1400" dirty="0">
+                <a:solidFill>
+                  <a:schemeClr val="tx2"/>
+                </a:solidFill>
+              </a:rPr>
+              <a:t>결과 해석을 멈추고 원인을 고친 뒤 다시 돌린다</a:t>
             </a:r>
             <a:endParaRPr lang="en-US" sz="1400" dirty="0"/>
           </a:p>
+        </p:txBody>
+      </p:sp>
+      <p:sp>
+        <p:nvSpPr>
+          <p:cNvPr id="10" name="Text 7"/>
+          <p:cNvSpPr txBox="1"/>
+          <p:nvPr/>
+        </p:nvSpPr>
+        <p:spPr>
+          <a:xfrm>
+            <a:off x="640080" y="2743200"/>
+            <a:ext cx="457200" cy="457200"/>
+          </a:xfrm>
+          <a:prstGeom prst="rect">
+            <a:avLst/>
+          </a:prstGeom>
+          <a:noFill/>
+          <a:ln/>
+        </p:spPr>
+        <p:txBody>
+          <a:bodyPr wrap="square" lIns="0" tIns="0" rIns="0" bIns="0" rtlCol="0" anchor="t"/>
+          <a:lstStyle/>
+          <a:p>
+            <a:pPr indent="0" marL="0">
+              <a:buNone/>
+            </a:pPr>
+            <a:r>
+              <a:rPr lang="en-US" sz="2000" b="1" dirty="0">
+                <a:solidFill>
+                  <a:schemeClr val="accent6"/>
+                </a:solidFill>
+              </a:rPr>
+              <a:t>2</a:t>
+            </a:r>
+            <a:endParaRPr lang="en-US" sz="2000" dirty="0"/>
+          </a:p>
+        </p:txBody>
+      </p:sp>
+      <p:sp>
+        <p:nvSpPr>
+          <p:cNvPr id="11" name="Text 8"/>
+          <p:cNvSpPr txBox="1"/>
+          <p:nvPr/>
+        </p:nvSpPr>
+        <p:spPr>
+          <a:xfrm>
+            <a:off x="1188720" y="2770632"/>
+            <a:ext cx="5120640" cy="731520"/>
+          </a:xfrm>
+          <a:prstGeom prst="rect">
+            <a:avLst/>
+          </a:prstGeom>
+          <a:noFill/>
+          <a:ln/>
+        </p:spPr>
+        <p:txBody>
+          <a:bodyPr wrap="square" lIns="0" tIns="0" rIns="0" bIns="0" rtlCol="0" anchor="t"/>
+          <a:lstStyle/>
+          <a:p>
+            <a:pPr indent="0" marL="0">
+              <a:buNone/>
+            </a:pPr>
+            <a:r>
+              <a:rPr lang="en-US" sz="2000" dirty="0">
+                <a:solidFill>
+                  <a:schemeClr val="tx1"/>
+                </a:solidFill>
+              </a:rPr>
+              <a:t>신뢰구간 전체가 0보다 위, 크기도 의미 있다</a:t>
+            </a:r>
+            <a:endParaRPr lang="en-US" sz="2000" dirty="0"/>
+          </a:p>
+        </p:txBody>
+      </p:sp>
+      <p:sp>
+        <p:nvSpPr>
+          <p:cNvPr id="12" name="Shape 9"/>
+          <p:cNvSpPr/>
+          <p:nvPr/>
+        </p:nvSpPr>
+        <p:spPr>
+          <a:xfrm>
+            <a:off x="5943600" y="2944368"/>
+            <a:ext cx="548640" cy="0"/>
+          </a:xfrm>
+          <a:prstGeom prst="line">
+            <a:avLst/>
+          </a:prstGeom>
+          <a:noFill/>
+          <a:ln w="19050">
+            <a:solidFill>
+              <a:srgbClr val="8A90A8"/>
+            </a:solidFill>
+            <a:prstDash val="solid"/>
+            <a:tailEnd type="triangle"/>
+          </a:ln>
+        </p:spPr>
+      </p:sp>
+      <p:sp>
+        <p:nvSpPr>
+          <p:cNvPr id="13" name="Text 10"/>
+          <p:cNvSpPr txBox="1"/>
+          <p:nvPr/>
+        </p:nvSpPr>
+        <p:spPr>
+          <a:xfrm>
+            <a:off x="6675120" y="2724912"/>
+            <a:ext cx="1737360" cy="548640"/>
+          </a:xfrm>
+          <a:prstGeom prst="rect">
+            <a:avLst/>
+          </a:prstGeom>
+          <a:noFill/>
+          <a:ln/>
+        </p:spPr>
+        <p:txBody>
+          <a:bodyPr wrap="square" lIns="0" tIns="0" rIns="0" bIns="0" rtlCol="0" anchor="t"/>
+          <a:lstStyle/>
+          <a:p>
+            <a:pPr indent="0" marL="0">
+              <a:buNone/>
+            </a:pPr>
+            <a:r>
+              <a:rPr lang="en-US" sz="2000" b="1" dirty="0">
+                <a:solidFill>
+                  <a:srgbClr val="0F9D63"/>
+                </a:solidFill>
+              </a:rPr>
+              <a:t>배포한다</a:t>
+            </a:r>
+            <a:endParaRPr lang="en-US" sz="2000" dirty="0"/>
+          </a:p>
+        </p:txBody>
+      </p:sp>
+      <p:sp>
+        <p:nvSpPr>
+          <p:cNvPr id="14" name="Text 11"/>
+          <p:cNvSpPr txBox="1"/>
+          <p:nvPr/>
+        </p:nvSpPr>
+        <p:spPr>
+          <a:xfrm>
+            <a:off x="8412480" y="2770632"/>
+            <a:ext cx="3154680" cy="731520"/>
+          </a:xfrm>
+          <a:prstGeom prst="rect">
+            <a:avLst/>
+          </a:prstGeom>
+          <a:noFill/>
+          <a:ln/>
+        </p:spPr>
+        <p:txBody>
+          <a:bodyPr wrap="square" lIns="0" tIns="0" rIns="0" bIns="0" rtlCol="0" anchor="t"/>
+          <a:lstStyle/>
           <a:p>
             <a:pPr indent="0" marL="0">
               <a:buNone/>
@@ -54959,173 +56279,346 @@
             <a:r>
               <a:rPr lang="en-US" sz="1400" dirty="0">
                 <a:solidFill>
+                  <a:schemeClr val="tx2"/>
+                </a:solidFill>
+              </a:rPr>
+              <a:t>비용·리스크를 확인하고 단계적으로 출시</a:t>
+            </a:r>
+            <a:endParaRPr lang="en-US" sz="1400" dirty="0"/>
+          </a:p>
+        </p:txBody>
+      </p:sp>
+      <p:sp>
+        <p:nvSpPr>
+          <p:cNvPr id="15" name="Text 12"/>
+          <p:cNvSpPr txBox="1"/>
+          <p:nvPr/>
+        </p:nvSpPr>
+        <p:spPr>
+          <a:xfrm>
+            <a:off x="640080" y="3657600"/>
+            <a:ext cx="457200" cy="457200"/>
+          </a:xfrm>
+          <a:prstGeom prst="rect">
+            <a:avLst/>
+          </a:prstGeom>
+          <a:noFill/>
+          <a:ln/>
+        </p:spPr>
+        <p:txBody>
+          <a:bodyPr wrap="square" lIns="0" tIns="0" rIns="0" bIns="0" rtlCol="0" anchor="t"/>
+          <a:lstStyle/>
+          <a:p>
+            <a:pPr indent="0" marL="0">
+              <a:buNone/>
+            </a:pPr>
+            <a:r>
+              <a:rPr lang="en-US" sz="2000" b="1" dirty="0">
+                <a:solidFill>
+                  <a:schemeClr val="accent6"/>
+                </a:solidFill>
+              </a:rPr>
+              <a:t>3</a:t>
+            </a:r>
+            <a:endParaRPr lang="en-US" sz="2000" dirty="0"/>
+          </a:p>
+        </p:txBody>
+      </p:sp>
+      <p:sp>
+        <p:nvSpPr>
+          <p:cNvPr id="16" name="Text 13"/>
+          <p:cNvSpPr txBox="1"/>
+          <p:nvPr/>
+        </p:nvSpPr>
+        <p:spPr>
+          <a:xfrm>
+            <a:off x="1188720" y="3685032"/>
+            <a:ext cx="5120640" cy="731520"/>
+          </a:xfrm>
+          <a:prstGeom prst="rect">
+            <a:avLst/>
+          </a:prstGeom>
+          <a:noFill/>
+          <a:ln/>
+        </p:spPr>
+        <p:txBody>
+          <a:bodyPr wrap="square" lIns="0" tIns="0" rIns="0" bIns="0" rtlCol="0" anchor="t"/>
+          <a:lstStyle/>
+          <a:p>
+            <a:pPr indent="0" marL="0">
+              <a:buNone/>
+            </a:pPr>
+            <a:r>
+              <a:rPr lang="en-US" sz="2000" dirty="0">
+                <a:solidFill>
                   <a:schemeClr val="tx1"/>
                 </a:solidFill>
               </a:rPr>
-              <a:t>Kohavi, Tang, Xu (2020). Trustworthy Online Controlled Experiments. Cambridge University Press</a:t>
+              <a:t>구간이 0을 포함하지만 좁다</a:t>
+            </a:r>
+            <a:endParaRPr lang="en-US" sz="2000" dirty="0"/>
+          </a:p>
+        </p:txBody>
+      </p:sp>
+      <p:sp>
+        <p:nvSpPr>
+          <p:cNvPr id="17" name="Shape 14"/>
+          <p:cNvSpPr/>
+          <p:nvPr/>
+        </p:nvSpPr>
+        <p:spPr>
+          <a:xfrm>
+            <a:off x="5943600" y="3858768"/>
+            <a:ext cx="548640" cy="0"/>
+          </a:xfrm>
+          <a:prstGeom prst="line">
+            <a:avLst/>
+          </a:prstGeom>
+          <a:noFill/>
+          <a:ln w="19050">
+            <a:solidFill>
+              <a:srgbClr val="8A90A8"/>
+            </a:solidFill>
+            <a:prstDash val="solid"/>
+            <a:tailEnd type="triangle"/>
+          </a:ln>
+        </p:spPr>
+      </p:sp>
+      <p:sp>
+        <p:nvSpPr>
+          <p:cNvPr id="18" name="Text 15"/>
+          <p:cNvSpPr txBox="1"/>
+          <p:nvPr/>
+        </p:nvSpPr>
+        <p:spPr>
+          <a:xfrm>
+            <a:off x="6675120" y="3639312"/>
+            <a:ext cx="1737360" cy="548640"/>
+          </a:xfrm>
+          <a:prstGeom prst="rect">
+            <a:avLst/>
+          </a:prstGeom>
+          <a:noFill/>
+          <a:ln/>
+        </p:spPr>
+        <p:txBody>
+          <a:bodyPr wrap="square" lIns="0" tIns="0" rIns="0" bIns="0" rtlCol="0" anchor="t"/>
+          <a:lstStyle/>
+          <a:p>
+            <a:pPr indent="0" marL="0">
+              <a:buNone/>
+            </a:pPr>
+            <a:r>
+              <a:rPr lang="en-US" sz="2000" b="1" dirty="0">
+                <a:solidFill>
+                  <a:srgbClr val="8A90A8"/>
+                </a:solidFill>
+              </a:rPr>
+              <a:t>안 한다</a:t>
+            </a:r>
+            <a:endParaRPr lang="en-US" sz="2000" dirty="0"/>
+          </a:p>
+        </p:txBody>
+      </p:sp>
+      <p:sp>
+        <p:nvSpPr>
+          <p:cNvPr id="19" name="Text 16"/>
+          <p:cNvSpPr txBox="1"/>
+          <p:nvPr/>
+        </p:nvSpPr>
+        <p:spPr>
+          <a:xfrm>
+            <a:off x="8412480" y="3685032"/>
+            <a:ext cx="3154680" cy="731520"/>
+          </a:xfrm>
+          <a:prstGeom prst="rect">
+            <a:avLst/>
+          </a:prstGeom>
+          <a:noFill/>
+          <a:ln/>
+        </p:spPr>
+        <p:txBody>
+          <a:bodyPr wrap="square" lIns="0" tIns="0" rIns="0" bIns="0" rtlCol="0" anchor="t"/>
+          <a:lstStyle/>
+          <a:p>
+            <a:pPr indent="0" marL="0">
+              <a:buNone/>
+            </a:pPr>
+            <a:r>
+              <a:rPr lang="en-US" sz="1400" dirty="0">
+                <a:solidFill>
+                  <a:schemeClr val="tx2"/>
+                </a:solidFill>
+              </a:rPr>
+              <a:t>효과가 있어도 MDE보다 작다. 아이디어를 접는다</a:t>
             </a:r>
             <a:endParaRPr lang="en-US" sz="1400" dirty="0"/>
           </a:p>
-          <a:p>
-            <a:pPr indent="0" marL="0">
-              <a:spcAft>
-                <a:spcPts val="1200"/>
-              </a:spcAft>
+        </p:txBody>
+      </p:sp>
+      <p:sp>
+        <p:nvSpPr>
+          <p:cNvPr id="20" name="Text 17"/>
+          <p:cNvSpPr txBox="1"/>
+          <p:nvPr/>
+        </p:nvSpPr>
+        <p:spPr>
+          <a:xfrm>
+            <a:off x="640080" y="4572000"/>
+            <a:ext cx="457200" cy="457200"/>
+          </a:xfrm>
+          <a:prstGeom prst="rect">
+            <a:avLst/>
+          </a:prstGeom>
+          <a:noFill/>
+          <a:ln/>
+        </p:spPr>
+        <p:txBody>
+          <a:bodyPr wrap="square" lIns="0" tIns="0" rIns="0" bIns="0" rtlCol="0" anchor="t"/>
+          <a:lstStyle/>
+          <a:p>
+            <a:pPr indent="0" marL="0">
+              <a:buNone/>
+            </a:pPr>
+            <a:r>
+              <a:rPr lang="en-US" sz="2000" b="1" dirty="0">
+                <a:solidFill>
+                  <a:schemeClr val="accent6"/>
+                </a:solidFill>
+              </a:rPr>
+              <a:t>4</a:t>
+            </a:r>
+            <a:endParaRPr lang="en-US" sz="2000" dirty="0"/>
+          </a:p>
+        </p:txBody>
+      </p:sp>
+      <p:sp>
+        <p:nvSpPr>
+          <p:cNvPr id="21" name="Text 18"/>
+          <p:cNvSpPr txBox="1"/>
+          <p:nvPr/>
+        </p:nvSpPr>
+        <p:spPr>
+          <a:xfrm>
+            <a:off x="1188720" y="4599432"/>
+            <a:ext cx="5120640" cy="731520"/>
+          </a:xfrm>
+          <a:prstGeom prst="rect">
+            <a:avLst/>
+          </a:prstGeom>
+          <a:noFill/>
+          <a:ln/>
+        </p:spPr>
+        <p:txBody>
+          <a:bodyPr wrap="square" lIns="0" tIns="0" rIns="0" bIns="0" rtlCol="0" anchor="t"/>
+          <a:lstStyle/>
+          <a:p>
+            <a:pPr indent="0" marL="0">
+              <a:buNone/>
+            </a:pPr>
+            <a:r>
+              <a:rPr lang="en-US" sz="2000" dirty="0">
+                <a:solidFill>
+                  <a:schemeClr val="tx1"/>
+                </a:solidFill>
+              </a:rPr>
+              <a:t>구간이 0을 포함하고 넓다</a:t>
+            </a:r>
+            <a:endParaRPr lang="en-US" sz="2000" dirty="0"/>
+          </a:p>
+        </p:txBody>
+      </p:sp>
+      <p:sp>
+        <p:nvSpPr>
+          <p:cNvPr id="22" name="Shape 19"/>
+          <p:cNvSpPr/>
+          <p:nvPr/>
+        </p:nvSpPr>
+        <p:spPr>
+          <a:xfrm>
+            <a:off x="5943600" y="4773168"/>
+            <a:ext cx="548640" cy="0"/>
+          </a:xfrm>
+          <a:prstGeom prst="line">
+            <a:avLst/>
+          </a:prstGeom>
+          <a:noFill/>
+          <a:ln w="19050">
+            <a:solidFill>
+              <a:srgbClr val="8A90A8"/>
+            </a:solidFill>
+            <a:prstDash val="solid"/>
+            <a:tailEnd type="triangle"/>
+          </a:ln>
+        </p:spPr>
+      </p:sp>
+      <p:sp>
+        <p:nvSpPr>
+          <p:cNvPr id="23" name="Text 20"/>
+          <p:cNvSpPr txBox="1"/>
+          <p:nvPr/>
+        </p:nvSpPr>
+        <p:spPr>
+          <a:xfrm>
+            <a:off x="6675120" y="4553712"/>
+            <a:ext cx="1737360" cy="548640"/>
+          </a:xfrm>
+          <a:prstGeom prst="rect">
+            <a:avLst/>
+          </a:prstGeom>
+          <a:noFill/>
+          <a:ln/>
+        </p:spPr>
+        <p:txBody>
+          <a:bodyPr wrap="square" lIns="0" tIns="0" rIns="0" bIns="0" rtlCol="0" anchor="t"/>
+          <a:lstStyle/>
+          <a:p>
+            <a:pPr indent="0" marL="0">
+              <a:buNone/>
+            </a:pPr>
+            <a:r>
+              <a:rPr lang="en-US" sz="2000" b="1" dirty="0">
+                <a:solidFill>
+                  <a:srgbClr val="B87700"/>
+                </a:solidFill>
+              </a:rPr>
+              <a:t>재실험한다</a:t>
+            </a:r>
+            <a:endParaRPr lang="en-US" sz="2000" dirty="0"/>
+          </a:p>
+        </p:txBody>
+      </p:sp>
+      <p:sp>
+        <p:nvSpPr>
+          <p:cNvPr id="24" name="Text 21"/>
+          <p:cNvSpPr txBox="1"/>
+          <p:nvPr/>
+        </p:nvSpPr>
+        <p:spPr>
+          <a:xfrm>
+            <a:off x="8412480" y="4599432"/>
+            <a:ext cx="3154680" cy="731520"/>
+          </a:xfrm>
+          <a:prstGeom prst="rect">
+            <a:avLst/>
+          </a:prstGeom>
+          <a:noFill/>
+          <a:ln/>
+        </p:spPr>
+        <p:txBody>
+          <a:bodyPr wrap="square" lIns="0" tIns="0" rIns="0" bIns="0" rtlCol="0" anchor="t"/>
+          <a:lstStyle/>
+          <a:p>
+            <a:pPr indent="0" marL="0">
               <a:buNone/>
             </a:pPr>
             <a:r>
               <a:rPr lang="en-US" sz="1400" dirty="0">
                 <a:solidFill>
-                  <a:schemeClr val="tx1"/>
-                </a:solidFill>
-              </a:rPr>
-              <a:t>Udacity: A/B Testing by Google</a:t>
-            </a:r>
-            <a:endParaRPr lang="en-US" sz="1400" dirty="0"/>
-          </a:p>
-          <a:p>
-            <a:pPr indent="0" marL="0">
-              <a:buNone/>
-            </a:pPr>
-            <a:r>
-              <a:rPr lang="en-US" sz="1400" b="1" dirty="0">
-                <a:solidFill>
-                  <a:schemeClr val="accent1"/>
-                </a:solidFill>
-              </a:rPr>
-              <a:t>논문</a:t>
-            </a:r>
-            <a:endParaRPr lang="en-US" sz="1400" dirty="0"/>
-          </a:p>
-          <a:p>
-            <a:pPr indent="0" marL="0">
-              <a:buNone/>
-            </a:pPr>
-            <a:r>
-              <a:rPr lang="en-US" sz="1400" dirty="0">
-                <a:solidFill>
-                  <a:schemeClr val="tx1"/>
-                </a:solidFill>
-              </a:rPr>
-              <a:t>Kohavi et al. (2009). Controlled experiments on the web: survey and practical guide</a:t>
-            </a:r>
-            <a:endParaRPr lang="en-US" sz="1400" dirty="0"/>
-          </a:p>
-          <a:p>
-            <a:pPr indent="0" marL="0">
-              <a:buNone/>
-            </a:pPr>
-            <a:r>
-              <a:rPr lang="en-US" sz="1400" dirty="0">
-                <a:solidFill>
-                  <a:schemeClr val="tx1"/>
-                </a:solidFill>
-              </a:rPr>
-              <a:t>Deng et al. (2013). Improving the Sensitivity of Online Controlled Experiments by Utilizing Pre-Experiment Data. WSDM</a:t>
-            </a:r>
-            <a:endParaRPr lang="en-US" sz="1400" dirty="0"/>
-          </a:p>
-          <a:p>
-            <a:pPr indent="0" marL="0">
-              <a:spcAft>
-                <a:spcPts val="1200"/>
-              </a:spcAft>
-              <a:buNone/>
-            </a:pPr>
-            <a:r>
-              <a:rPr lang="en-US" sz="1400" dirty="0">
-                <a:solidFill>
-                  <a:schemeClr val="tx1"/>
-                </a:solidFill>
-              </a:rPr>
-              <a:t>Kohavi &amp; Thomke (2017). The Surprising Power of Online Experiments. Harvard Business Review</a:t>
-            </a:r>
-            <a:endParaRPr lang="en-US" sz="1400" dirty="0"/>
-          </a:p>
-          <a:p>
-            <a:pPr indent="0" marL="0">
-              <a:buNone/>
-            </a:pPr>
-            <a:r>
-              <a:rPr lang="en-US" sz="1400" b="1" dirty="0">
-                <a:solidFill>
-                  <a:schemeClr val="accent1"/>
-                </a:solidFill>
-              </a:rPr>
-              <a:t>더 깊이</a:t>
-            </a:r>
-            <a:endParaRPr lang="en-US" sz="1400" dirty="0"/>
-          </a:p>
-          <a:p>
-            <a:pPr indent="0" marL="0">
-              <a:buNone/>
-            </a:pPr>
-            <a:r>
-              <a:rPr lang="en-US" sz="1400" dirty="0">
-                <a:solidFill>
-                  <a:schemeClr val="tx1"/>
-                </a:solidFill>
-              </a:rPr>
-              <a:t>Causal Inference for the Brave and True (무료 온라인북)</a:t>
-            </a:r>
-            <a:endParaRPr lang="en-US" sz="1400" dirty="0"/>
-          </a:p>
-          <a:p>
-            <a:pPr indent="0" marL="0">
-              <a:spcAft>
-                <a:spcPts val="1200"/>
-              </a:spcAft>
-              <a:buNone/>
-            </a:pPr>
-            <a:r>
-              <a:rPr lang="en-US" sz="1400" dirty="0">
-                <a:solidFill>
-                  <a:schemeClr val="tx1"/>
-                </a:solidFill>
-              </a:rPr>
-              <a:t>Netflix Tech Blog, Uber Engineering, Eppo Blog, Statsig Blog · Evan Miller's A/B Test Calculator</a:t>
-            </a:r>
-            <a:endParaRPr lang="en-US" sz="1400" dirty="0"/>
-          </a:p>
-          <a:p>
-            <a:pPr indent="0" marL="0">
-              <a:buNone/>
-            </a:pPr>
-            <a:r>
-              <a:rPr lang="en-US" sz="1400" b="1" dirty="0">
-                <a:solidFill>
-                  <a:schemeClr val="accent1"/>
-                </a:solidFill>
-              </a:rPr>
-              <a:t>한국어</a:t>
-            </a:r>
-            <a:endParaRPr lang="en-US" sz="1400" dirty="0"/>
-          </a:p>
-          <a:p>
-            <a:pPr indent="0" marL="0">
-              <a:buNone/>
-            </a:pPr>
-            <a:r>
-              <a:rPr lang="en-US" sz="1400" dirty="0">
-                <a:solidFill>
-                  <a:schemeClr val="tx1"/>
-                </a:solidFill>
-              </a:rPr>
-              <a:t>데이터리안 "A/B 테스트란" → 데이터리안 YouTube → 토스 기술 블로그 "진짜 A/B 테스트"</a:t>
-            </a:r>
-            <a:endParaRPr lang="en-US" sz="1400" dirty="0"/>
-          </a:p>
-          <a:p>
-            <a:pPr indent="0" marL="0">
-              <a:buNone/>
-            </a:pPr>
-            <a:r>
-              <a:rPr lang="en-US" sz="1400" dirty="0">
-                <a:solidFill>
-                  <a:schemeClr val="tx1"/>
-                </a:solidFill>
-              </a:rPr>
-              <a:t>저장소 위키 docs/ab-testing: 01 왜 A/B 테스트 · 02 가설 수립 · 03 지표 설계 · 04 실험 단위 · 05 실험 플랫폼과 문화</a:t>
+                  <a:schemeClr val="tx2"/>
+                </a:solidFill>
+              </a:rPr>
+              <a:t>표본·기간을 늘리거나 설계를 고친다</a:t>
             </a:r>
             <a:endParaRPr lang="en-US" sz="1400" dirty="0"/>
           </a:p>
@@ -55173,6 +56666,721 @@
               <a:t>67</a:t>
             </a:fld>
             <a:endParaRPr lang="en-US"/>
+          </a:p>
+        </p:txBody>
+      </p:sp>
+    </p:spTree>
+  </p:cSld>
+  <p:clrMapOvr>
+    <a:masterClrMapping/>
+  </p:clrMapOvr>
+</p:sld>
+</file>
+
+<file path=ppt/slides/slide68.xml><?xml version="1.0" encoding="utf-8"?>
+<p:sld xmlns:a="http://schemas.openxmlformats.org/drawingml/2006/main" xmlns:r="http://schemas.openxmlformats.org/officeDocument/2006/relationships" xmlns:p="http://schemas.openxmlformats.org/presentationml/2006/main">
+  <p:cSld name="Slide 68">
+    <p:spTree>
+      <p:nvGrpSpPr>
+        <p:cNvPr id="1" name=""/>
+        <p:cNvGrpSpPr/>
+        <p:nvPr/>
+      </p:nvGrpSpPr>
+      <p:grpSpPr>
+        <a:xfrm>
+          <a:off x="0" y="0"/>
+          <a:ext cx="0" cy="0"/>
+          <a:chOff x="0" y="0"/>
+          <a:chExt cx="0" cy="0"/>
+        </a:xfrm>
+      </p:grpSpPr>
+      <p:sp>
+        <p:nvSpPr>
+          <p:cNvPr id="2" name="Text 0"/>
+          <p:cNvSpPr/>
+          <p:nvPr>
+            <p:ph idx="100" type="body" hasCustomPrompt="1"/>
+          </p:nvPr>
+        </p:nvSpPr>
+        <p:spPr>
+          <a:xfrm>
+            <a:off x="640080" y="411480"/>
+            <a:ext cx="7315200" cy="320040"/>
+          </a:xfrm>
+          <a:prstGeom prst="rect">
+            <a:avLst/>
+          </a:prstGeom>
+          <a:noFill/>
+          <a:ln/>
+        </p:spPr>
+        <p:txBody>
+          <a:bodyPr wrap="square" lIns="0" tIns="0" rIns="0" bIns="0" rtlCol="0" anchor="t"/>
+          <a:lstStyle/>
+          <a:p>
+            <a:pPr algn="l" indent="0" marL="0">
+              <a:buNone/>
+            </a:pPr>
+            <a:r>
+              <a:rPr lang="en-US" sz="1500" b="1" dirty="0">
+                <a:solidFill>
+                  <a:srgbClr val="3A5BFF"/>
+                </a:solidFill>
+              </a:rPr>
+              <a:t>Ch5 · 판단 프레임</a:t>
+            </a:r>
+            <a:endParaRPr lang="en-US" sz="1500" dirty="0"/>
+          </a:p>
+        </p:txBody>
+      </p:sp>
+      <p:sp>
+        <p:nvSpPr>
+          <p:cNvPr id="3" name="Text 0"/>
+          <p:cNvSpPr/>
+          <p:nvPr>
+            <p:ph idx="101" type="title" hasCustomPrompt="1"/>
+          </p:nvPr>
+        </p:nvSpPr>
+        <p:spPr>
+          <a:xfrm>
+            <a:off x="640080" y="749808"/>
+            <a:ext cx="10911535" cy="777240"/>
+          </a:xfrm>
+          <a:prstGeom prst="rect">
+            <a:avLst/>
+          </a:prstGeom>
+          <a:noFill/>
+          <a:ln/>
+        </p:spPr>
+        <p:txBody>
+          <a:bodyPr wrap="square" lIns="0" tIns="0" rIns="0" bIns="0" rtlCol="0" anchor="t"/>
+          <a:lstStyle/>
+          <a:p>
+            <a:pPr algn="l" indent="0" marL="0">
+              <a:buNone/>
+            </a:pPr>
+            <a:r>
+              <a:rPr lang="en-US" sz="2000" b="1" dirty="0">
+                <a:solidFill>
+                  <a:srgbClr val="1B1F3B"/>
+                </a:solidFill>
+              </a:rPr>
+              <a:t>효과 크기 × 비용 × 리스크를 함께 본다</a:t>
+            </a:r>
+            <a:endParaRPr lang="en-US" sz="2000" dirty="0"/>
+          </a:p>
+        </p:txBody>
+      </p:sp>
+      <p:sp>
+        <p:nvSpPr>
+          <p:cNvPr id="5" name="Text 2"/>
+          <p:cNvSpPr txBox="1"/>
+          <p:nvPr/>
+        </p:nvSpPr>
+        <p:spPr>
+          <a:xfrm>
+            <a:off x="640080" y="1874520"/>
+            <a:ext cx="3383280" cy="2377440"/>
+          </a:xfrm>
+          <a:prstGeom prst="rect">
+            <a:avLst/>
+          </a:prstGeom>
+          <a:noFill/>
+          <a:ln/>
+        </p:spPr>
+        <p:txBody>
+          <a:bodyPr wrap="square" lIns="0" tIns="0" rIns="0" bIns="0" rtlCol="0" anchor="t"/>
+          <a:lstStyle/>
+          <a:p>
+            <a:pPr indent="0" marL="0">
+              <a:spcAft>
+                <a:spcPts val="1000"/>
+              </a:spcAft>
+              <a:buNone/>
+            </a:pPr>
+            <a:r>
+              <a:rPr lang="en-US" sz="2000" b="1" dirty="0">
+                <a:solidFill>
+                  <a:schemeClr val="accent1"/>
+                </a:solidFill>
+              </a:rPr>
+              <a:t>효과 크기</a:t>
+            </a:r>
+            <a:endParaRPr lang="en-US" sz="1500" dirty="0"/>
+          </a:p>
+          <a:p>
+            <a:pPr marL="342900" indent="-342900">
+              <a:spcAft>
+                <a:spcPts val="800"/>
+              </a:spcAft>
+              <a:buSzPct val="100000"/>
+              <a:buChar char="•"/>
+            </a:pPr>
+            <a:r>
+              <a:rPr lang="en-US" sz="1500" dirty="0">
+                <a:solidFill>
+                  <a:schemeClr val="tx1"/>
+                </a:solidFill>
+              </a:rPr>
+              <a:t>구간의 하한이어도 의미 있나?</a:t>
+            </a:r>
+            <a:endParaRPr lang="en-US" sz="1500" dirty="0"/>
+          </a:p>
+          <a:p>
+            <a:pPr marL="342900" indent="-342900">
+              <a:spcAft>
+                <a:spcPts val="800"/>
+              </a:spcAft>
+              <a:buSzPct val="100000"/>
+              <a:buChar char="•"/>
+            </a:pPr>
+            <a:r>
+              <a:rPr lang="en-US" sz="1500" dirty="0">
+                <a:solidFill>
+                  <a:schemeClr val="tx1"/>
+                </a:solidFill>
+              </a:rPr>
+              <a:t>몇 명에게 영향을 주나?</a:t>
+            </a:r>
+            <a:endParaRPr lang="en-US" sz="1500" dirty="0"/>
+          </a:p>
+          <a:p>
+            <a:pPr marL="342900" indent="-342900">
+              <a:spcAft>
+                <a:spcPts val="800"/>
+              </a:spcAft>
+              <a:buSzPct val="100000"/>
+              <a:buChar char="•"/>
+            </a:pPr>
+            <a:r>
+              <a:rPr lang="en-US" sz="1500" dirty="0">
+                <a:solidFill>
+                  <a:schemeClr val="tx1"/>
+                </a:solidFill>
+              </a:rPr>
+              <a:t>장기적으로 유지될 효과인가?</a:t>
+            </a:r>
+            <a:endParaRPr lang="en-US" sz="1500" dirty="0"/>
+          </a:p>
+        </p:txBody>
+      </p:sp>
+      <p:sp>
+        <p:nvSpPr>
+          <p:cNvPr id="6" name="Text 3"/>
+          <p:cNvSpPr txBox="1"/>
+          <p:nvPr/>
+        </p:nvSpPr>
+        <p:spPr>
+          <a:xfrm>
+            <a:off x="3977640" y="1828800"/>
+            <a:ext cx="365760" cy="548640"/>
+          </a:xfrm>
+          <a:prstGeom prst="rect">
+            <a:avLst/>
+          </a:prstGeom>
+          <a:noFill/>
+          <a:ln/>
+        </p:spPr>
+        <p:txBody>
+          <a:bodyPr wrap="square" lIns="0" tIns="0" rIns="0" bIns="0" rtlCol="0" anchor="t"/>
+          <a:lstStyle/>
+          <a:p>
+            <a:pPr algn="ctr" indent="0" marL="0">
+              <a:buNone/>
+            </a:pPr>
+            <a:r>
+              <a:rPr lang="en-US" sz="3000" b="1" dirty="0">
+                <a:solidFill>
+                  <a:schemeClr val="accent6"/>
+                </a:solidFill>
+              </a:rPr>
+              <a:t>×</a:t>
+            </a:r>
+            <a:endParaRPr lang="en-US" sz="3000" dirty="0"/>
+          </a:p>
+        </p:txBody>
+      </p:sp>
+      <p:sp>
+        <p:nvSpPr>
+          <p:cNvPr id="7" name="Text 4"/>
+          <p:cNvSpPr txBox="1"/>
+          <p:nvPr/>
+        </p:nvSpPr>
+        <p:spPr>
+          <a:xfrm>
+            <a:off x="4343400" y="1874520"/>
+            <a:ext cx="3383280" cy="2377440"/>
+          </a:xfrm>
+          <a:prstGeom prst="rect">
+            <a:avLst/>
+          </a:prstGeom>
+          <a:noFill/>
+          <a:ln/>
+        </p:spPr>
+        <p:txBody>
+          <a:bodyPr wrap="square" lIns="0" tIns="0" rIns="0" bIns="0" rtlCol="0" anchor="t"/>
+          <a:lstStyle/>
+          <a:p>
+            <a:pPr indent="0" marL="0">
+              <a:spcAft>
+                <a:spcPts val="1000"/>
+              </a:spcAft>
+              <a:buNone/>
+            </a:pPr>
+            <a:r>
+              <a:rPr lang="en-US" sz="2000" b="1" dirty="0">
+                <a:solidFill>
+                  <a:schemeClr val="accent5"/>
+                </a:solidFill>
+              </a:rPr>
+              <a:t>비용</a:t>
+            </a:r>
+            <a:endParaRPr lang="en-US" sz="1500" dirty="0"/>
+          </a:p>
+          <a:p>
+            <a:pPr marL="342900" indent="-342900">
+              <a:spcAft>
+                <a:spcPts val="800"/>
+              </a:spcAft>
+              <a:buSzPct val="100000"/>
+              <a:buChar char="•"/>
+            </a:pPr>
+            <a:r>
+              <a:rPr lang="en-US" sz="1500" dirty="0">
+                <a:solidFill>
+                  <a:schemeClr val="tx1"/>
+                </a:solidFill>
+              </a:rPr>
+              <a:t>구현·운영·유지보수 비용</a:t>
+            </a:r>
+            <a:endParaRPr lang="en-US" sz="1500" dirty="0"/>
+          </a:p>
+          <a:p>
+            <a:pPr marL="342900" indent="-342900">
+              <a:spcAft>
+                <a:spcPts val="800"/>
+              </a:spcAft>
+              <a:buSzPct val="100000"/>
+              <a:buChar char="•"/>
+            </a:pPr>
+            <a:r>
+              <a:rPr lang="en-US" sz="1500" dirty="0">
+                <a:solidFill>
+                  <a:schemeClr val="tx1"/>
+                </a:solidFill>
+              </a:rPr>
+              <a:t>다른 실험 기회를 막는 비용</a:t>
+            </a:r>
+            <a:endParaRPr lang="en-US" sz="1500" dirty="0"/>
+          </a:p>
+          <a:p>
+            <a:pPr marL="342900" indent="-342900">
+              <a:spcAft>
+                <a:spcPts val="800"/>
+              </a:spcAft>
+              <a:buSzPct val="100000"/>
+              <a:buChar char="•"/>
+            </a:pPr>
+            <a:r>
+              <a:rPr lang="en-US" sz="1500" dirty="0">
+                <a:solidFill>
+                  <a:schemeClr val="tx1"/>
+                </a:solidFill>
+              </a:rPr>
+              <a:t>복잡도가 늘어나는 비용</a:t>
+            </a:r>
+            <a:endParaRPr lang="en-US" sz="1500" dirty="0"/>
+          </a:p>
+        </p:txBody>
+      </p:sp>
+      <p:sp>
+        <p:nvSpPr>
+          <p:cNvPr id="8" name="Text 5"/>
+          <p:cNvSpPr txBox="1"/>
+          <p:nvPr/>
+        </p:nvSpPr>
+        <p:spPr>
+          <a:xfrm>
+            <a:off x="7680960" y="1828800"/>
+            <a:ext cx="365760" cy="548640"/>
+          </a:xfrm>
+          <a:prstGeom prst="rect">
+            <a:avLst/>
+          </a:prstGeom>
+          <a:noFill/>
+          <a:ln/>
+        </p:spPr>
+        <p:txBody>
+          <a:bodyPr wrap="square" lIns="0" tIns="0" rIns="0" bIns="0" rtlCol="0" anchor="t"/>
+          <a:lstStyle/>
+          <a:p>
+            <a:pPr algn="ctr" indent="0" marL="0">
+              <a:buNone/>
+            </a:pPr>
+            <a:r>
+              <a:rPr lang="en-US" sz="3000" b="1" dirty="0">
+                <a:solidFill>
+                  <a:schemeClr val="accent6"/>
+                </a:solidFill>
+              </a:rPr>
+              <a:t>×</a:t>
+            </a:r>
+            <a:endParaRPr lang="en-US" sz="3000" dirty="0"/>
+          </a:p>
+        </p:txBody>
+      </p:sp>
+      <p:sp>
+        <p:nvSpPr>
+          <p:cNvPr id="9" name="Text 6"/>
+          <p:cNvSpPr txBox="1"/>
+          <p:nvPr/>
+        </p:nvSpPr>
+        <p:spPr>
+          <a:xfrm>
+            <a:off x="8046720" y="1874520"/>
+            <a:ext cx="3383280" cy="2377440"/>
+          </a:xfrm>
+          <a:prstGeom prst="rect">
+            <a:avLst/>
+          </a:prstGeom>
+          <a:noFill/>
+          <a:ln/>
+        </p:spPr>
+        <p:txBody>
+          <a:bodyPr wrap="square" lIns="0" tIns="0" rIns="0" bIns="0" rtlCol="0" anchor="t"/>
+          <a:lstStyle/>
+          <a:p>
+            <a:pPr indent="0" marL="0">
+              <a:spcAft>
+                <a:spcPts val="1000"/>
+              </a:spcAft>
+              <a:buNone/>
+            </a:pPr>
+            <a:r>
+              <a:rPr lang="en-US" sz="2000" b="1" dirty="0">
+                <a:solidFill>
+                  <a:schemeClr val="accent4"/>
+                </a:solidFill>
+              </a:rPr>
+              <a:t>리스크</a:t>
+            </a:r>
+            <a:endParaRPr lang="en-US" sz="1500" dirty="0"/>
+          </a:p>
+          <a:p>
+            <a:pPr marL="342900" indent="-342900">
+              <a:spcAft>
+                <a:spcPts val="800"/>
+              </a:spcAft>
+              <a:buSzPct val="100000"/>
+              <a:buChar char="•"/>
+            </a:pPr>
+            <a:r>
+              <a:rPr lang="en-US" sz="1500" dirty="0">
+                <a:solidFill>
+                  <a:schemeClr val="tx1"/>
+                </a:solidFill>
+              </a:rPr>
+              <a:t>가드레일이 조금이라도 나빠졌나?</a:t>
+            </a:r>
+            <a:endParaRPr lang="en-US" sz="1500" dirty="0"/>
+          </a:p>
+          <a:p>
+            <a:pPr marL="342900" indent="-342900">
+              <a:spcAft>
+                <a:spcPts val="800"/>
+              </a:spcAft>
+              <a:buSzPct val="100000"/>
+              <a:buChar char="•"/>
+            </a:pPr>
+            <a:r>
+              <a:rPr lang="en-US" sz="1500" dirty="0">
+                <a:solidFill>
+                  <a:schemeClr val="tx1"/>
+                </a:solidFill>
+              </a:rPr>
+              <a:t>되돌리기 어려운 변화인가?</a:t>
+            </a:r>
+            <a:endParaRPr lang="en-US" sz="1500" dirty="0"/>
+          </a:p>
+          <a:p>
+            <a:pPr marL="342900" indent="-342900">
+              <a:spcAft>
+                <a:spcPts val="800"/>
+              </a:spcAft>
+              <a:buSzPct val="100000"/>
+              <a:buChar char="•"/>
+            </a:pPr>
+            <a:r>
+              <a:rPr lang="en-US" sz="1500" dirty="0">
+                <a:solidFill>
+                  <a:schemeClr val="tx1"/>
+                </a:solidFill>
+              </a:rPr>
+              <a:t>특정 세그먼트에 해가 가나?</a:t>
+            </a:r>
+            <a:endParaRPr lang="en-US" sz="1500" dirty="0"/>
+          </a:p>
+        </p:txBody>
+      </p:sp>
+      <p:sp>
+        <p:nvSpPr>
+          <p:cNvPr id="10" name="Text 7"/>
+          <p:cNvSpPr txBox="1"/>
+          <p:nvPr/>
+        </p:nvSpPr>
+        <p:spPr>
+          <a:xfrm>
+            <a:off x="640080" y="4846320"/>
+            <a:ext cx="10911535" cy="822960"/>
+          </a:xfrm>
+          <a:prstGeom prst="rect">
+            <a:avLst/>
+          </a:prstGeom>
+          <a:noFill/>
+          <a:ln/>
+        </p:spPr>
+        <p:txBody>
+          <a:bodyPr wrap="square" lIns="0" tIns="0" rIns="0" bIns="0" rtlCol="0" anchor="t"/>
+          <a:lstStyle/>
+          <a:p>
+            <a:pPr indent="0" marL="0">
+              <a:buNone/>
+            </a:pPr>
+            <a:r>
+              <a:rPr lang="en-US" sz="1500" b="1" dirty="0">
+                <a:solidFill>
+                  <a:schemeClr val="accent1"/>
+                </a:solidFill>
+              </a:rPr>
+              <a:t>실무에서 이렇게 말한다  </a:t>
+            </a:r>
+            <a:pPr indent="0" marL="0">
+              <a:buNone/>
+            </a:pPr>
+            <a:r>
+              <a:rPr lang="en-US" sz="1500" dirty="0">
+                <a:solidFill>
+                  <a:schemeClr val="tx1"/>
+                </a:solidFill>
+              </a:rPr>
+              <a:t>"전환율 +0.8%p, 하한 +0.1%p여도 연 유지비를 넘고 가드레일도 문제없어 50%에서 100%로 확대합니다"</a:t>
+            </a:r>
+            <a:endParaRPr lang="en-US" sz="1500" dirty="0"/>
+          </a:p>
+        </p:txBody>
+      </p:sp>
+      <p:sp>
+        <p:nvSpPr>
+          <p:cNvPr id="25" name="Slide Number Placeholder 0"/>
+          <p:cNvSpPr>
+            <a:spLocks noGrp="1"/>
+          </p:cNvSpPr>
+          <p:nvPr>
+            <p:ph type="sldNum" sz="quarter" idx="4294967295"/>
+          </p:nvPr>
+        </p:nvSpPr>
+        <p:spPr>
+          <a:xfrm>
+            <a:off x="11109960" y="6355080"/>
+            <a:ext cx="457200" cy="274320"/>
+          </a:xfrm>
+          <a:prstGeom prst="rect">
+            <a:avLst/>
+          </a:prstGeom>
+          <a:extLst>
+            <a:ext uri="{C572A759-6A51-4108-AA02-DFA0A04FC94B}">
+              <ma14:wrappingTextBoxFlag xmlns:ma14="http://schemas.microsoft.com/office/mac/drawingml/2011/main" val="0"/>
+            </a:ext>
+          </a:extLst>
+        </p:spPr>
+        <p:txBody>
+          <a:bodyPr/>
+          <a:lstStyle>
+            <a:lvl1pPr>
+              <a:defRPr sz="1000">
+                <a:solidFill>
+                  <a:srgbClr val="8A90A8"/>
+                </a:solidFill>
+              </a:defRPr>
+            </a:lvl1pPr>
+          </a:lstStyle>
+          <a:p>
+            <a:pPr algn="r"/>
+            <a:fld id="{F7021451-1387-4CA6-816F-3879F97B5CBC}" type="slidenum">
+              <a:rPr b="0" lang="en-US"/>
+              <a:t>68</a:t>
+            </a:fld>
+            <a:endParaRPr lang="en-US"/>
+          </a:p>
+        </p:txBody>
+      </p:sp>
+    </p:spTree>
+  </p:cSld>
+  <p:clrMapOvr>
+    <a:masterClrMapping/>
+  </p:clrMapOvr>
+</p:sld>
+</file>
+
+<file path=ppt/slides/slide69.xml><?xml version="1.0" encoding="utf-8"?>
+<p:sld xmlns:a="http://schemas.openxmlformats.org/drawingml/2006/main" xmlns:r="http://schemas.openxmlformats.org/officeDocument/2006/relationships" xmlns:p="http://schemas.openxmlformats.org/presentationml/2006/main">
+  <p:cSld name="Slide 69">
+    <p:spTree>
+      <p:nvGrpSpPr>
+        <p:cNvPr id="1" name=""/>
+        <p:cNvGrpSpPr/>
+        <p:nvPr/>
+      </p:nvGrpSpPr>
+      <p:grpSpPr>
+        <a:xfrm>
+          <a:off x="0" y="0"/>
+          <a:ext cx="0" cy="0"/>
+          <a:chOff x="0" y="0"/>
+          <a:chExt cx="0" cy="0"/>
+        </a:xfrm>
+      </p:grpSpPr>
+      <p:sp>
+        <p:nvSpPr>
+          <p:cNvPr id="2" name="Text 0"/>
+          <p:cNvSpPr/>
+          <p:nvPr>
+            <p:ph idx="100" type="title" hasCustomPrompt="1"/>
+          </p:nvPr>
+        </p:nvSpPr>
+        <p:spPr>
+          <a:xfrm>
+            <a:off x="640080" y="2011680"/>
+            <a:ext cx="6949440" cy="1737360"/>
+          </a:xfrm>
+          <a:prstGeom prst="rect">
+            <a:avLst/>
+          </a:prstGeom>
+          <a:noFill/>
+          <a:ln/>
+        </p:spPr>
+        <p:txBody>
+          <a:bodyPr wrap="square" lIns="0" tIns="0" rIns="0" bIns="0" rtlCol="0" anchor="b"/>
+          <a:lstStyle/>
+          <a:p>
+            <a:pPr algn="l" indent="0" marL="0">
+              <a:buNone/>
+            </a:pPr>
+            <a:r>
+              <a:rPr lang="en-US" sz="4400" b="1" dirty="0">
+                <a:solidFill>
+                  <a:srgbClr val="FFFFFF"/>
+                </a:solidFill>
+              </a:rPr>
+              <a:t>정리</a:t>
+            </a:r>
+            <a:endParaRPr lang="en-US" sz="4400" dirty="0"/>
+          </a:p>
+        </p:txBody>
+      </p:sp>
+      <p:sp>
+        <p:nvSpPr>
+          <p:cNvPr id="3" name="Text 0"/>
+          <p:cNvSpPr/>
+          <p:nvPr>
+            <p:ph idx="101" type="body" hasCustomPrompt="1"/>
+          </p:nvPr>
+        </p:nvSpPr>
+        <p:spPr>
+          <a:xfrm>
+            <a:off x="640080" y="3977640"/>
+            <a:ext cx="6583680" cy="1097280"/>
+          </a:xfrm>
+          <a:prstGeom prst="rect">
+            <a:avLst/>
+          </a:prstGeom>
+          <a:noFill/>
+          <a:ln/>
+        </p:spPr>
+        <p:txBody>
+          <a:bodyPr wrap="square" lIns="0" tIns="0" rIns="0" bIns="0" rtlCol="0" anchor="t"/>
+          <a:lstStyle/>
+          <a:p>
+            <a:pPr algn="l" indent="0" marL="0">
+              <a:buNone/>
+            </a:pPr>
+            <a:r>
+              <a:rPr lang="en-US" sz="2000" dirty="0">
+                <a:solidFill>
+                  <a:srgbClr val="AEB3CC"/>
+                </a:solidFill>
+              </a:rPr>
+              <a:t>이제 우리 조 사례로 직접 설계하고 돌려봅니다 → 실습 75분</a:t>
+            </a:r>
+            <a:endParaRPr lang="en-US" sz="2000" dirty="0"/>
+          </a:p>
+        </p:txBody>
+      </p:sp>
+      <p:sp>
+        <p:nvSpPr>
+          <p:cNvPr id="4" name="Text 2"/>
+          <p:cNvSpPr txBox="1"/>
+          <p:nvPr/>
+        </p:nvSpPr>
+        <p:spPr>
+          <a:xfrm>
+            <a:off x="6949440" y="2377440"/>
+            <a:ext cx="4754880" cy="2743200"/>
+          </a:xfrm>
+          <a:prstGeom prst="rect">
+            <a:avLst/>
+          </a:prstGeom>
+          <a:noFill/>
+          <a:ln/>
+        </p:spPr>
+        <p:txBody>
+          <a:bodyPr wrap="square" lIns="0" tIns="0" rIns="0" bIns="0" rtlCol="0" anchor="t"/>
+          <a:lstStyle/>
+          <a:p>
+            <a:pPr indent="0" marL="0">
+              <a:spcAft>
+                <a:spcPts val="1400"/>
+              </a:spcAft>
+              <a:buNone/>
+            </a:pPr>
+            <a:r>
+              <a:rPr lang="en-US" sz="1500" b="1" dirty="0">
+                <a:solidFill>
+                  <a:srgbClr val="FFFFFF"/>
+                </a:solidFill>
+              </a:rPr>
+              <a:t>1   랜덤 배정이 인과를 말할 수 있게 해 준다</a:t>
+            </a:r>
+            <a:endParaRPr lang="en-US" sz="1500" dirty="0"/>
+          </a:p>
+          <a:p>
+            <a:pPr indent="0" marL="0">
+              <a:spcAft>
+                <a:spcPts val="1400"/>
+              </a:spcAft>
+              <a:buNone/>
+            </a:pPr>
+            <a:r>
+              <a:rPr lang="en-US" sz="1500" b="1" dirty="0">
+                <a:solidFill>
+                  <a:srgbClr val="FFFFFF"/>
+                </a:solidFill>
+              </a:rPr>
+              <a:t>2   가설·OEC·가드레일·MDE는 실험 전에 정한다</a:t>
+            </a:r>
+            <a:endParaRPr lang="en-US" sz="1500" dirty="0"/>
+          </a:p>
+          <a:p>
+            <a:pPr indent="0" marL="0">
+              <a:buNone/>
+            </a:pPr>
+            <a:r>
+              <a:rPr lang="en-US" sz="1500" b="1" dirty="0">
+                <a:solidFill>
+                  <a:srgbClr val="FFFFFF"/>
+                </a:solidFill>
+              </a:rPr>
+              <a:t>3   결과는 구간으로 읽고, 배포 · 접기 · 재실험으로 닫는다</a:t>
+            </a:r>
+            <a:endParaRPr lang="en-US" sz="1500" dirty="0"/>
           </a:p>
         </p:txBody>
       </p:sp>
@@ -56294,6 +58502,365 @@
 </p:sld>
 </file>
 
+<file path=ppt/slides/slide70.xml><?xml version="1.0" encoding="utf-8"?>
+<p:sld xmlns:a="http://schemas.openxmlformats.org/drawingml/2006/main" xmlns:r="http://schemas.openxmlformats.org/officeDocument/2006/relationships" xmlns:p="http://schemas.openxmlformats.org/presentationml/2006/main">
+  <p:cSld name="Slide 70">
+    <p:spTree>
+      <p:nvGrpSpPr>
+        <p:cNvPr id="1" name=""/>
+        <p:cNvGrpSpPr/>
+        <p:nvPr/>
+      </p:nvGrpSpPr>
+      <p:grpSpPr>
+        <a:xfrm>
+          <a:off x="0" y="0"/>
+          <a:ext cx="0" cy="0"/>
+          <a:chOff x="0" y="0"/>
+          <a:chExt cx="0" cy="0"/>
+        </a:xfrm>
+      </p:grpSpPr>
+      <p:sp>
+        <p:nvSpPr>
+          <p:cNvPr id="2" name="Text 0"/>
+          <p:cNvSpPr/>
+          <p:nvPr>
+            <p:ph idx="100" type="body" hasCustomPrompt="1"/>
+          </p:nvPr>
+        </p:nvSpPr>
+        <p:spPr>
+          <a:xfrm>
+            <a:off x="640080" y="411480"/>
+            <a:ext cx="7315200" cy="320040"/>
+          </a:xfrm>
+          <a:prstGeom prst="rect">
+            <a:avLst/>
+          </a:prstGeom>
+          <a:noFill/>
+          <a:ln/>
+        </p:spPr>
+        <p:txBody>
+          <a:bodyPr wrap="square" lIns="0" tIns="0" rIns="0" bIns="0" rtlCol="0" anchor="t"/>
+          <a:lstStyle/>
+          <a:p>
+            <a:pPr algn="l" indent="0" marL="0">
+              <a:buNone/>
+            </a:pPr>
+            <a:r>
+              <a:rPr lang="en-US" sz="1500" b="1" dirty="0">
+                <a:solidFill>
+                  <a:srgbClr val="3A5BFF"/>
+                </a:solidFill>
+              </a:rPr>
+              <a:t>참고자료</a:t>
+            </a:r>
+            <a:endParaRPr lang="en-US" sz="1500" dirty="0"/>
+          </a:p>
+        </p:txBody>
+      </p:sp>
+      <p:sp>
+        <p:nvSpPr>
+          <p:cNvPr id="3" name="Text 0"/>
+          <p:cNvSpPr/>
+          <p:nvPr>
+            <p:ph idx="101" type="title" hasCustomPrompt="1"/>
+          </p:nvPr>
+        </p:nvSpPr>
+        <p:spPr>
+          <a:xfrm>
+            <a:off x="640080" y="749808"/>
+            <a:ext cx="10911535" cy="777240"/>
+          </a:xfrm>
+          <a:prstGeom prst="rect">
+            <a:avLst/>
+          </a:prstGeom>
+          <a:noFill/>
+          <a:ln/>
+        </p:spPr>
+        <p:txBody>
+          <a:bodyPr wrap="square" lIns="0" tIns="0" rIns="0" bIns="0" rtlCol="0" anchor="t"/>
+          <a:lstStyle/>
+          <a:p>
+            <a:pPr algn="l" indent="0" marL="0">
+              <a:buNone/>
+            </a:pPr>
+            <a:r>
+              <a:rPr lang="en-US" sz="2000" b="1" dirty="0">
+                <a:solidFill>
+                  <a:srgbClr val="1B1F3B"/>
+                </a:solidFill>
+              </a:rPr>
+              <a:t>더 읽을거리</a:t>
+            </a:r>
+            <a:endParaRPr lang="en-US" sz="2000" dirty="0"/>
+          </a:p>
+        </p:txBody>
+      </p:sp>
+      <p:sp>
+        <p:nvSpPr>
+          <p:cNvPr id="5" name="Text 2"/>
+          <p:cNvSpPr txBox="1"/>
+          <p:nvPr/>
+        </p:nvSpPr>
+        <p:spPr>
+          <a:xfrm>
+            <a:off x="640080" y="1737360"/>
+            <a:ext cx="10911535" cy="4389120"/>
+          </a:xfrm>
+          <a:prstGeom prst="rect">
+            <a:avLst/>
+          </a:prstGeom>
+          <a:noFill/>
+          <a:ln/>
+        </p:spPr>
+        <p:txBody>
+          <a:bodyPr wrap="square" lIns="0" tIns="0" rIns="0" bIns="0" rtlCol="0" anchor="t"/>
+          <a:lstStyle/>
+          <a:p>
+            <a:pPr indent="0" marL="0">
+              <a:buNone/>
+            </a:pPr>
+            <a:r>
+              <a:rPr lang="en-US" sz="1400" b="1" dirty="0">
+                <a:solidFill>
+                  <a:schemeClr val="accent1"/>
+                </a:solidFill>
+              </a:rPr>
+              <a:t>메인 교재</a:t>
+            </a:r>
+            <a:endParaRPr lang="en-US" sz="1400" dirty="0"/>
+          </a:p>
+          <a:p>
+            <a:pPr indent="0" marL="0">
+              <a:buNone/>
+            </a:pPr>
+            <a:r>
+              <a:rPr lang="en-US" sz="1400" dirty="0">
+                <a:solidFill>
+                  <a:schemeClr val="tx1"/>
+                </a:solidFill>
+              </a:rPr>
+              <a:t>Kohavi, Tang, Xu (2020). Trustworthy Online Controlled Experiments. Cambridge University Press</a:t>
+            </a:r>
+            <a:endParaRPr lang="en-US" sz="1400" dirty="0"/>
+          </a:p>
+          <a:p>
+            <a:pPr indent="0" marL="0">
+              <a:spcAft>
+                <a:spcPts val="1200"/>
+              </a:spcAft>
+              <a:buNone/>
+            </a:pPr>
+            <a:r>
+              <a:rPr lang="en-US" sz="1400" dirty="0">
+                <a:solidFill>
+                  <a:schemeClr val="tx1"/>
+                </a:solidFill>
+              </a:rPr>
+              <a:t>Udacity: A/B Testing by Google</a:t>
+            </a:r>
+            <a:endParaRPr lang="en-US" sz="1400" dirty="0"/>
+          </a:p>
+          <a:p>
+            <a:pPr indent="0" marL="0">
+              <a:buNone/>
+            </a:pPr>
+            <a:r>
+              <a:rPr lang="en-US" sz="1400" b="1" dirty="0">
+                <a:solidFill>
+                  <a:schemeClr val="accent1"/>
+                </a:solidFill>
+              </a:rPr>
+              <a:t>논문</a:t>
+            </a:r>
+            <a:endParaRPr lang="en-US" sz="1400" dirty="0"/>
+          </a:p>
+          <a:p>
+            <a:pPr indent="0" marL="0">
+              <a:buNone/>
+            </a:pPr>
+            <a:r>
+              <a:rPr lang="en-US" sz="1400" dirty="0">
+                <a:solidFill>
+                  <a:schemeClr val="tx1"/>
+                </a:solidFill>
+              </a:rPr>
+              <a:t>Kohavi et al. (2009). Controlled experiments on the web: survey and practical guide</a:t>
+            </a:r>
+            <a:endParaRPr lang="en-US" sz="1400" dirty="0"/>
+          </a:p>
+          <a:p>
+            <a:pPr indent="0" marL="0">
+              <a:buNone/>
+            </a:pPr>
+            <a:r>
+              <a:rPr lang="en-US" sz="1400" dirty="0">
+                <a:solidFill>
+                  <a:schemeClr val="tx1"/>
+                </a:solidFill>
+              </a:rPr>
+              <a:t>Deng et al. (2013). Improving the Sensitivity of Online Controlled Experiments by Utilizing Pre-Experiment Data. WSDM</a:t>
+            </a:r>
+            <a:endParaRPr lang="en-US" sz="1400" dirty="0"/>
+          </a:p>
+          <a:p>
+            <a:pPr indent="0" marL="0">
+              <a:spcAft>
+                <a:spcPts val="1200"/>
+              </a:spcAft>
+              <a:buNone/>
+            </a:pPr>
+            <a:r>
+              <a:rPr lang="en-US" sz="1400" dirty="0">
+                <a:solidFill>
+                  <a:schemeClr val="tx1"/>
+                </a:solidFill>
+              </a:rPr>
+              <a:t>Kohavi &amp; Thomke (2017). The Surprising Power of Online Experiments. Harvard Business Review</a:t>
+            </a:r>
+            <a:endParaRPr lang="en-US" sz="1400" dirty="0"/>
+          </a:p>
+          <a:p>
+            <a:pPr indent="0" marL="0">
+              <a:buNone/>
+            </a:pPr>
+            <a:r>
+              <a:rPr lang="en-US" sz="1400" b="1" dirty="0">
+                <a:solidFill>
+                  <a:schemeClr val="accent1"/>
+                </a:solidFill>
+              </a:rPr>
+              <a:t>더 깊이</a:t>
+            </a:r>
+            <a:endParaRPr lang="en-US" sz="1400" dirty="0"/>
+          </a:p>
+          <a:p>
+            <a:pPr indent="0" marL="0">
+              <a:buNone/>
+            </a:pPr>
+            <a:r>
+              <a:rPr lang="en-US" sz="1400" dirty="0">
+                <a:solidFill>
+                  <a:schemeClr val="tx1"/>
+                </a:solidFill>
+              </a:rPr>
+              <a:t>Causal Inference for the Brave and True (무료 온라인북)</a:t>
+            </a:r>
+            <a:endParaRPr lang="en-US" sz="1400" dirty="0"/>
+          </a:p>
+          <a:p>
+            <a:pPr indent="0" marL="0">
+              <a:spcAft>
+                <a:spcPts val="1200"/>
+              </a:spcAft>
+              <a:buNone/>
+            </a:pPr>
+            <a:r>
+              <a:rPr lang="en-US" sz="1400" dirty="0">
+                <a:solidFill>
+                  <a:schemeClr val="tx1"/>
+                </a:solidFill>
+              </a:rPr>
+              <a:t>Netflix Tech Blog, Uber Engineering, Eppo Blog, Statsig Blog · Evan Miller's A/B Test Calculator</a:t>
+            </a:r>
+            <a:endParaRPr lang="en-US" sz="1400" dirty="0"/>
+          </a:p>
+          <a:p>
+            <a:pPr indent="0" marL="0">
+              <a:buNone/>
+            </a:pPr>
+            <a:r>
+              <a:rPr lang="en-US" sz="1400" b="1" dirty="0">
+                <a:solidFill>
+                  <a:schemeClr val="accent1"/>
+                </a:solidFill>
+              </a:rPr>
+              <a:t>한국어</a:t>
+            </a:r>
+            <a:endParaRPr lang="en-US" sz="1400" dirty="0"/>
+          </a:p>
+          <a:p>
+            <a:pPr indent="0" marL="0">
+              <a:buNone/>
+            </a:pPr>
+            <a:r>
+              <a:rPr lang="en-US" sz="1400" dirty="0">
+                <a:solidFill>
+                  <a:schemeClr val="tx1"/>
+                </a:solidFill>
+              </a:rPr>
+              <a:t>데이터리안 "A/B 테스트란" → 데이터리안 YouTube → 토스 기술 블로그 "진짜 A/B 테스트"</a:t>
+            </a:r>
+            <a:endParaRPr lang="en-US" sz="1400" dirty="0"/>
+          </a:p>
+          <a:p>
+            <a:pPr indent="0" marL="0">
+              <a:buNone/>
+            </a:pPr>
+            <a:r>
+              <a:rPr lang="en-US" sz="1400" dirty="0">
+                <a:solidFill>
+                  <a:schemeClr val="tx1"/>
+                </a:solidFill>
+              </a:rPr>
+              <a:t>저장소 위키 docs/ab-testing: 01 왜 A/B 테스트 · 02 가설 수립 · 03 지표 설계 · 04 실험 단위 · 05·06 간섭 · 07 실험 플랫폼과 문화</a:t>
+            </a:r>
+            <a:endParaRPr lang="en-US" sz="1400" dirty="0"/>
+          </a:p>
+        </p:txBody>
+      </p:sp>
+      <p:sp>
+        <p:nvSpPr>
+          <p:cNvPr id="25" name="Slide Number Placeholder 0"/>
+          <p:cNvSpPr>
+            <a:spLocks noGrp="1"/>
+          </p:cNvSpPr>
+          <p:nvPr>
+            <p:ph type="sldNum" sz="quarter" idx="4294967295"/>
+          </p:nvPr>
+        </p:nvSpPr>
+        <p:spPr>
+          <a:xfrm>
+            <a:off x="11109960" y="6355080"/>
+            <a:ext cx="457200" cy="274320"/>
+          </a:xfrm>
+          <a:prstGeom prst="rect">
+            <a:avLst/>
+          </a:prstGeom>
+          <a:extLst>
+            <a:ext uri="{C572A759-6A51-4108-AA02-DFA0A04FC94B}">
+              <ma14:wrappingTextBoxFlag xmlns:ma14="http://schemas.microsoft.com/office/mac/drawingml/2011/main" val="0"/>
+            </a:ext>
+          </a:extLst>
+        </p:spPr>
+        <p:txBody>
+          <a:bodyPr/>
+          <a:lstStyle>
+            <a:lvl1pPr>
+              <a:defRPr sz="1000">
+                <a:solidFill>
+                  <a:srgbClr val="8A90A8"/>
+                </a:solidFill>
+              </a:defRPr>
+            </a:lvl1pPr>
+          </a:lstStyle>
+          <a:p>
+            <a:pPr algn="r"/>
+            <a:fld id="{F7021451-1387-4CA6-816F-3879F97B5CBC}" type="slidenum">
+              <a:rPr b="0" lang="en-US"/>
+              <a:t>70</a:t>
+            </a:fld>
+            <a:endParaRPr lang="en-US"/>
+          </a:p>
+        </p:txBody>
+      </p:sp>
+    </p:spTree>
+  </p:cSld>
+  <p:clrMapOvr>
+    <a:masterClrMapping/>
+  </p:clrMapOvr>
+</p:sld>
+</file>
+
 <file path=ppt/slides/slide8.xml><?xml version="1.0" encoding="utf-8"?>
 <p:sld xmlns:a="http://schemas.openxmlformats.org/drawingml/2006/main" xmlns:r="http://schemas.openxmlformats.org/officeDocument/2006/relationships" xmlns:p="http://schemas.openxmlformats.org/presentationml/2006/main">
   <p:cSld name="Slide 8">
@@ -60436,7 +63003,7 @@
                   <a:schemeClr val="accent6"/>
                 </a:solidFill>
               </a:rPr>
-              <a:t>그림: Kohavi, Tang, Xu (2020) 그림 1.1 · 출처: Kohavi &amp; Thomke (2017), HBR · 위키 01편 1장, 05편 1.3</a:t>
+              <a:t>그림: Kohavi, Tang, Xu (2020) 그림 1.1 · 출처: Kohavi &amp; Thomke (2017), HBR · 위키 01편 1장, 07편 1.3</a:t>
             </a:r>
             <a:endParaRPr lang="en-US" sz="1100" dirty="0"/>
           </a:p>
